--- a/submission/Obol_Arc_Programmable_Money_Deck_Final.pptx
+++ b/submission/Obol_Arc_Programmable_Money_Deck_Final.pptx
@@ -2,19 +2,19 @@
 <file path=ppt/presentation.xml><?xml version="1.0" encoding="utf-8"?>
 <p:presentation xmlns:p="http://schemas.openxmlformats.org/presentationml/2006/main">
   <p:sldMasterIdLst>
-    <p:sldMasterId xmlns:r="http://schemas.openxmlformats.org/officeDocument/2006/relationships" id="2147483648" r:id="R4fb312c48c1e4d5c"/>
+    <p:sldMasterId xmlns:r="http://schemas.openxmlformats.org/officeDocument/2006/relationships" id="2147483648" r:id="R5b5bc9437f2e4d62"/>
   </p:sldMasterIdLst>
   <p:notesMasterIdLst>
-    <p:notesMasterId xmlns:r="http://schemas.openxmlformats.org/officeDocument/2006/relationships" r:id="Rd1338de679704d55"/>
+    <p:notesMasterId xmlns:r="http://schemas.openxmlformats.org/officeDocument/2006/relationships" r:id="R51d61ed6284a4b9d"/>
   </p:notesMasterIdLst>
   <p:sldIdLst>
-    <p:sldId xmlns:r="http://schemas.openxmlformats.org/officeDocument/2006/relationships" id="256" r:id="R398207a3ca984929"/>
-    <p:sldId xmlns:r="http://schemas.openxmlformats.org/officeDocument/2006/relationships" id="257" r:id="Rf99edbb298154ee5"/>
-    <p:sldId xmlns:r="http://schemas.openxmlformats.org/officeDocument/2006/relationships" id="258" r:id="Re6ca47e616114687"/>
-    <p:sldId xmlns:r="http://schemas.openxmlformats.org/officeDocument/2006/relationships" id="259" r:id="R741f1e3ee78f4c88"/>
-    <p:sldId xmlns:r="http://schemas.openxmlformats.org/officeDocument/2006/relationships" id="260" r:id="R96a44576c0c647a4"/>
-    <p:sldId xmlns:r="http://schemas.openxmlformats.org/officeDocument/2006/relationships" id="261" r:id="Ree8a39e6725949a6"/>
-    <p:sldId xmlns:r="http://schemas.openxmlformats.org/officeDocument/2006/relationships" id="262" r:id="R46d13422ed01416e"/>
+    <p:sldId xmlns:r="http://schemas.openxmlformats.org/officeDocument/2006/relationships" id="256" r:id="R11bc1d227da84fd8"/>
+    <p:sldId xmlns:r="http://schemas.openxmlformats.org/officeDocument/2006/relationships" id="257" r:id="Rcd219b87036e426d"/>
+    <p:sldId xmlns:r="http://schemas.openxmlformats.org/officeDocument/2006/relationships" id="258" r:id="R72c94bb8d5c24c7b"/>
+    <p:sldId xmlns:r="http://schemas.openxmlformats.org/officeDocument/2006/relationships" id="259" r:id="R68818cb4ccd146d5"/>
+    <p:sldId xmlns:r="http://schemas.openxmlformats.org/officeDocument/2006/relationships" id="260" r:id="R93fd7dc7e1a449fe"/>
+    <p:sldId xmlns:r="http://schemas.openxmlformats.org/officeDocument/2006/relationships" id="261" r:id="R08e1ac203a95485d"/>
+    <p:sldId xmlns:r="http://schemas.openxmlformats.org/officeDocument/2006/relationships" id="262" r:id="Rf3d35a756e7c4ee9"/>
   </p:sldIdLst>
   <p:sldSz cx="12192000" cy="6858000"/>
   <p:notesSz cx="6858000" cy="9144000"/>
@@ -364,6 +364,24 @@
             </a:outerShdw>
           </a:effectLst>
         </a:effectStyle>
+        <a:effectStyle>
+          <a:effectLst>
+            <a:outerShdw blurRad="342900" dist="138686" dir="4443276">
+              <a:srgbClr val="000000">
+                <a:alpha val="36000"/>
+              </a:srgbClr>
+            </a:outerShdw>
+          </a:effectLst>
+        </a:effectStyle>
+        <a:effectStyle>
+          <a:effectLst>
+            <a:outerShdw blurRad="342900" dist="138686" dir="4443276">
+              <a:srgbClr val="000000">
+                <a:alpha val="34000"/>
+              </a:srgbClr>
+            </a:outerShdw>
+          </a:effectLst>
+        </a:effectStyle>
       </a:effectStyleLst>
       <a:bgFillStyleLst>
         <a:solidFill>
@@ -448,7 +466,7 @@
           <a:lstStyle xmlns:a="http://schemas.openxmlformats.org/drawingml/2006/main"/>
           <a:p xmlns:a="http://schemas.openxmlformats.org/drawingml/2006/main">
             <a:r>
-              <a:t>Obol turns each paid read into a programmable decision: authorize, settle, and prove.</a:t>
+              <a:t>Obol gives autonomous agents a programmable USDC budget for pay-per-read information. The core promise is precise: the agent can decide what is worth buying, the creator can be paid per use, and Arc can verify the resulting transfer proof.</a:t>
             </a:r>
           </a:p>
           <a:p xmlns:a="http://schemas.openxmlformats.org/drawingml/2006/main">
@@ -463,17 +481,17 @@
           </a:p>
           <a:p xmlns:a="http://schemas.openxmlformats.org/drawingml/2006/main">
             <a:r>
+              <a:t>- https://github.com/xiangchengzilema/obol-programmable-money</a:t>
+            </a:r>
+          </a:p>
+          <a:p xmlns:a="http://schemas.openxmlformats.org/drawingml/2006/main">
+            <a:r>
+              <a:t>- https://github.com/xiangchengzilema/obol-programmable-money/blob/main/README.md</a:t>
+            </a:r>
+          </a:p>
+          <a:p xmlns:a="http://schemas.openxmlformats.org/drawingml/2006/main">
+            <a:r>
               <a:t>- https://obol-programmable-money.onrender.com</a:t>
-            </a:r>
-          </a:p>
-          <a:p xmlns:a="http://schemas.openxmlformats.org/drawingml/2006/main">
-            <a:r>
-              <a:t>- https://github.com/xiangchengzilema/obol-programmable-money</a:t>
-            </a:r>
-          </a:p>
-          <a:p xmlns:a="http://schemas.openxmlformats.org/drawingml/2006/main">
-            <a:r>
-              <a:t>- https://github.com/xiangchengzilema/obol-programmable-money/blob/main/evidence/arc-testnet-agent-run-20260806.json</a:t>
             </a:r>
           </a:p>
           <a:p xmlns:a="http://schemas.openxmlformats.org/drawingml/2006/main">
@@ -548,7 +566,7 @@
           <a:lstStyle xmlns:a="http://schemas.openxmlformats.org/drawingml/2006/main"/>
           <a:p xmlns:a="http://schemas.openxmlformats.org/drawingml/2006/main">
             <a:r>
-              <a:t>The innovation is not a prettier checkout. It is accountable agency: the buyer has a bounded budget, a relevance threshold, a price cap, and a complete decision trace.</a:t>
+              <a:t>Subscriptions are too coarse for single machine reads, checkout is too manual for autonomous agents, and ordinary payment records do not explain the decision. Obol treats a read as a policy-governed purchase rather than a blank cheque.</a:t>
             </a:r>
           </a:p>
           <a:p xmlns:a="http://schemas.openxmlformats.org/drawingml/2006/main">
@@ -563,7 +581,17 @@
           </a:p>
           <a:p xmlns:a="http://schemas.openxmlformats.org/drawingml/2006/main">
             <a:r>
-              <a:t>- https://github.com/xiangchengzilema/obol-programmable-money</a:t>
+              <a:t>- https://github.com/xiangchengzilema/obol-programmable-money/blob/main/README.md</a:t>
+            </a:r>
+          </a:p>
+          <a:p xmlns:a="http://schemas.openxmlformats.org/drawingml/2006/main">
+            <a:r>
+              <a:t>- https://github.com/xiangchengzilema/obol-programmable-money/blob/main/PROGRAMMABLE_MONEY_SUBMISSION.md</a:t>
+            </a:r>
+          </a:p>
+          <a:p xmlns:a="http://schemas.openxmlformats.org/drawingml/2006/main">
+            <a:r>
+              <a:t>[/Sources]</a:t>
             </a:r>
           </a:p>
         </p:txBody>
@@ -633,7 +661,7 @@
           <a:lstStyle xmlns:a="http://schemas.openxmlformats.org/drawingml/2006/main"/>
           <a:p xmlns:a="http://schemas.openxmlformats.org/drawingml/2006/main">
             <a:r>
-              <a:t>The screenshot is a real capture from the current Obol build. The public playground stays fail-closed in mock mode; the published evaluation receipt is re-verified server-side against Arc Testnet RPC.</a:t>
+              <a:t>The judge flow is deterministic: set a budget, run the agent, and inspect buy, reuse, skip, and stop decisions. The public playground is intentionally forced mock and fail-closed. Its purpose is to make the product logic easy to review without pretending that anonymous visitors move real funds.</a:t>
             </a:r>
           </a:p>
           <a:p xmlns:a="http://schemas.openxmlformats.org/drawingml/2006/main">
@@ -653,12 +681,12 @@
           </a:p>
           <a:p xmlns:a="http://schemas.openxmlformats.org/drawingml/2006/main">
             <a:r>
-              <a:t>- https://github.com/xiangchengzilema/obol-programmable-money/blob/main/evidence/arc-testnet-agent-run-20260806.json</a:t>
-            </a:r>
-          </a:p>
-          <a:p xmlns:a="http://schemas.openxmlformats.org/drawingml/2006/main">
-            <a:r>
-              <a:t>- https://testnet.arcscan.app/tx/0x03a7e7c96283b545798d101d46a4fb48865bcb069fdba2311352fe9e56b92809</a:t>
+              <a:t>- https://github.com/xiangchengzilema/obol-programmable-money/blob/main/backend/wsgi.py</a:t>
+            </a:r>
+          </a:p>
+          <a:p xmlns:a="http://schemas.openxmlformats.org/drawingml/2006/main">
+            <a:r>
+              <a:t>- https://github.com/xiangchengzilema/obol-programmable-money/blob/main/backend/app.py</a:t>
             </a:r>
           </a:p>
           <a:p xmlns:a="http://schemas.openxmlformats.org/drawingml/2006/main">
@@ -733,7 +761,7 @@
           <a:lstStyle xmlns:a="http://schemas.openxmlformats.org/drawingml/2006/main"/>
           <a:p xmlns:a="http://schemas.openxmlformats.org/drawingml/2006/main">
             <a:r>
-              <a:t>The agent ranks sources, authorizes only the reads that pass policy, settles them, and leaves a record a person can audit. Reuse is explicit and does not create fake creator revenue.</a:t>
+              <a:t>Obol makes money part of the agent loop. It first scores value, then applies explicit spending guards, and only then settles. Every outcome includes a human-readable explanation and the before-and-after budget state.</a:t>
             </a:r>
           </a:p>
           <a:p xmlns:a="http://schemas.openxmlformats.org/drawingml/2006/main">
@@ -748,7 +776,22 @@
           </a:p>
           <a:p xmlns:a="http://schemas.openxmlformats.org/drawingml/2006/main">
             <a:r>
-              <a:t>- https://github.com/xiangchengzilema/obol-programmable-money</a:t>
+              <a:t>- https://github.com/xiangchengzilema/obol-programmable-money/blob/main/backend/agent.py</a:t>
+            </a:r>
+          </a:p>
+          <a:p xmlns:a="http://schemas.openxmlformats.org/drawingml/2006/main">
+            <a:r>
+              <a:t>- https://github.com/xiangchengzilema/obol-programmable-money/blob/main/backend/app.py</a:t>
+            </a:r>
+          </a:p>
+          <a:p xmlns:a="http://schemas.openxmlformats.org/drawingml/2006/main">
+            <a:r>
+              <a:t>- https://github.com/xiangchengzilema/obol-programmable-money/blob/main/ARC_ITERATION_CHANGELOG.md</a:t>
+            </a:r>
+          </a:p>
+          <a:p xmlns:a="http://schemas.openxmlformats.org/drawingml/2006/main">
+            <a:r>
+              <a:t>[/Sources]</a:t>
             </a:r>
           </a:p>
         </p:txBody>
@@ -818,7 +861,7 @@
           <a:lstStyle xmlns:a="http://schemas.openxmlformats.org/drawingml/2006/main"/>
           <a:p xmlns:a="http://schemas.openxmlformats.org/drawingml/2006/main">
             <a:r>
-              <a:t>This is a disclosed testnet evaluation transfer, not organic usage, production revenue, or a mainnet payment. The policy spent one cent, preserved four cents, and met its 60% coverage target.</a:t>
+              <a:t>This is the submission's real Arc evidence. A policy-constrained agent spent one cent from a five-cent budget, preserved four cents, and stopped after reaching 67 percent coverage. Circle reported COMPLETE and two Arc RPC endpoints returned the same successful receipt. This was testnet evaluation activity, not production revenue or public-demo activity.</a:t>
             </a:r>
           </a:p>
           <a:p xmlns:a="http://schemas.openxmlformats.org/drawingml/2006/main">
@@ -839,6 +882,11 @@
           <a:p xmlns:a="http://schemas.openxmlformats.org/drawingml/2006/main">
             <a:r>
               <a:t>- https://testnet.arcscan.app/tx/0x03a7e7c96283b545798d101d46a4fb48865bcb069fdba2311352fe9e56b92809</a:t>
+            </a:r>
+          </a:p>
+          <a:p xmlns:a="http://schemas.openxmlformats.org/drawingml/2006/main">
+            <a:r>
+              <a:t>- https://docs.arc.io/arc/references/connect-to-arc</a:t>
             </a:r>
           </a:p>
           <a:p xmlns:a="http://schemas.openxmlformats.org/drawingml/2006/main">
@@ -913,7 +961,7 @@
           <a:lstStyle xmlns:a="http://schemas.openxmlformats.org/drawingml/2006/main"/>
           <a:p xmlns:a="http://schemas.openxmlformats.org/drawingml/2006/main">
             <a:r>
-              <a:t>The verifier does more than check for a successful transaction. It requires the published evidence to match the Arc transaction payer and token contract, the USDC Transfer recipient and amount, and the receipt block and hash.</a:t>
+              <a:t>Obol is an openly disclosed continuation of a frozen Lepton MVP, not a from-scratch claim. This Arc iteration adds request-scoped spending guards, policy and stop audits, a fail-closed deployment posture, fresh testnet evidence, and stricter server-side verification. The current build passes 46 backend tests.</a:t>
             </a:r>
           </a:p>
           <a:p xmlns:a="http://schemas.openxmlformats.org/drawingml/2006/main">
@@ -928,22 +976,22 @@
           </a:p>
           <a:p xmlns:a="http://schemas.openxmlformats.org/drawingml/2006/main">
             <a:r>
-              <a:t>- https://docs.arc.io/arc/references/connect-to-arc</a:t>
-            </a:r>
-          </a:p>
-          <a:p xmlns:a="http://schemas.openxmlformats.org/drawingml/2006/main">
-            <a:r>
-              <a:t>- https://developers.circle.com/stablecoins/usdc-contract-addresses</a:t>
-            </a:r>
-          </a:p>
-          <a:p xmlns:a="http://schemas.openxmlformats.org/drawingml/2006/main">
-            <a:r>
-              <a:t>- https://github.com/xiangchengzilema/obol-programmable-money/blob/main/backend/arc_verifier.py</a:t>
-            </a:r>
-          </a:p>
-          <a:p xmlns:a="http://schemas.openxmlformats.org/drawingml/2006/main">
-            <a:r>
-              <a:t>- https://github.com/xiangchengzilema/obol-programmable-money/blob/main/evidence/arc-testnet-agent-run-20260806.json</a:t>
+              <a:t>- https://github.com/xiangchengzilema/obol-programmable-money/blob/main/ARC_ITERATION_CHANGELOG.md</a:t>
+            </a:r>
+          </a:p>
+          <a:p xmlns:a="http://schemas.openxmlformats.org/drawingml/2006/main">
+            <a:r>
+              <a:t>- https://github.com/xiangchengzilema/obol-programmable-money/blob/main/backend/test_obol.py</a:t>
+            </a:r>
+          </a:p>
+          <a:p xmlns:a="http://schemas.openxmlformats.org/drawingml/2006/main">
+            <a:r>
+              <a:t>- https://github.com/xiangchengzilema/obol-programmable-money/blob/main/backend/circle_service.py</a:t>
+            </a:r>
+          </a:p>
+          <a:p xmlns:a="http://schemas.openxmlformats.org/drawingml/2006/main">
+            <a:r>
+              <a:t>- https://github.com/xiangchengzilema/obol-programmable-money/blob/main/backend/x402.py</a:t>
             </a:r>
           </a:p>
           <a:p xmlns:a="http://schemas.openxmlformats.org/drawingml/2006/main">
@@ -1018,7 +1066,7 @@
           <a:lstStyle xmlns:a="http://schemas.openxmlformats.org/drawingml/2006/main"/>
           <a:p xmlns:a="http://schemas.openxmlformats.org/drawingml/2006/main">
             <a:r>
-              <a:t>The demo and repository are public. Add the final pitch-video URL to the submission form after recording; none is fabricated in this deck.</a:t>
+              <a:t>The closing thesis is simple: machine reading should carry a price, a policy, and a receipt. The public demo, public repository, final video, and Arcscan evidence are all available for review. The public playground remains forced mock; the live proof is a separate Arc Testnet evaluation.</a:t>
             </a:r>
           </a:p>
           <a:p xmlns:a="http://schemas.openxmlformats.org/drawingml/2006/main">
@@ -1039,6 +1087,16 @@
           <a:p xmlns:a="http://schemas.openxmlformats.org/drawingml/2006/main">
             <a:r>
               <a:t>- https://github.com/xiangchengzilema/obol-programmable-money</a:t>
+            </a:r>
+          </a:p>
+          <a:p xmlns:a="http://schemas.openxmlformats.org/drawingml/2006/main">
+            <a:r>
+              <a:t>- https://github.com/xiangchengzilema/obol-programmable-money/raw/refs/heads/main/media/submit/Obol_Arc_Programmable_Money_Demo_Final.mp4</a:t>
+            </a:r>
+          </a:p>
+          <a:p xmlns:a="http://schemas.openxmlformats.org/drawingml/2006/main">
+            <a:r>
+              <a:t>- https://testnet.arcscan.app/tx/0x03a7e7c96283b545798d101d46a4fb48865bcb069fdba2311352fe9e56b92809</a:t>
             </a:r>
           </a:p>
           <a:p xmlns:a="http://schemas.openxmlformats.org/drawingml/2006/main">
@@ -1111,7 +1169,7 @@
   </p:cSld>
   <p:clrMap bg1="lt1" tx1="dk1" bg2="lt2" tx2="dk2" accent1="accent1" accent2="accent2" accent3="accent3" accent4="accent4" accent5="accent5" accent6="accent6" hlink="hlink" folHlink="folHlink"/>
   <p:sldLayoutIdLst>
-    <p:sldLayoutId xmlns:r="http://schemas.openxmlformats.org/officeDocument/2006/relationships" id="2147483649" r:id="Rdedb7cdbf56040f8"/>
+    <p:sldLayoutId xmlns:r="http://schemas.openxmlformats.org/officeDocument/2006/relationships" id="2147483649" r:id="Rf510274167ed4648"/>
   </p:sldLayoutIdLst>
   <p:txStyles>
     <p:titleStyle>
@@ -1641,6 +1699,13 @@
 <file path=ppt/slides/slide1.xml><?xml version="1.0" encoding="utf-8"?>
 <p:sld xmlns:p="http://schemas.openxmlformats.org/presentationml/2006/main">
   <p:cSld>
+    <p:bg>
+      <p:bgPr>
+        <a:solidFill xmlns:a="http://schemas.openxmlformats.org/drawingml/2006/main">
+          <a:srgbClr val="061018"/>
+        </a:solidFill>
+      </p:bgPr>
+    </p:bg>
     <p:spTree>
       <p:nvGrpSpPr>
         <p:cNvPr id="1" name=""/>
@@ -1666,31 +1731,55 @@
         </p:nvSpPr>
         <p:spPr>
           <a:xfrm xmlns:a="http://schemas.openxmlformats.org/drawingml/2006/main">
-            <a:off x="393668" y="1738789"/>
-            <a:ext cx="9448800" cy="2491454"/>
+            <a:off x="685800" y="1466850"/>
+            <a:ext cx="5619750" cy="1047750"/>
           </a:xfrm>
           <a:prstGeom xmlns:a="http://schemas.openxmlformats.org/drawingml/2006/main" prst="rect">
             <a:avLst/>
           </a:prstGeom>
+          <a:solidFill xmlns:a="http://schemas.openxmlformats.org/drawingml/2006/main">
+            <a:srgbClr val="000000">
+              <a:alpha val="0"/>
+            </a:srgbClr>
+          </a:solidFill>
+          <a:ln xmlns:a="http://schemas.openxmlformats.org/drawingml/2006/main" w="0">
+            <a:solidFill>
+              <a:srgbClr val="000000">
+                <a:alpha val="0"/>
+              </a:srgbClr>
+            </a:solidFill>
+            <a:prstDash val="solid"/>
+          </a:ln>
         </p:spPr>
         <p:txBody>
-          <a:bodyPr xmlns:a="http://schemas.openxmlformats.org/drawingml/2006/main" lIns="0" tIns="0" rIns="0" bIns="0" anchor="b">
+          <a:bodyPr xmlns:a="http://schemas.openxmlformats.org/drawingml/2006/main" wrap="square" lIns="0" tIns="0" rIns="0" bIns="0" anchor="ctr">
             <a:noAutofit/>
           </a:bodyPr>
           <a:lstStyle xmlns:a="http://schemas.openxmlformats.org/drawingml/2006/main"/>
           <a:p xmlns:a="http://schemas.openxmlformats.org/drawingml/2006/main">
             <a:pPr algn="l">
+              <a:lnSpc>
+                <a:spcPct val="90000"/>
+              </a:lnSpc>
               <a:buNone/>
-              <a:defRPr sz="6000">
-                <a:solidFill>
-                  <a:srgbClr val="000000"/>
-                </a:solidFill>
-                <a:latin typeface="Helvetica Neue"/>
-                <a:ea typeface="Helvetica Neue"/>
-                <a:cs typeface="Helvetica Neue"/>
-              </a:defRPr>
-            </a:pPr>
-            <a:r>
+              <a:defRPr sz="6900" b="1">
+                <a:solidFill>
+                  <a:srgbClr val="F4F7F5"/>
+                </a:solidFill>
+                <a:latin typeface="Segoe UI"/>
+                <a:ea typeface="Segoe UI"/>
+                <a:cs typeface="Segoe UI"/>
+              </a:defRPr>
+            </a:pPr>
+            <a:r>
+              <a:rPr sz="6900" b="1">
+                <a:solidFill>
+                  <a:srgbClr val="F4F7F5"/>
+                </a:solidFill>
+                <a:latin typeface="Segoe UI"/>
+                <a:ea typeface="Segoe UI"/>
+                <a:cs typeface="Segoe UI"/>
+              </a:rPr>
               <a:t>Obol</a:t>
             </a:r>
           </a:p>
@@ -1712,32 +1801,110 @@
         </p:nvSpPr>
         <p:spPr>
           <a:xfrm xmlns:a="http://schemas.openxmlformats.org/drawingml/2006/main">
-            <a:off x="393668" y="4742212"/>
-            <a:ext cx="5702332" cy="1080230"/>
+            <a:off x="704850" y="2781300"/>
+            <a:ext cx="5619750" cy="2057400"/>
           </a:xfrm>
           <a:prstGeom xmlns:a="http://schemas.openxmlformats.org/drawingml/2006/main" prst="rect">
             <a:avLst/>
           </a:prstGeom>
+          <a:solidFill xmlns:a="http://schemas.openxmlformats.org/drawingml/2006/main">
+            <a:srgbClr val="000000">
+              <a:alpha val="0"/>
+            </a:srgbClr>
+          </a:solidFill>
+          <a:ln xmlns:a="http://schemas.openxmlformats.org/drawingml/2006/main" w="0">
+            <a:solidFill>
+              <a:srgbClr val="000000">
+                <a:alpha val="0"/>
+              </a:srgbClr>
+            </a:solidFill>
+            <a:prstDash val="solid"/>
+          </a:ln>
         </p:spPr>
         <p:txBody>
-          <a:bodyPr xmlns:a="http://schemas.openxmlformats.org/drawingml/2006/main" lIns="0" tIns="0" rIns="0" bIns="0">
+          <a:bodyPr xmlns:a="http://schemas.openxmlformats.org/drawingml/2006/main" wrap="square" lIns="0" tIns="0" rIns="0" bIns="0" anchor="t">
             <a:noAutofit/>
           </a:bodyPr>
           <a:lstStyle xmlns:a="http://schemas.openxmlformats.org/drawingml/2006/main"/>
           <a:p xmlns:a="http://schemas.openxmlformats.org/drawingml/2006/main">
             <a:pPr algn="l">
+              <a:lnSpc>
+                <a:spcPct val="94000"/>
+              </a:lnSpc>
               <a:buNone/>
-              <a:defRPr sz="2400">
-                <a:solidFill>
-                  <a:srgbClr val="000000"/>
-                </a:solidFill>
-                <a:latin typeface="Helvetica Neue"/>
-                <a:ea typeface="Helvetica Neue"/>
-                <a:cs typeface="Helvetica Neue"/>
-              </a:defRPr>
-            </a:pPr>
-            <a:r>
-              <a:t>Programmable pay-per-read for AI agents</a:t>
+              <a:defRPr sz="3600" b="0">
+                <a:solidFill>
+                  <a:srgbClr val="F4F7F5"/>
+                </a:solidFill>
+                <a:latin typeface="Segoe UI"/>
+                <a:ea typeface="Segoe UI"/>
+                <a:cs typeface="Segoe UI"/>
+              </a:defRPr>
+            </a:pPr>
+            <a:r>
+              <a:rPr sz="3600" b="0">
+                <a:solidFill>
+                  <a:srgbClr val="F4F7F5"/>
+                </a:solidFill>
+                <a:latin typeface="Segoe UI"/>
+                <a:ea typeface="Segoe UI"/>
+                <a:cs typeface="Segoe UI"/>
+              </a:rPr>
+              <a:t>Agent reads.</a:t>
+            </a:r>
+          </a:p>
+          <a:p xmlns:a="http://schemas.openxmlformats.org/drawingml/2006/main">
+            <a:pPr algn="l">
+              <a:lnSpc>
+                <a:spcPct val="94000"/>
+              </a:lnSpc>
+              <a:buNone/>
+              <a:defRPr sz="3600" b="0">
+                <a:solidFill>
+                  <a:srgbClr val="F4F7F5"/>
+                </a:solidFill>
+                <a:latin typeface="Segoe UI"/>
+                <a:ea typeface="Segoe UI"/>
+                <a:cs typeface="Segoe UI"/>
+              </a:defRPr>
+            </a:pPr>
+            <a:r>
+              <a:rPr sz="3600" b="0">
+                <a:solidFill>
+                  <a:srgbClr val="F4F7F5"/>
+                </a:solidFill>
+                <a:latin typeface="Segoe UI"/>
+                <a:ea typeface="Segoe UI"/>
+                <a:cs typeface="Segoe UI"/>
+              </a:rPr>
+              <a:t>Creator gets paid.</a:t>
+            </a:r>
+          </a:p>
+          <a:p xmlns:a="http://schemas.openxmlformats.org/drawingml/2006/main">
+            <a:pPr algn="l">
+              <a:lnSpc>
+                <a:spcPct val="94000"/>
+              </a:lnSpc>
+              <a:buNone/>
+              <a:defRPr sz="3600" b="0">
+                <a:solidFill>
+                  <a:srgbClr val="F4F7F5"/>
+                </a:solidFill>
+                <a:latin typeface="Segoe UI"/>
+                <a:ea typeface="Segoe UI"/>
+                <a:cs typeface="Segoe UI"/>
+              </a:defRPr>
+            </a:pPr>
+            <a:r>
+              <a:rPr sz="3600" b="0">
+                <a:solidFill>
+                  <a:srgbClr val="F4F7F5"/>
+                </a:solidFill>
+                <a:latin typeface="Segoe UI"/>
+                <a:ea typeface="Segoe UI"/>
+                <a:cs typeface="Segoe UI"/>
+              </a:rPr>
+              <a:t>Arc verifies the transfer.</a:t>
             </a:r>
           </a:p>
         </p:txBody>
@@ -1758,32 +1925,56 @@
         </p:nvSpPr>
         <p:spPr>
           <a:xfrm xmlns:a="http://schemas.openxmlformats.org/drawingml/2006/main">
-            <a:off x="393668" y="392240"/>
-            <a:ext cx="5702332" cy="649129"/>
+            <a:off x="685800" y="514350"/>
+            <a:ext cx="5905500" cy="323850"/>
           </a:xfrm>
           <a:prstGeom xmlns:a="http://schemas.openxmlformats.org/drawingml/2006/main" prst="rect">
             <a:avLst/>
           </a:prstGeom>
+          <a:solidFill xmlns:a="http://schemas.openxmlformats.org/drawingml/2006/main">
+            <a:srgbClr val="000000">
+              <a:alpha val="0"/>
+            </a:srgbClr>
+          </a:solidFill>
+          <a:ln xmlns:a="http://schemas.openxmlformats.org/drawingml/2006/main" w="0">
+            <a:solidFill>
+              <a:srgbClr val="000000">
+                <a:alpha val="0"/>
+              </a:srgbClr>
+            </a:solidFill>
+            <a:prstDash val="solid"/>
+          </a:ln>
         </p:spPr>
         <p:txBody>
-          <a:bodyPr xmlns:a="http://schemas.openxmlformats.org/drawingml/2006/main" lIns="0" tIns="0" rIns="0" bIns="0">
+          <a:bodyPr xmlns:a="http://schemas.openxmlformats.org/drawingml/2006/main" wrap="square" lIns="0" tIns="0" rIns="0" bIns="0" anchor="ctr">
             <a:noAutofit/>
           </a:bodyPr>
           <a:lstStyle xmlns:a="http://schemas.openxmlformats.org/drawingml/2006/main"/>
           <a:p xmlns:a="http://schemas.openxmlformats.org/drawingml/2006/main">
             <a:pPr algn="l">
+              <a:lnSpc>
+                <a:spcPct val="100000"/>
+              </a:lnSpc>
               <a:buNone/>
-              <a:defRPr sz="2400">
-                <a:solidFill>
-                  <a:srgbClr val="000000"/>
-                </a:solidFill>
-                <a:latin typeface="Helvetica Neue"/>
-                <a:ea typeface="Helvetica Neue"/>
-                <a:cs typeface="Helvetica Neue"/>
-              </a:defRPr>
-            </a:pPr>
-            <a:r>
-              <a:t>ARC · AGENTIC ECONOMY</a:t>
+              <a:defRPr sz="1350" b="1">
+                <a:solidFill>
+                  <a:srgbClr val="67E8D3"/>
+                </a:solidFill>
+                <a:latin typeface="Segoe UI"/>
+                <a:ea typeface="Segoe UI"/>
+                <a:cs typeface="Segoe UI"/>
+              </a:defRPr>
+            </a:pPr>
+            <a:r>
+              <a:rPr sz="1350" b="1">
+                <a:solidFill>
+                  <a:srgbClr val="67E8D3"/>
+                </a:solidFill>
+                <a:latin typeface="Segoe UI"/>
+                <a:ea typeface="Segoe UI"/>
+                <a:cs typeface="Segoe UI"/>
+              </a:rPr>
+              <a:t>ARC PROGRAMMABLE MONEY  ·  AGENTIC ECONOMY</a:t>
             </a:r>
           </a:p>
         </p:txBody>
@@ -1809,19 +2000,25 @@
           </a:xfrm>
           <a:prstGeom xmlns:a="http://schemas.openxmlformats.org/drawingml/2006/main" prst="roundRect">
             <a:avLst>
-              <a:gd name="adj" fmla="val 3404"/>
+              <a:gd name="adj" fmla="val 6383"/>
             </a:avLst>
           </a:prstGeom>
           <a:solidFill xmlns:a="http://schemas.openxmlformats.org/drawingml/2006/main">
-            <a:srgbClr val="071014"/>
+            <a:srgbClr val="0C1A22"/>
           </a:solidFill>
           <a:ln xmlns:a="http://schemas.openxmlformats.org/drawingml/2006/main" w="9525">
             <a:solidFill>
-              <a:srgbClr val="163039"/>
+              <a:srgbClr val="21464A"/>
             </a:solidFill>
             <a:prstDash val="solid"/>
           </a:ln>
         </p:spPr>
+        <p:style>
+          <a:lnRef xmlns:a="http://schemas.openxmlformats.org/drawingml/2006/main" idx="0"/>
+          <a:fillRef xmlns:a="http://schemas.openxmlformats.org/drawingml/2006/main" idx="0"/>
+          <a:effectRef xmlns:a="http://schemas.openxmlformats.org/drawingml/2006/main" idx="10"/>
+          <a:fontRef xmlns:a="http://schemas.openxmlformats.org/drawingml/2006/main" idx="major"/>
+        </p:style>
       </p:sp>
       <p:pic>
         <p:nvPicPr>
@@ -1832,16 +2029,18 @@
           <p:nvPr/>
         </p:nvPicPr>
         <p:blipFill>
-          <a:blip xmlns:r="http://schemas.openxmlformats.org/officeDocument/2006/relationships" xmlns:a="http://schemas.openxmlformats.org/drawingml/2006/main" r:embed="R34597e950c414a06"/>
+          <a:blip xmlns:r="http://schemas.openxmlformats.org/officeDocument/2006/relationships" xmlns:a="http://schemas.openxmlformats.org/drawingml/2006/main" r:embed="R28d51ea4fa634a97"/>
           <a:stretch xmlns:a="http://schemas.openxmlformats.org/drawingml/2006/main"/>
         </p:blipFill>
         <p:spPr>
           <a:xfrm xmlns:a="http://schemas.openxmlformats.org/drawingml/2006/main">
-            <a:off x="7524750" y="1619250"/>
-            <a:ext cx="4095750" cy="4095750"/>
+            <a:off x="7448550" y="1485900"/>
+            <a:ext cx="3771900" cy="3771900"/>
           </a:xfrm>
-          <a:prstGeom xmlns:a="http://schemas.openxmlformats.org/drawingml/2006/main" prst="rect">
-            <a:avLst/>
+          <a:prstGeom xmlns:a="http://schemas.openxmlformats.org/drawingml/2006/main" prst="roundRect">
+            <a:avLst>
+              <a:gd name="adj" fmla="val 5556"/>
+            </a:avLst>
           </a:prstGeom>
         </p:spPr>
       </p:pic>
@@ -1861,43 +2060,54 @@
         </p:nvSpPr>
         <p:spPr>
           <a:xfrm xmlns:a="http://schemas.openxmlformats.org/drawingml/2006/main">
-            <a:off x="8858250" y="495300"/>
-            <a:ext cx="2647950" cy="381000"/>
+            <a:off x="8572500" y="495300"/>
+            <a:ext cx="3009900" cy="381000"/>
           </a:xfrm>
           <a:prstGeom xmlns:a="http://schemas.openxmlformats.org/drawingml/2006/main" prst="roundRect">
             <a:avLst>
-              <a:gd name="adj" fmla="val 30000"/>
+              <a:gd name="adj" fmla="val 45000"/>
             </a:avLst>
           </a:prstGeom>
           <a:solidFill xmlns:a="http://schemas.openxmlformats.org/drawingml/2006/main">
-            <a:srgbClr val="091418"/>
+            <a:srgbClr val="0C1A22"/>
           </a:solidFill>
           <a:ln xmlns:a="http://schemas.openxmlformats.org/drawingml/2006/main" w="9525">
             <a:solidFill>
-              <a:srgbClr val="38E8C6"/>
+              <a:srgbClr val="67E8D3"/>
             </a:solidFill>
             <a:prstDash val="solid"/>
           </a:ln>
         </p:spPr>
         <p:txBody>
-          <a:bodyPr xmlns:a="http://schemas.openxmlformats.org/drawingml/2006/main" anchor="ctr"/>
+          <a:bodyPr xmlns:a="http://schemas.openxmlformats.org/drawingml/2006/main" wrap="square" lIns="114300" tIns="38100" rIns="114300" bIns="38100" anchor="ctr">
+            <a:noAutofit/>
+          </a:bodyPr>
           <a:lstStyle xmlns:a="http://schemas.openxmlformats.org/drawingml/2006/main"/>
           <a:p xmlns:a="http://schemas.openxmlformats.org/drawingml/2006/main">
             <a:pPr algn="ctr">
+              <a:lnSpc>
+                <a:spcPct val="100000"/>
+              </a:lnSpc>
               <a:buNone/>
               <a:defRPr sz="1200" b="1">
                 <a:solidFill>
-                  <a:srgbClr val="38E8C6"/>
-                </a:solidFill>
+                  <a:srgbClr val="67E8D3"/>
+                </a:solidFill>
+                <a:latin typeface="Segoe UI"/>
+                <a:ea typeface="Segoe UI"/>
+                <a:cs typeface="Segoe UI"/>
               </a:defRPr>
             </a:pPr>
             <a:r>
               <a:rPr sz="1200" b="1">
                 <a:solidFill>
-                  <a:srgbClr val="38E8C6"/>
-                </a:solidFill>
-              </a:rPr>
-              <a:t>PUBLIC DEMO · ARC PROOF READY</a:t>
+                  <a:srgbClr val="67E8D3"/>
+                </a:solidFill>
+                <a:latin typeface="Segoe UI"/>
+                <a:ea typeface="Segoe UI"/>
+                <a:cs typeface="Segoe UI"/>
+              </a:rPr>
+              <a:t>PUBLIC DEMO  ·  PUBLIC CODE</a:t>
             </a:r>
           </a:p>
         </p:txBody>
@@ -1915,6 +2125,13 @@
 <file path=ppt/slides/slide2.xml><?xml version="1.0" encoding="utf-8"?>
 <p:sld xmlns:p="http://schemas.openxmlformats.org/presentationml/2006/main">
   <p:cSld>
+    <p:bg>
+      <p:bgPr>
+        <a:solidFill xmlns:a="http://schemas.openxmlformats.org/drawingml/2006/main">
+          <a:srgbClr val="061018"/>
+        </a:solidFill>
+      </p:bgPr>
+    </p:bg>
     <p:spTree>
       <p:nvGrpSpPr>
         <p:cNvPr id="1" name=""/>
@@ -1940,32 +2157,56 @@
         </p:nvSpPr>
         <p:spPr>
           <a:xfrm xmlns:a="http://schemas.openxmlformats.org/drawingml/2006/main">
-            <a:off x="11279315" y="6279261"/>
-            <a:ext cx="518922" cy="241268"/>
+            <a:off x="11049000" y="419100"/>
+            <a:ext cx="523875" cy="304800"/>
           </a:xfrm>
           <a:prstGeom xmlns:a="http://schemas.openxmlformats.org/drawingml/2006/main" prst="rect">
             <a:avLst/>
           </a:prstGeom>
+          <a:solidFill xmlns:a="http://schemas.openxmlformats.org/drawingml/2006/main">
+            <a:srgbClr val="000000">
+              <a:alpha val="0"/>
+            </a:srgbClr>
+          </a:solidFill>
+          <a:ln xmlns:a="http://schemas.openxmlformats.org/drawingml/2006/main" w="0">
+            <a:solidFill>
+              <a:srgbClr val="000000">
+                <a:alpha val="0"/>
+              </a:srgbClr>
+            </a:solidFill>
+            <a:prstDash val="solid"/>
+          </a:ln>
         </p:spPr>
         <p:txBody>
-          <a:bodyPr xmlns:a="http://schemas.openxmlformats.org/drawingml/2006/main" wrap="square" lIns="0" tIns="0" rIns="0" bIns="0" anchor="b">
+          <a:bodyPr xmlns:a="http://schemas.openxmlformats.org/drawingml/2006/main" wrap="square" lIns="0" tIns="0" rIns="0" bIns="0" anchor="ctr">
             <a:noAutofit/>
           </a:bodyPr>
           <a:lstStyle xmlns:a="http://schemas.openxmlformats.org/drawingml/2006/main"/>
           <a:p xmlns:a="http://schemas.openxmlformats.org/drawingml/2006/main">
             <a:pPr algn="r">
+              <a:lnSpc>
+                <a:spcPct val="100000"/>
+              </a:lnSpc>
               <a:buNone/>
-              <a:defRPr sz="1000">
-                <a:solidFill>
-                  <a:srgbClr val="000000"/>
-                </a:solidFill>
-                <a:latin typeface="Helvetica Neue"/>
-                <a:ea typeface="Helvetica Neue"/>
-                <a:cs typeface="Helvetica Neue"/>
-              </a:defRPr>
-            </a:pPr>
-            <a:r>
-              <a:t>2</a:t>
+              <a:defRPr sz="1350" b="1">
+                <a:solidFill>
+                  <a:srgbClr val="60777D"/>
+                </a:solidFill>
+                <a:latin typeface="Segoe UI"/>
+                <a:ea typeface="Segoe UI"/>
+                <a:cs typeface="Segoe UI"/>
+              </a:defRPr>
+            </a:pPr>
+            <a:r>
+              <a:rPr sz="1350" b="1">
+                <a:solidFill>
+                  <a:srgbClr val="60777D"/>
+                </a:solidFill>
+                <a:latin typeface="Segoe UI"/>
+                <a:ea typeface="Segoe UI"/>
+                <a:cs typeface="Segoe UI"/>
+              </a:rPr>
+              <a:t>02</a:t>
             </a:r>
           </a:p>
         </p:txBody>
@@ -1986,12 +2227,25 @@
         </p:nvSpPr>
         <p:spPr>
           <a:xfrm xmlns:a="http://schemas.openxmlformats.org/drawingml/2006/main">
-            <a:off x="393668" y="344519"/>
-            <a:ext cx="11404568" cy="1283018"/>
+            <a:off x="685800" y="590550"/>
+            <a:ext cx="9906000" cy="1181100"/>
           </a:xfrm>
           <a:prstGeom xmlns:a="http://schemas.openxmlformats.org/drawingml/2006/main" prst="rect">
             <a:avLst/>
           </a:prstGeom>
+          <a:solidFill xmlns:a="http://schemas.openxmlformats.org/drawingml/2006/main">
+            <a:srgbClr val="000000">
+              <a:alpha val="0"/>
+            </a:srgbClr>
+          </a:solidFill>
+          <a:ln xmlns:a="http://schemas.openxmlformats.org/drawingml/2006/main" w="0">
+            <a:solidFill>
+              <a:srgbClr val="000000">
+                <a:alpha val="0"/>
+              </a:srgbClr>
+            </a:solidFill>
+            <a:prstDash val="solid"/>
+          </a:ln>
         </p:spPr>
         <p:txBody>
           <a:bodyPr xmlns:a="http://schemas.openxmlformats.org/drawingml/2006/main" wrap="square" lIns="0" tIns="0" rIns="0" bIns="0" anchor="t">
@@ -2000,18 +2254,56 @@
           <a:lstStyle xmlns:a="http://schemas.openxmlformats.org/drawingml/2006/main"/>
           <a:p xmlns:a="http://schemas.openxmlformats.org/drawingml/2006/main">
             <a:pPr algn="l">
+              <a:lnSpc>
+                <a:spcPct val="94000"/>
+              </a:lnSpc>
               <a:buNone/>
-              <a:defRPr sz="2900">
-                <a:solidFill>
-                  <a:srgbClr val="000000"/>
-                </a:solidFill>
-                <a:latin typeface="Helvetica Neue"/>
-                <a:ea typeface="Helvetica Neue"/>
-                <a:cs typeface="Helvetica Neue"/>
-              </a:defRPr>
-            </a:pPr>
-            <a:r>
-              <a:t>AI can buy information — but it needs rules, not a blank cheque</a:t>
+              <a:defRPr sz="3750" b="1">
+                <a:solidFill>
+                  <a:srgbClr val="F4F7F5"/>
+                </a:solidFill>
+                <a:latin typeface="Segoe UI"/>
+                <a:ea typeface="Segoe UI"/>
+                <a:cs typeface="Segoe UI"/>
+              </a:defRPr>
+            </a:pPr>
+            <a:r>
+              <a:rPr sz="3750" b="1">
+                <a:solidFill>
+                  <a:srgbClr val="F4F7F5"/>
+                </a:solidFill>
+                <a:latin typeface="Segoe UI"/>
+                <a:ea typeface="Segoe UI"/>
+                <a:cs typeface="Segoe UI"/>
+              </a:rPr>
+              <a:t>Machine reading is missing</a:t>
+            </a:r>
+          </a:p>
+          <a:p xmlns:a="http://schemas.openxmlformats.org/drawingml/2006/main">
+            <a:pPr algn="l">
+              <a:lnSpc>
+                <a:spcPct val="94000"/>
+              </a:lnSpc>
+              <a:buNone/>
+              <a:defRPr sz="3750" b="1">
+                <a:solidFill>
+                  <a:srgbClr val="F4F7F5"/>
+                </a:solidFill>
+                <a:latin typeface="Segoe UI"/>
+                <a:ea typeface="Segoe UI"/>
+                <a:cs typeface="Segoe UI"/>
+              </a:defRPr>
+            </a:pPr>
+            <a:r>
+              <a:rPr sz="3750" b="1">
+                <a:solidFill>
+                  <a:srgbClr val="F4F7F5"/>
+                </a:solidFill>
+                <a:latin typeface="Segoe UI"/>
+                <a:ea typeface="Segoe UI"/>
+                <a:cs typeface="Segoe UI"/>
+              </a:rPr>
+              <a:t>a payment primitive.</a:t>
             </a:r>
           </a:p>
         </p:txBody>
@@ -2037,12 +2329,18 @@
           </a:xfrm>
           <a:prstGeom xmlns:a="http://schemas.openxmlformats.org/drawingml/2006/main" prst="roundRect">
             <a:avLst>
-              <a:gd name="adj" fmla="val 2899"/>
+              <a:gd name="adj" fmla="val 7971"/>
             </a:avLst>
           </a:prstGeom>
           <a:solidFill xmlns:a="http://schemas.openxmlformats.org/drawingml/2006/main">
-            <a:srgbClr val="F2F2F2"/>
-          </a:solidFill>
+            <a:srgbClr val="0C1A22"/>
+          </a:solidFill>
+          <a:ln xmlns:a="http://schemas.openxmlformats.org/drawingml/2006/main" w="9525">
+            <a:solidFill>
+              <a:srgbClr val="4D472B"/>
+            </a:solidFill>
+            <a:prstDash val="solid"/>
+          </a:ln>
         </p:spPr>
       </p:sp>
       <p:sp>
@@ -2066,12 +2364,18 @@
           </a:xfrm>
           <a:prstGeom xmlns:a="http://schemas.openxmlformats.org/drawingml/2006/main" prst="roundRect">
             <a:avLst>
-              <a:gd name="adj" fmla="val 2899"/>
+              <a:gd name="adj" fmla="val 7971"/>
             </a:avLst>
           </a:prstGeom>
           <a:solidFill xmlns:a="http://schemas.openxmlformats.org/drawingml/2006/main">
-            <a:srgbClr val="F2F2F2"/>
-          </a:solidFill>
+            <a:srgbClr val="0C1A22"/>
+          </a:solidFill>
+          <a:ln xmlns:a="http://schemas.openxmlformats.org/drawingml/2006/main" w="9525">
+            <a:solidFill>
+              <a:srgbClr val="294662"/>
+            </a:solidFill>
+            <a:prstDash val="solid"/>
+          </a:ln>
         </p:spPr>
       </p:sp>
       <p:sp>
@@ -2090,48 +2394,75 @@
         </p:nvSpPr>
         <p:spPr>
           <a:xfrm xmlns:a="http://schemas.openxmlformats.org/drawingml/2006/main">
-            <a:off x="4621816" y="4146137"/>
-            <a:ext cx="2949321" cy="1432846"/>
+            <a:off x="4705350" y="4057650"/>
+            <a:ext cx="2743200" cy="1371600"/>
           </a:xfrm>
           <a:prstGeom xmlns:a="http://schemas.openxmlformats.org/drawingml/2006/main" prst="rect">
             <a:avLst/>
           </a:prstGeom>
+          <a:solidFill xmlns:a="http://schemas.openxmlformats.org/drawingml/2006/main">
+            <a:srgbClr val="000000">
+              <a:alpha val="0"/>
+            </a:srgbClr>
+          </a:solidFill>
+          <a:ln xmlns:a="http://schemas.openxmlformats.org/drawingml/2006/main" w="0">
+            <a:solidFill>
+              <a:srgbClr val="000000">
+                <a:alpha val="0"/>
+              </a:srgbClr>
+            </a:solidFill>
+            <a:prstDash val="solid"/>
+          </a:ln>
         </p:spPr>
         <p:txBody>
-          <a:bodyPr xmlns:a="http://schemas.openxmlformats.org/drawingml/2006/main" lIns="0" tIns="0" rIns="0" bIns="0">
+          <a:bodyPr xmlns:a="http://schemas.openxmlformats.org/drawingml/2006/main" wrap="square" lIns="0" tIns="0" rIns="0" bIns="0" anchor="t">
             <a:noAutofit/>
           </a:bodyPr>
           <a:lstStyle xmlns:a="http://schemas.openxmlformats.org/drawingml/2006/main"/>
           <a:p xmlns:a="http://schemas.openxmlformats.org/drawingml/2006/main">
             <a:pPr algn="l">
-              <a:buNone/>
-              <a:defRPr sz="2400">
-                <a:solidFill>
-                  <a:srgbClr val="000000"/>
-                </a:solidFill>
-                <a:latin typeface="Helvetica Neue"/>
-                <a:ea typeface="Helvetica Neue"/>
-                <a:cs typeface="Helvetica Neue"/>
-              </a:defRPr>
-            </a:pPr>
-            <a:r>
-              <a:t>DECIDE</a:t>
+              <a:defRPr sz="1800">
+                <a:solidFill>
+                  <a:srgbClr val="F4F7F5"/>
+                </a:solidFill>
+                <a:latin typeface="Segoe UI"/>
+                <a:ea typeface="Segoe UI"/>
+                <a:cs typeface="Segoe UI"/>
+              </a:defRPr>
+            </a:pPr>
+            <a:r>
+              <a:rPr sz="2000" b="1">
+                <a:solidFill>
+                  <a:srgbClr val="F3C75D"/>
+                </a:solidFill>
+                <a:latin typeface="Segoe UI"/>
+                <a:ea typeface="Segoe UI"/>
+                <a:cs typeface="Segoe UI"/>
+              </a:rPr>
+              <a:t>MANUAL</a:t>
             </a:r>
           </a:p>
           <a:p xmlns:a="http://schemas.openxmlformats.org/drawingml/2006/main">
             <a:pPr algn="l">
-              <a:buNone/>
-              <a:defRPr sz="2400">
-                <a:solidFill>
-                  <a:srgbClr val="000000"/>
-                </a:solidFill>
-                <a:latin typeface="Helvetica Neue"/>
-                <a:ea typeface="Helvetica Neue"/>
-                <a:cs typeface="Helvetica Neue"/>
-              </a:defRPr>
-            </a:pPr>
-            <a:r>
-              <a:t>The agent buys, reuses, skips, or stops under explicit guardrails.</a:t>
+              <a:defRPr sz="1800">
+                <a:solidFill>
+                  <a:srgbClr val="F4F7F5"/>
+                </a:solidFill>
+                <a:latin typeface="Segoe UI"/>
+                <a:ea typeface="Segoe UI"/>
+                <a:cs typeface="Segoe UI"/>
+              </a:defRPr>
+            </a:pPr>
+            <a:r>
+              <a:rPr sz="1600">
+                <a:solidFill>
+                  <a:srgbClr val="F4F7F5"/>
+                </a:solidFill>
+                <a:latin typeface="Segoe UI"/>
+                <a:ea typeface="Segoe UI"/>
+                <a:cs typeface="Segoe UI"/>
+              </a:rPr>
+              <a:t>Checkout interrupts autonomous workflows.</a:t>
             </a:r>
           </a:p>
         </p:txBody>
@@ -2152,48 +2483,75 @@
         </p:nvSpPr>
         <p:spPr>
           <a:xfrm xmlns:a="http://schemas.openxmlformats.org/drawingml/2006/main">
-            <a:off x="8536115" y="4146137"/>
-            <a:ext cx="2949321" cy="1432846"/>
+            <a:off x="8439150" y="4057650"/>
+            <a:ext cx="2743200" cy="1371600"/>
           </a:xfrm>
           <a:prstGeom xmlns:a="http://schemas.openxmlformats.org/drawingml/2006/main" prst="rect">
             <a:avLst/>
           </a:prstGeom>
+          <a:solidFill xmlns:a="http://schemas.openxmlformats.org/drawingml/2006/main">
+            <a:srgbClr val="000000">
+              <a:alpha val="0"/>
+            </a:srgbClr>
+          </a:solidFill>
+          <a:ln xmlns:a="http://schemas.openxmlformats.org/drawingml/2006/main" w="0">
+            <a:solidFill>
+              <a:srgbClr val="000000">
+                <a:alpha val="0"/>
+              </a:srgbClr>
+            </a:solidFill>
+            <a:prstDash val="solid"/>
+          </a:ln>
         </p:spPr>
         <p:txBody>
-          <a:bodyPr xmlns:a="http://schemas.openxmlformats.org/drawingml/2006/main" lIns="0" tIns="0" rIns="0" bIns="0">
+          <a:bodyPr xmlns:a="http://schemas.openxmlformats.org/drawingml/2006/main" wrap="square" lIns="0" tIns="0" rIns="0" bIns="0" anchor="t">
             <a:noAutofit/>
           </a:bodyPr>
           <a:lstStyle xmlns:a="http://schemas.openxmlformats.org/drawingml/2006/main"/>
           <a:p xmlns:a="http://schemas.openxmlformats.org/drawingml/2006/main">
             <a:pPr algn="l">
-              <a:buNone/>
-              <a:defRPr sz="2400">
-                <a:solidFill>
-                  <a:srgbClr val="000000"/>
-                </a:solidFill>
-                <a:latin typeface="Helvetica Neue"/>
-                <a:ea typeface="Helvetica Neue"/>
-                <a:cs typeface="Helvetica Neue"/>
-              </a:defRPr>
-            </a:pPr>
-            <a:r>
-              <a:t>PROVE</a:t>
+              <a:defRPr sz="1800">
+                <a:solidFill>
+                  <a:srgbClr val="F4F7F5"/>
+                </a:solidFill>
+                <a:latin typeface="Segoe UI"/>
+                <a:ea typeface="Segoe UI"/>
+                <a:cs typeface="Segoe UI"/>
+              </a:defRPr>
+            </a:pPr>
+            <a:r>
+              <a:rPr sz="2000" b="1">
+                <a:solidFill>
+                  <a:srgbClr val="66B8FF"/>
+                </a:solidFill>
+                <a:latin typeface="Segoe UI"/>
+                <a:ea typeface="Segoe UI"/>
+                <a:cs typeface="Segoe UI"/>
+              </a:rPr>
+              <a:t>OPAQUE</a:t>
             </a:r>
           </a:p>
           <a:p xmlns:a="http://schemas.openxmlformats.org/drawingml/2006/main">
             <a:pPr algn="l">
-              <a:buNone/>
-              <a:defRPr sz="2400">
-                <a:solidFill>
-                  <a:srgbClr val="000000"/>
-                </a:solidFill>
-                <a:latin typeface="Helvetica Neue"/>
-                <a:ea typeface="Helvetica Neue"/>
-                <a:cs typeface="Helvetica Neue"/>
-              </a:defRPr>
-            </a:pPr>
-            <a:r>
-              <a:t>Every choice carries a human-readable audit and settlement mode.</a:t>
+              <a:defRPr sz="1800">
+                <a:solidFill>
+                  <a:srgbClr val="F4F7F5"/>
+                </a:solidFill>
+                <a:latin typeface="Segoe UI"/>
+                <a:ea typeface="Segoe UI"/>
+                <a:cs typeface="Segoe UI"/>
+              </a:defRPr>
+            </a:pPr>
+            <a:r>
+              <a:rPr sz="1600">
+                <a:solidFill>
+                  <a:srgbClr val="F4F7F5"/>
+                </a:solidFill>
+                <a:latin typeface="Segoe UI"/>
+                <a:ea typeface="Segoe UI"/>
+                <a:cs typeface="Segoe UI"/>
+              </a:rPr>
+              <a:t>Spend cannot explain what was bought — or why.</a:t>
             </a:r>
           </a:p>
         </p:txBody>
@@ -2214,8 +2572,8 @@
         </p:nvSpPr>
         <p:spPr>
           <a:xfrm xmlns:a="http://schemas.openxmlformats.org/drawingml/2006/main">
-            <a:off x="4627626" y="3694081"/>
-            <a:ext cx="233839" cy="233744"/>
+            <a:off x="4705350" y="3543300"/>
+            <a:ext cx="285750" cy="285750"/>
           </a:xfrm>
           <a:custGeom xmlns:a="http://schemas.openxmlformats.org/drawingml/2006/main">
             <a:pathLst>
@@ -2318,8 +2676,16 @@
             </a:pathLst>
           </a:custGeom>
           <a:solidFill xmlns:a="http://schemas.openxmlformats.org/drawingml/2006/main">
-            <a:srgbClr val="000000"/>
-          </a:solidFill>
+            <a:srgbClr val="F3C75D"/>
+          </a:solidFill>
+          <a:ln xmlns:a="http://schemas.openxmlformats.org/drawingml/2006/main" w="0">
+            <a:solidFill>
+              <a:srgbClr val="000000">
+                <a:alpha val="0"/>
+              </a:srgbClr>
+            </a:solidFill>
+            <a:prstDash val="solid"/>
+          </a:ln>
         </p:spPr>
       </p:sp>
       <p:sp>
@@ -2338,8 +2704,8 @@
         </p:nvSpPr>
         <p:spPr>
           <a:xfrm xmlns:a="http://schemas.openxmlformats.org/drawingml/2006/main">
-            <a:off x="8533257" y="3694081"/>
-            <a:ext cx="233839" cy="233744"/>
+            <a:off x="8439150" y="3543300"/>
+            <a:ext cx="285750" cy="285750"/>
           </a:xfrm>
           <a:custGeom xmlns:a="http://schemas.openxmlformats.org/drawingml/2006/main">
             <a:pathLst>
@@ -2442,8 +2808,16 @@
             </a:pathLst>
           </a:custGeom>
           <a:solidFill xmlns:a="http://schemas.openxmlformats.org/drawingml/2006/main">
-            <a:srgbClr val="000000"/>
-          </a:solidFill>
+            <a:srgbClr val="66B8FF"/>
+          </a:solidFill>
+          <a:ln xmlns:a="http://schemas.openxmlformats.org/drawingml/2006/main" w="0">
+            <a:solidFill>
+              <a:srgbClr val="000000">
+                <a:alpha val="0"/>
+              </a:srgbClr>
+            </a:solidFill>
+            <a:prstDash val="solid"/>
+          </a:ln>
         </p:spPr>
       </p:sp>
       <p:sp>
@@ -2467,12 +2841,18 @@
           </a:xfrm>
           <a:prstGeom xmlns:a="http://schemas.openxmlformats.org/drawingml/2006/main" prst="roundRect">
             <a:avLst>
-              <a:gd name="adj" fmla="val 2899"/>
+              <a:gd name="adj" fmla="val 7971"/>
             </a:avLst>
           </a:prstGeom>
           <a:solidFill xmlns:a="http://schemas.openxmlformats.org/drawingml/2006/main">
-            <a:srgbClr val="F2F2F2"/>
-          </a:solidFill>
+            <a:srgbClr val="0C1A22"/>
+          </a:solidFill>
+          <a:ln xmlns:a="http://schemas.openxmlformats.org/drawingml/2006/main" w="9525">
+            <a:solidFill>
+              <a:srgbClr val="2D4B51"/>
+            </a:solidFill>
+            <a:prstDash val="solid"/>
+          </a:ln>
         </p:spPr>
       </p:sp>
       <p:sp>
@@ -2491,48 +2871,75 @@
         </p:nvSpPr>
         <p:spPr>
           <a:xfrm xmlns:a="http://schemas.openxmlformats.org/drawingml/2006/main">
-            <a:off x="701135" y="4146137"/>
-            <a:ext cx="2949321" cy="1432846"/>
+            <a:off x="971550" y="4057650"/>
+            <a:ext cx="2743200" cy="1371600"/>
           </a:xfrm>
           <a:prstGeom xmlns:a="http://schemas.openxmlformats.org/drawingml/2006/main" prst="rect">
             <a:avLst/>
           </a:prstGeom>
+          <a:solidFill xmlns:a="http://schemas.openxmlformats.org/drawingml/2006/main">
+            <a:srgbClr val="000000">
+              <a:alpha val="0"/>
+            </a:srgbClr>
+          </a:solidFill>
+          <a:ln xmlns:a="http://schemas.openxmlformats.org/drawingml/2006/main" w="0">
+            <a:solidFill>
+              <a:srgbClr val="000000">
+                <a:alpha val="0"/>
+              </a:srgbClr>
+            </a:solidFill>
+            <a:prstDash val="solid"/>
+          </a:ln>
         </p:spPr>
         <p:txBody>
-          <a:bodyPr xmlns:a="http://schemas.openxmlformats.org/drawingml/2006/main" lIns="0" tIns="0" rIns="0" bIns="0">
+          <a:bodyPr xmlns:a="http://schemas.openxmlformats.org/drawingml/2006/main" wrap="square" lIns="0" tIns="0" rIns="0" bIns="0" anchor="t">
             <a:noAutofit/>
           </a:bodyPr>
           <a:lstStyle xmlns:a="http://schemas.openxmlformats.org/drawingml/2006/main"/>
           <a:p xmlns:a="http://schemas.openxmlformats.org/drawingml/2006/main">
             <a:pPr algn="l">
-              <a:buNone/>
-              <a:defRPr sz="2400">
-                <a:solidFill>
-                  <a:srgbClr val="000000"/>
-                </a:solidFill>
-                <a:latin typeface="Helvetica Neue"/>
-                <a:ea typeface="Helvetica Neue"/>
-                <a:cs typeface="Helvetica Neue"/>
-              </a:defRPr>
-            </a:pPr>
-            <a:r>
-              <a:t>PRICE</a:t>
+              <a:defRPr sz="1800">
+                <a:solidFill>
+                  <a:srgbClr val="F4F7F5"/>
+                </a:solidFill>
+                <a:latin typeface="Segoe UI"/>
+                <a:ea typeface="Segoe UI"/>
+                <a:cs typeface="Segoe UI"/>
+              </a:defRPr>
+            </a:pPr>
+            <a:r>
+              <a:rPr sz="2000" b="1">
+                <a:solidFill>
+                  <a:srgbClr val="67E8D3"/>
+                </a:solidFill>
+                <a:latin typeface="Segoe UI"/>
+                <a:ea typeface="Segoe UI"/>
+                <a:cs typeface="Segoe UI"/>
+              </a:rPr>
+              <a:t>COARSE</a:t>
             </a:r>
           </a:p>
           <a:p xmlns:a="http://schemas.openxmlformats.org/drawingml/2006/main">
             <a:pPr algn="l">
-              <a:buNone/>
-              <a:defRPr sz="2400">
-                <a:solidFill>
-                  <a:srgbClr val="000000"/>
-                </a:solidFill>
-                <a:latin typeface="Helvetica Neue"/>
-                <a:ea typeface="Helvetica Neue"/>
-                <a:cs typeface="Helvetica Neue"/>
-              </a:defRPr>
-            </a:pPr>
-            <a:r>
-              <a:t>Creators set a per-read price as low as one cent.</a:t>
+              <a:defRPr sz="1800">
+                <a:solidFill>
+                  <a:srgbClr val="F4F7F5"/>
+                </a:solidFill>
+                <a:latin typeface="Segoe UI"/>
+                <a:ea typeface="Segoe UI"/>
+                <a:cs typeface="Segoe UI"/>
+              </a:defRPr>
+            </a:pPr>
+            <a:r>
+              <a:rPr sz="1600">
+                <a:solidFill>
+                  <a:srgbClr val="F4F7F5"/>
+                </a:solidFill>
+                <a:latin typeface="Segoe UI"/>
+                <a:ea typeface="Segoe UI"/>
+                <a:cs typeface="Segoe UI"/>
+              </a:rPr>
+              <a:t>Subscriptions bundle access when agents need per-use pricing.</a:t>
             </a:r>
           </a:p>
         </p:txBody>
@@ -2553,8 +2960,8 @@
         </p:nvSpPr>
         <p:spPr>
           <a:xfrm xmlns:a="http://schemas.openxmlformats.org/drawingml/2006/main">
-            <a:off x="707041" y="3694081"/>
-            <a:ext cx="233839" cy="233744"/>
+            <a:off x="971550" y="3543300"/>
+            <a:ext cx="285750" cy="285750"/>
           </a:xfrm>
           <a:custGeom xmlns:a="http://schemas.openxmlformats.org/drawingml/2006/main">
             <a:pathLst>
@@ -2657,8 +3064,16 @@
             </a:pathLst>
           </a:custGeom>
           <a:solidFill xmlns:a="http://schemas.openxmlformats.org/drawingml/2006/main">
-            <a:srgbClr val="000000"/>
-          </a:solidFill>
+            <a:srgbClr val="67E8D3"/>
+          </a:solidFill>
+          <a:ln xmlns:a="http://schemas.openxmlformats.org/drawingml/2006/main" w="0">
+            <a:solidFill>
+              <a:srgbClr val="000000">
+                <a:alpha val="0"/>
+              </a:srgbClr>
+            </a:solidFill>
+            <a:prstDash val="solid"/>
+          </a:ln>
         </p:spPr>
       </p:sp>
       <p:sp>
@@ -2677,64 +3092,56 @@
         </p:nvSpPr>
         <p:spPr>
           <a:xfrm xmlns:a="http://schemas.openxmlformats.org/drawingml/2006/main">
-            <a:off x="393668" y="1450562"/>
-            <a:ext cx="11404568" cy="1629251"/>
+            <a:off x="685800" y="2038350"/>
+            <a:ext cx="10572750" cy="685800"/>
           </a:xfrm>
           <a:prstGeom xmlns:a="http://schemas.openxmlformats.org/drawingml/2006/main" prst="rect">
             <a:avLst/>
           </a:prstGeom>
+          <a:solidFill xmlns:a="http://schemas.openxmlformats.org/drawingml/2006/main">
+            <a:srgbClr val="000000">
+              <a:alpha val="0"/>
+            </a:srgbClr>
+          </a:solidFill>
+          <a:ln xmlns:a="http://schemas.openxmlformats.org/drawingml/2006/main" w="0">
+            <a:solidFill>
+              <a:srgbClr val="000000">
+                <a:alpha val="0"/>
+              </a:srgbClr>
+            </a:solidFill>
+            <a:prstDash val="solid"/>
+          </a:ln>
         </p:spPr>
         <p:txBody>
-          <a:bodyPr xmlns:a="http://schemas.openxmlformats.org/drawingml/2006/main" lIns="0" tIns="0" rIns="0" bIns="0">
+          <a:bodyPr xmlns:a="http://schemas.openxmlformats.org/drawingml/2006/main" wrap="square" lIns="0" tIns="0" rIns="0" bIns="0" anchor="ctr">
             <a:noAutofit/>
           </a:bodyPr>
           <a:lstStyle xmlns:a="http://schemas.openxmlformats.org/drawingml/2006/main"/>
           <a:p xmlns:a="http://schemas.openxmlformats.org/drawingml/2006/main">
             <a:pPr algn="l">
+              <a:lnSpc>
+                <a:spcPct val="100000"/>
+              </a:lnSpc>
               <a:buNone/>
-              <a:defRPr sz="1600">
-                <a:solidFill>
-                  <a:srgbClr val="000000"/>
-                </a:solidFill>
-                <a:latin typeface="Helvetica Neue"/>
-                <a:ea typeface="Helvetica Neue"/>
-                <a:cs typeface="Helvetica Neue"/>
-              </a:defRPr>
-            </a:pPr>
-            <a:r>
-              <a:t>The missing primitive</a:t>
-            </a:r>
-          </a:p>
-          <a:p xmlns:a="http://schemas.openxmlformats.org/drawingml/2006/main">
-            <a:pPr algn="l">
-              <a:buNone/>
-              <a:defRPr sz="1600">
-                <a:solidFill>
-                  <a:srgbClr val="000000"/>
-                </a:solidFill>
-                <a:latin typeface="Helvetica Neue"/>
-                <a:ea typeface="Helvetica Neue"/>
-                <a:cs typeface="Helvetica Neue"/>
-              </a:defRPr>
-            </a:pPr>
-            <a:r>
-              <a:t>Creators cannot price a single machine read. Agents cannot prove why a source was worth paying for. Ordinary subscriptions hide both marginal value and accountability.</a:t>
-            </a:r>
-          </a:p>
-          <a:p xmlns:a="http://schemas.openxmlformats.org/drawingml/2006/main">
-            <a:pPr algn="l">
-              <a:buNone/>
-              <a:defRPr sz="1600">
-                <a:solidFill>
-                  <a:srgbClr val="000000"/>
-                </a:solidFill>
-                <a:latin typeface="Helvetica Neue"/>
-                <a:ea typeface="Helvetica Neue"/>
-                <a:cs typeface="Helvetica Neue"/>
-              </a:defRPr>
-            </a:pPr>
-            <a:r>
-              <a:t>Obol turns each read into a policy-governed USDC decision.</a:t>
+              <a:defRPr sz="1800" b="0">
+                <a:solidFill>
+                  <a:srgbClr val="9FB3B7"/>
+                </a:solidFill>
+                <a:latin typeface="Segoe UI"/>
+                <a:ea typeface="Segoe UI"/>
+                <a:cs typeface="Segoe UI"/>
+              </a:defRPr>
+            </a:pPr>
+            <a:r>
+              <a:rPr sz="1800" b="0">
+                <a:solidFill>
+                  <a:srgbClr val="9FB3B7"/>
+                </a:solidFill>
+                <a:latin typeface="Segoe UI"/>
+                <a:ea typeface="Segoe UI"/>
+                <a:cs typeface="Segoe UI"/>
+              </a:rPr>
+              <a:t>Agents need per-use pricing that does not interrupt autonomy — and spend records humans can audit.</a:t>
             </a:r>
           </a:p>
         </p:txBody>
@@ -2755,20 +3162,35 @@
         </p:nvSpPr>
         <p:spPr>
           <a:xfrm xmlns:a="http://schemas.openxmlformats.org/drawingml/2006/main">
-            <a:off x="393668" y="1695450"/>
-            <a:ext cx="914400" cy="47625"/>
+            <a:off x="685800" y="1847850"/>
+            <a:ext cx="990600" cy="38100"/>
           </a:xfrm>
           <a:prstGeom xmlns:a="http://schemas.openxmlformats.org/drawingml/2006/main" prst="rect">
             <a:avLst/>
           </a:prstGeom>
           <a:solidFill xmlns:a="http://schemas.openxmlformats.org/drawingml/2006/main">
-            <a:srgbClr val="38E8C6"/>
+            <a:srgbClr val="67E8D3"/>
           </a:solidFill>
           <a:ln xmlns:a="http://schemas.openxmlformats.org/drawingml/2006/main" w="0">
-            <a:noFill/>
+            <a:solidFill>
+              <a:srgbClr val="000000">
+                <a:alpha val="0"/>
+              </a:srgbClr>
+            </a:solidFill>
             <a:prstDash val="solid"/>
           </a:ln>
         </p:spPr>
+        <p:txBody>
+          <a:bodyPr xmlns:a="http://schemas.openxmlformats.org/drawingml/2006/main" wrap="square" lIns="0" tIns="0" rIns="0" bIns="0" anchor="t">
+            <a:noAutofit/>
+          </a:bodyPr>
+          <a:lstStyle xmlns:a="http://schemas.openxmlformats.org/drawingml/2006/main"/>
+          <a:p xmlns:a="http://schemas.openxmlformats.org/drawingml/2006/main">
+            <a:r>
+              <a:t/>
+            </a:r>
+          </a:p>
+        </p:txBody>
       </p:sp>
     </p:spTree>
     <p:extLst>
@@ -2783,6 +3205,13 @@
 <file path=ppt/slides/slide3.xml><?xml version="1.0" encoding="utf-8"?>
 <p:sld xmlns:p="http://schemas.openxmlformats.org/presentationml/2006/main">
   <p:cSld>
+    <p:bg>
+      <p:bgPr>
+        <a:solidFill xmlns:a="http://schemas.openxmlformats.org/drawingml/2006/main">
+          <a:srgbClr val="061018"/>
+        </a:solidFill>
+      </p:bgPr>
+    </p:bg>
     <p:spTree>
       <p:nvGrpSpPr>
         <p:cNvPr id="1" name=""/>
@@ -2808,32 +3237,56 @@
         </p:nvSpPr>
         <p:spPr>
           <a:xfrm xmlns:a="http://schemas.openxmlformats.org/drawingml/2006/main">
-            <a:off x="11279315" y="6279261"/>
-            <a:ext cx="518922" cy="241268"/>
+            <a:off x="11049000" y="419100"/>
+            <a:ext cx="523875" cy="304800"/>
           </a:xfrm>
           <a:prstGeom xmlns:a="http://schemas.openxmlformats.org/drawingml/2006/main" prst="rect">
             <a:avLst/>
           </a:prstGeom>
+          <a:solidFill xmlns:a="http://schemas.openxmlformats.org/drawingml/2006/main">
+            <a:srgbClr val="000000">
+              <a:alpha val="0"/>
+            </a:srgbClr>
+          </a:solidFill>
+          <a:ln xmlns:a="http://schemas.openxmlformats.org/drawingml/2006/main" w="0">
+            <a:solidFill>
+              <a:srgbClr val="000000">
+                <a:alpha val="0"/>
+              </a:srgbClr>
+            </a:solidFill>
+            <a:prstDash val="solid"/>
+          </a:ln>
         </p:spPr>
         <p:txBody>
-          <a:bodyPr xmlns:a="http://schemas.openxmlformats.org/drawingml/2006/main" wrap="square" lIns="0" tIns="0" rIns="0" bIns="0" anchor="b">
+          <a:bodyPr xmlns:a="http://schemas.openxmlformats.org/drawingml/2006/main" wrap="square" lIns="0" tIns="0" rIns="0" bIns="0" anchor="ctr">
             <a:noAutofit/>
           </a:bodyPr>
           <a:lstStyle xmlns:a="http://schemas.openxmlformats.org/drawingml/2006/main"/>
           <a:p xmlns:a="http://schemas.openxmlformats.org/drawingml/2006/main">
             <a:pPr algn="r">
+              <a:lnSpc>
+                <a:spcPct val="100000"/>
+              </a:lnSpc>
               <a:buNone/>
-              <a:defRPr sz="1000">
-                <a:solidFill>
-                  <a:srgbClr val="000000"/>
-                </a:solidFill>
-                <a:latin typeface="Helvetica Neue"/>
-                <a:ea typeface="Helvetica Neue"/>
-                <a:cs typeface="Helvetica Neue"/>
-              </a:defRPr>
-            </a:pPr>
-            <a:r>
-              <a:t>3</a:t>
+              <a:defRPr sz="1350" b="1">
+                <a:solidFill>
+                  <a:srgbClr val="60777D"/>
+                </a:solidFill>
+                <a:latin typeface="Segoe UI"/>
+                <a:ea typeface="Segoe UI"/>
+                <a:cs typeface="Segoe UI"/>
+              </a:defRPr>
+            </a:pPr>
+            <a:r>
+              <a:rPr sz="1350" b="1">
+                <a:solidFill>
+                  <a:srgbClr val="60777D"/>
+                </a:solidFill>
+                <a:latin typeface="Segoe UI"/>
+                <a:ea typeface="Segoe UI"/>
+                <a:cs typeface="Segoe UI"/>
+              </a:rPr>
+              <a:t>03</a:t>
             </a:r>
           </a:p>
         </p:txBody>
@@ -2854,12 +3307,25 @@
         </p:nvSpPr>
         <p:spPr>
           <a:xfrm xmlns:a="http://schemas.openxmlformats.org/drawingml/2006/main">
-            <a:off x="393668" y="344043"/>
-            <a:ext cx="11404568" cy="1047464"/>
+            <a:off x="685800" y="590550"/>
+            <a:ext cx="5143500" cy="1200150"/>
           </a:xfrm>
           <a:prstGeom xmlns:a="http://schemas.openxmlformats.org/drawingml/2006/main" prst="rect">
             <a:avLst/>
           </a:prstGeom>
+          <a:solidFill xmlns:a="http://schemas.openxmlformats.org/drawingml/2006/main">
+            <a:srgbClr val="000000">
+              <a:alpha val="0"/>
+            </a:srgbClr>
+          </a:solidFill>
+          <a:ln xmlns:a="http://schemas.openxmlformats.org/drawingml/2006/main" w="0">
+            <a:solidFill>
+              <a:srgbClr val="000000">
+                <a:alpha val="0"/>
+              </a:srgbClr>
+            </a:solidFill>
+            <a:prstDash val="solid"/>
+          </a:ln>
         </p:spPr>
         <p:txBody>
           <a:bodyPr xmlns:a="http://schemas.openxmlformats.org/drawingml/2006/main" wrap="square" lIns="0" tIns="0" rIns="0" bIns="0" anchor="t">
@@ -2868,18 +3334,56 @@
           <a:lstStyle xmlns:a="http://schemas.openxmlformats.org/drawingml/2006/main"/>
           <a:p xmlns:a="http://schemas.openxmlformats.org/drawingml/2006/main">
             <a:pPr algn="l">
+              <a:lnSpc>
+                <a:spcPct val="96000"/>
+              </a:lnSpc>
               <a:buNone/>
-              <a:defRPr sz="2900">
-                <a:solidFill>
-                  <a:srgbClr val="000000"/>
-                </a:solidFill>
-                <a:latin typeface="Helvetica Neue"/>
-                <a:ea typeface="Helvetica Neue"/>
-                <a:cs typeface="Helvetica Neue"/>
-              </a:defRPr>
-            </a:pPr>
-            <a:r>
-              <a:t>The proof lives inside the product.</a:t>
+              <a:defRPr sz="3600" b="1">
+                <a:solidFill>
+                  <a:srgbClr val="F4F7F5"/>
+                </a:solidFill>
+                <a:latin typeface="Segoe UI"/>
+                <a:ea typeface="Segoe UI"/>
+                <a:cs typeface="Segoe UI"/>
+              </a:defRPr>
+            </a:pPr>
+            <a:r>
+              <a:rPr sz="3600" b="1">
+                <a:solidFill>
+                  <a:srgbClr val="F4F7F5"/>
+                </a:solidFill>
+                <a:latin typeface="Segoe UI"/>
+                <a:ea typeface="Segoe UI"/>
+                <a:cs typeface="Segoe UI"/>
+              </a:rPr>
+              <a:t>One query. One budget.</a:t>
+            </a:r>
+          </a:p>
+          <a:p xmlns:a="http://schemas.openxmlformats.org/drawingml/2006/main">
+            <a:pPr algn="l">
+              <a:lnSpc>
+                <a:spcPct val="96000"/>
+              </a:lnSpc>
+              <a:buNone/>
+              <a:defRPr sz="3600" b="1">
+                <a:solidFill>
+                  <a:srgbClr val="F4F7F5"/>
+                </a:solidFill>
+                <a:latin typeface="Segoe UI"/>
+                <a:ea typeface="Segoe UI"/>
+                <a:cs typeface="Segoe UI"/>
+              </a:defRPr>
+            </a:pPr>
+            <a:r>
+              <a:rPr sz="3600" b="1">
+                <a:solidFill>
+                  <a:srgbClr val="F4F7F5"/>
+                </a:solidFill>
+                <a:latin typeface="Segoe UI"/>
+                <a:ea typeface="Segoe UI"/>
+                <a:cs typeface="Segoe UI"/>
+              </a:rPr>
+              <a:t>Four accountable actions.</a:t>
             </a:r>
           </a:p>
         </p:txBody>
@@ -2905,19 +3409,25 @@
           </a:xfrm>
           <a:prstGeom xmlns:a="http://schemas.openxmlformats.org/drawingml/2006/main" prst="roundRect">
             <a:avLst>
-              <a:gd name="adj" fmla="val 1376"/>
+              <a:gd name="adj" fmla="val 4814"/>
             </a:avLst>
           </a:prstGeom>
           <a:solidFill xmlns:a="http://schemas.openxmlformats.org/drawingml/2006/main">
-            <a:srgbClr val="EAF5FB"/>
+            <a:srgbClr val="0C1A22"/>
           </a:solidFill>
           <a:ln xmlns:a="http://schemas.openxmlformats.org/drawingml/2006/main" w="9525">
             <a:solidFill>
-              <a:srgbClr val="B8BCC4"/>
+              <a:srgbClr val="21464A"/>
             </a:solidFill>
             <a:prstDash val="solid"/>
           </a:ln>
         </p:spPr>
+        <p:style>
+          <a:lnRef xmlns:a="http://schemas.openxmlformats.org/drawingml/2006/main" idx="0"/>
+          <a:fillRef xmlns:a="http://schemas.openxmlformats.org/drawingml/2006/main" idx="0"/>
+          <a:effectRef xmlns:a="http://schemas.openxmlformats.org/drawingml/2006/main" idx="11"/>
+          <a:fontRef xmlns:a="http://schemas.openxmlformats.org/drawingml/2006/main" idx="major"/>
+        </p:style>
       </p:sp>
       <p:pic>
         <p:nvPicPr>
@@ -2928,7 +3438,7 @@
           <p:nvPr/>
         </p:nvPicPr>
         <p:blipFill>
-          <a:blip xmlns:r="http://schemas.openxmlformats.org/officeDocument/2006/relationships" xmlns:a="http://schemas.openxmlformats.org/drawingml/2006/main" r:embed="Ree867d26066f4df8"/>
+          <a:blip xmlns:r="http://schemas.openxmlformats.org/officeDocument/2006/relationships" xmlns:a="http://schemas.openxmlformats.org/drawingml/2006/main" r:embed="Rbbeeb820de9c4450"/>
           <a:srcRect xmlns:a="http://schemas.openxmlformats.org/drawingml/2006/main" l="0" t="0" r="0" b="0"/>
           <a:stretch xmlns:a="http://schemas.openxmlformats.org/drawingml/2006/main">
             <a:fillRect l="0" t="0" r="0" b="0"/>
@@ -2936,12 +3446,12 @@
         </p:blipFill>
         <p:spPr>
           <a:xfrm xmlns:a="http://schemas.openxmlformats.org/drawingml/2006/main" flipH="0" flipV="0">
-            <a:off x="6269069" y="396431"/>
-            <a:ext cx="5539740" cy="5602034"/>
+            <a:off x="6419850" y="914400"/>
+            <a:ext cx="4857750" cy="4838700"/>
           </a:xfrm>
           <a:prstGeom xmlns:a="http://schemas.openxmlformats.org/drawingml/2006/main" prst="roundRect">
             <a:avLst>
-              <a:gd name="adj" fmla="val 2063"/>
+              <a:gd name="adj" fmla="val 3937"/>
             </a:avLst>
           </a:prstGeom>
         </p:spPr>
@@ -2962,12 +3472,25 @@
         </p:nvSpPr>
         <p:spPr>
           <a:xfrm xmlns:a="http://schemas.openxmlformats.org/drawingml/2006/main">
-            <a:off x="393668" y="2031968"/>
-            <a:ext cx="5537168" cy="3962400"/>
+            <a:off x="704850" y="2305050"/>
+            <a:ext cx="4953000" cy="2705100"/>
           </a:xfrm>
           <a:prstGeom xmlns:a="http://schemas.openxmlformats.org/drawingml/2006/main" prst="rect">
             <a:avLst/>
           </a:prstGeom>
+          <a:solidFill xmlns:a="http://schemas.openxmlformats.org/drawingml/2006/main">
+            <a:srgbClr val="000000">
+              <a:alpha val="0"/>
+            </a:srgbClr>
+          </a:solidFill>
+          <a:ln xmlns:a="http://schemas.openxmlformats.org/drawingml/2006/main" w="0">
+            <a:solidFill>
+              <a:srgbClr val="000000">
+                <a:alpha val="0"/>
+              </a:srgbClr>
+            </a:solidFill>
+            <a:prstDash val="solid"/>
+          </a:ln>
         </p:spPr>
         <p:txBody>
           <a:bodyPr xmlns:a="http://schemas.openxmlformats.org/drawingml/2006/main" wrap="square" lIns="0" tIns="0" rIns="0" bIns="0" anchor="t">
@@ -2976,66 +3499,149 @@
           <a:lstStyle xmlns:a="http://schemas.openxmlformats.org/drawingml/2006/main"/>
           <a:p xmlns:a="http://schemas.openxmlformats.org/drawingml/2006/main">
             <a:pPr algn="l">
-              <a:buNone/>
-              <a:defRPr sz="2400">
-                <a:solidFill>
-                  <a:srgbClr val="000000"/>
-                </a:solidFill>
-                <a:latin typeface="Helvetica Neue"/>
-                <a:ea typeface="Helvetica Neue"/>
-                <a:cs typeface="Helvetica Neue"/>
-              </a:defRPr>
-            </a:pPr>
-            <a:r>
-              <a:t>Run it. Verify it.</a:t>
+              <a:defRPr sz="1800">
+                <a:solidFill>
+                  <a:srgbClr val="F4F7F5"/>
+                </a:solidFill>
+                <a:latin typeface="Segoe UI"/>
+                <a:ea typeface="Segoe UI"/>
+                <a:cs typeface="Segoe UI"/>
+              </a:defRPr>
+            </a:pPr>
+            <a:r>
+              <a:rPr sz="1800" b="1">
+                <a:solidFill>
+                  <a:srgbClr val="67E8D3"/>
+                </a:solidFill>
+                <a:latin typeface="Segoe UI"/>
+                <a:ea typeface="Segoe UI"/>
+                <a:cs typeface="Segoe UI"/>
+              </a:rPr>
+              <a:t>BUY</a:t>
+            </a:r>
+            <a:r>
+              <a:rPr sz="1800">
+                <a:solidFill>
+                  <a:srgbClr val="F4F7F5"/>
+                </a:solidFill>
+                <a:latin typeface="Segoe UI"/>
+                <a:ea typeface="Segoe UI"/>
+                <a:cs typeface="Segoe UI"/>
+              </a:rPr>
+              <a:t>  useful evidence within policy.</a:t>
             </a:r>
           </a:p>
           <a:p xmlns:a="http://schemas.openxmlformats.org/drawingml/2006/main">
             <a:pPr algn="l">
-              <a:buNone/>
-              <a:defRPr sz="2400">
-                <a:solidFill>
-                  <a:srgbClr val="000000"/>
-                </a:solidFill>
-                <a:latin typeface="Helvetica Neue"/>
-                <a:ea typeface="Helvetica Neue"/>
-                <a:cs typeface="Helvetica Neue"/>
-              </a:defRPr>
-            </a:pPr>
-            <a:r>
-              <a:t>Set a $0.05 budget, then inspect every buy, skip, and stop decision alongside the receipt.</a:t>
+              <a:defRPr sz="1800">
+                <a:solidFill>
+                  <a:srgbClr val="F4F7F5"/>
+                </a:solidFill>
+                <a:latin typeface="Segoe UI"/>
+                <a:ea typeface="Segoe UI"/>
+                <a:cs typeface="Segoe UI"/>
+              </a:defRPr>
+            </a:pPr>
+            <a:r>
+              <a:rPr sz="1800" b="1">
+                <a:solidFill>
+                  <a:srgbClr val="F3C75D"/>
+                </a:solidFill>
+                <a:latin typeface="Segoe UI"/>
+                <a:ea typeface="Segoe UI"/>
+                <a:cs typeface="Segoe UI"/>
+              </a:rPr>
+              <a:t>REUSE</a:t>
+            </a:r>
+            <a:r>
+              <a:rPr sz="1800">
+                <a:solidFill>
+                  <a:srgbClr val="F4F7F5"/>
+                </a:solidFill>
+                <a:latin typeface="Segoe UI"/>
+                <a:ea typeface="Segoe UI"/>
+                <a:cs typeface="Segoe UI"/>
+              </a:rPr>
+              <a:t>  prior access.  </a:t>
+            </a:r>
+            <a:r>
+              <a:rPr sz="1800" b="1">
+                <a:solidFill>
+                  <a:srgbClr val="F3C75D"/>
+                </a:solidFill>
+                <a:latin typeface="Segoe UI"/>
+                <a:ea typeface="Segoe UI"/>
+                <a:cs typeface="Segoe UI"/>
+              </a:rPr>
+              <a:t>SKIP</a:t>
+            </a:r>
+            <a:r>
+              <a:rPr sz="1800">
+                <a:solidFill>
+                  <a:srgbClr val="F4F7F5"/>
+                </a:solidFill>
+                <a:latin typeface="Segoe UI"/>
+                <a:ea typeface="Segoe UI"/>
+                <a:cs typeface="Segoe UI"/>
+              </a:rPr>
+              <a:t>  weak or redundant sources.</a:t>
             </a:r>
           </a:p>
           <a:p xmlns:a="http://schemas.openxmlformats.org/drawingml/2006/main">
             <a:pPr algn="l">
-              <a:buNone/>
-              <a:defRPr sz="2400">
-                <a:solidFill>
-                  <a:srgbClr val="000000"/>
-                </a:solidFill>
-                <a:latin typeface="Helvetica Neue"/>
-                <a:ea typeface="Helvetica Neue"/>
-                <a:cs typeface="Helvetica Neue"/>
-              </a:defRPr>
-            </a:pPr>
-            <a:r>
-              <a:t/>
+              <a:defRPr sz="1800">
+                <a:solidFill>
+                  <a:srgbClr val="F4F7F5"/>
+                </a:solidFill>
+                <a:latin typeface="Segoe UI"/>
+                <a:ea typeface="Segoe UI"/>
+                <a:cs typeface="Segoe UI"/>
+              </a:defRPr>
+            </a:pPr>
+            <a:r>
+              <a:rPr sz="1800" b="1">
+                <a:solidFill>
+                  <a:srgbClr val="66B8FF"/>
+                </a:solidFill>
+                <a:latin typeface="Segoe UI"/>
+                <a:ea typeface="Segoe UI"/>
+                <a:cs typeface="Segoe UI"/>
+              </a:rPr>
+              <a:t>STOP</a:t>
+            </a:r>
+            <a:r>
+              <a:rPr sz="1800">
+                <a:solidFill>
+                  <a:srgbClr val="F4F7F5"/>
+                </a:solidFill>
+                <a:latin typeface="Segoe UI"/>
+                <a:ea typeface="Segoe UI"/>
+                <a:cs typeface="Segoe UI"/>
+              </a:rPr>
+              <a:t>  when coverage is sufficient — or a spending guard fires.</a:t>
             </a:r>
           </a:p>
           <a:p xmlns:a="http://schemas.openxmlformats.org/drawingml/2006/main">
             <a:pPr algn="l">
-              <a:buNone/>
-              <a:defRPr sz="2400">
-                <a:solidFill>
-                  <a:srgbClr val="000000"/>
-                </a:solidFill>
-                <a:latin typeface="Helvetica Neue"/>
-                <a:ea typeface="Helvetica Neue"/>
-                <a:cs typeface="Helvetica Neue"/>
-              </a:defRPr>
-            </a:pPr>
-            <a:r>
-              <a:t>The server checks the transaction hash, payer, USDC contract, recipient, amount, block, and block hash against Arc RPC.</a:t>
+              <a:defRPr sz="1800">
+                <a:solidFill>
+                  <a:srgbClr val="F4F7F5"/>
+                </a:solidFill>
+                <a:latin typeface="Segoe UI"/>
+                <a:ea typeface="Segoe UI"/>
+                <a:cs typeface="Segoe UI"/>
+              </a:defRPr>
+            </a:pPr>
+            <a:r>
+              <a:rPr sz="1600">
+                <a:solidFill>
+                  <a:srgbClr val="9FB3B7"/>
+                </a:solidFill>
+                <a:latin typeface="Segoe UI"/>
+                <a:ea typeface="Segoe UI"/>
+                <a:cs typeface="Segoe UI"/>
+              </a:rPr>
+              <a:t>Answers use only purchased or previously authorized content.</a:t>
             </a:r>
           </a:p>
         </p:txBody>
@@ -3056,43 +3662,54 @@
         </p:nvSpPr>
         <p:spPr>
           <a:xfrm xmlns:a="http://schemas.openxmlformats.org/drawingml/2006/main">
-            <a:off x="390525" y="5448300"/>
-            <a:ext cx="5238750" cy="381000"/>
+            <a:off x="704850" y="5276850"/>
+            <a:ext cx="4953000" cy="400050"/>
           </a:xfrm>
           <a:prstGeom xmlns:a="http://schemas.openxmlformats.org/drawingml/2006/main" prst="roundRect">
             <a:avLst>
-              <a:gd name="adj" fmla="val 30000"/>
+              <a:gd name="adj" fmla="val 42857"/>
             </a:avLst>
           </a:prstGeom>
           <a:solidFill xmlns:a="http://schemas.openxmlformats.org/drawingml/2006/main">
-            <a:srgbClr val="091418"/>
+            <a:srgbClr val="0C1A22"/>
           </a:solidFill>
           <a:ln xmlns:a="http://schemas.openxmlformats.org/drawingml/2006/main" w="9525">
             <a:solidFill>
-              <a:srgbClr val="38E8C6"/>
+              <a:srgbClr val="F3C75D"/>
             </a:solidFill>
             <a:prstDash val="solid"/>
           </a:ln>
         </p:spPr>
         <p:txBody>
-          <a:bodyPr xmlns:a="http://schemas.openxmlformats.org/drawingml/2006/main" anchor="ctr"/>
+          <a:bodyPr xmlns:a="http://schemas.openxmlformats.org/drawingml/2006/main" wrap="square" lIns="114300" tIns="38100" rIns="114300" bIns="38100" anchor="ctr">
+            <a:noAutofit/>
+          </a:bodyPr>
           <a:lstStyle xmlns:a="http://schemas.openxmlformats.org/drawingml/2006/main"/>
           <a:p xmlns:a="http://schemas.openxmlformats.org/drawingml/2006/main">
             <a:pPr algn="ctr">
+              <a:lnSpc>
+                <a:spcPct val="100000"/>
+              </a:lnSpc>
               <a:buNone/>
               <a:defRPr sz="1200" b="1">
                 <a:solidFill>
-                  <a:srgbClr val="38E8C6"/>
-                </a:solidFill>
+                  <a:srgbClr val="F3C75D"/>
+                </a:solidFill>
+                <a:latin typeface="Segoe UI"/>
+                <a:ea typeface="Segoe UI"/>
+                <a:cs typeface="Segoe UI"/>
               </a:defRPr>
             </a:pPr>
             <a:r>
               <a:rPr sz="1200" b="1">
                 <a:solidFill>
-                  <a:srgbClr val="38E8C6"/>
-                </a:solidFill>
-              </a:rPr>
-              <a:t>ARC TESTNET · LIVE RPC CONFIRMED</a:t>
+                  <a:srgbClr val="F3C75D"/>
+                </a:solidFill>
+                <a:latin typeface="Segoe UI"/>
+                <a:ea typeface="Segoe UI"/>
+                <a:cs typeface="Segoe UI"/>
+              </a:rPr>
+              <a:t>PUBLIC JUDGE DEMO  ·  FORCED MOCK</a:t>
             </a:r>
           </a:p>
         </p:txBody>
@@ -3110,6 +3727,13 @@
 <file path=ppt/slides/slide4.xml><?xml version="1.0" encoding="utf-8"?>
 <p:sld xmlns:p="http://schemas.openxmlformats.org/presentationml/2006/main">
   <p:cSld>
+    <p:bg>
+      <p:bgPr>
+        <a:solidFill xmlns:a="http://schemas.openxmlformats.org/drawingml/2006/main">
+          <a:srgbClr val="061018"/>
+        </a:solidFill>
+      </p:bgPr>
+    </p:bg>
     <p:spTree>
       <p:nvGrpSpPr>
         <p:cNvPr id="1" name=""/>
@@ -3135,30 +3759,56 @@
         </p:nvSpPr>
         <p:spPr>
           <a:xfrm xmlns:a="http://schemas.openxmlformats.org/drawingml/2006/main">
-            <a:off x="11279315" y="6279261"/>
-            <a:ext cx="518922" cy="241268"/>
+            <a:off x="11049000" y="419100"/>
+            <a:ext cx="523875" cy="304800"/>
           </a:xfrm>
           <a:prstGeom xmlns:a="http://schemas.openxmlformats.org/drawingml/2006/main" prst="rect">
             <a:avLst/>
           </a:prstGeom>
+          <a:solidFill xmlns:a="http://schemas.openxmlformats.org/drawingml/2006/main">
+            <a:srgbClr val="000000">
+              <a:alpha val="0"/>
+            </a:srgbClr>
+          </a:solidFill>
+          <a:ln xmlns:a="http://schemas.openxmlformats.org/drawingml/2006/main" w="0">
+            <a:solidFill>
+              <a:srgbClr val="000000">
+                <a:alpha val="0"/>
+              </a:srgbClr>
+            </a:solidFill>
+            <a:prstDash val="solid"/>
+          </a:ln>
         </p:spPr>
         <p:txBody>
-          <a:bodyPr xmlns:a="http://schemas.openxmlformats.org/drawingml/2006/main" lIns="0" tIns="0" rIns="0" bIns="0" anchor="b"/>
+          <a:bodyPr xmlns:a="http://schemas.openxmlformats.org/drawingml/2006/main" wrap="square" lIns="0" tIns="0" rIns="0" bIns="0" anchor="ctr">
+            <a:noAutofit/>
+          </a:bodyPr>
           <a:lstStyle xmlns:a="http://schemas.openxmlformats.org/drawingml/2006/main"/>
           <a:p xmlns:a="http://schemas.openxmlformats.org/drawingml/2006/main">
             <a:pPr algn="r">
+              <a:lnSpc>
+                <a:spcPct val="100000"/>
+              </a:lnSpc>
               <a:buNone/>
-              <a:defRPr sz="1000">
-                <a:solidFill>
-                  <a:srgbClr val="000000"/>
-                </a:solidFill>
-                <a:latin typeface="Helvetica Neue"/>
-                <a:ea typeface="Helvetica Neue"/>
-                <a:cs typeface="Helvetica Neue"/>
-              </a:defRPr>
-            </a:pPr>
-            <a:r>
-              <a:t>4</a:t>
+              <a:defRPr sz="1350" b="1">
+                <a:solidFill>
+                  <a:srgbClr val="60777D"/>
+                </a:solidFill>
+                <a:latin typeface="Segoe UI"/>
+                <a:ea typeface="Segoe UI"/>
+                <a:cs typeface="Segoe UI"/>
+              </a:defRPr>
+            </a:pPr>
+            <a:r>
+              <a:rPr sz="1350" b="1">
+                <a:solidFill>
+                  <a:srgbClr val="60777D"/>
+                </a:solidFill>
+                <a:latin typeface="Segoe UI"/>
+                <a:ea typeface="Segoe UI"/>
+                <a:cs typeface="Segoe UI"/>
+              </a:rPr>
+              <a:t>04</a:t>
             </a:r>
           </a:p>
         </p:txBody>
@@ -3179,53 +3829,104 @@
         </p:nvSpPr>
         <p:spPr>
           <a:xfrm xmlns:a="http://schemas.openxmlformats.org/drawingml/2006/main">
-            <a:off x="393668" y="344043"/>
-            <a:ext cx="11404568" cy="1047464"/>
+            <a:off x="685800" y="590550"/>
+            <a:ext cx="9525000" cy="1181100"/>
           </a:xfrm>
           <a:prstGeom xmlns:a="http://schemas.openxmlformats.org/drawingml/2006/main" prst="rect">
             <a:avLst/>
           </a:prstGeom>
+          <a:solidFill xmlns:a="http://schemas.openxmlformats.org/drawingml/2006/main">
+            <a:srgbClr val="000000">
+              <a:alpha val="0"/>
+            </a:srgbClr>
+          </a:solidFill>
+          <a:ln xmlns:a="http://schemas.openxmlformats.org/drawingml/2006/main" w="0">
+            <a:solidFill>
+              <a:srgbClr val="000000">
+                <a:alpha val="0"/>
+              </a:srgbClr>
+            </a:solidFill>
+            <a:prstDash val="solid"/>
+          </a:ln>
         </p:spPr>
         <p:txBody>
-          <a:bodyPr xmlns:a="http://schemas.openxmlformats.org/drawingml/2006/main" lIns="0" tIns="0" rIns="0" bIns="0" anchor="t">
-            <a:normAutofit fontScale="100000"/>
+          <a:bodyPr xmlns:a="http://schemas.openxmlformats.org/drawingml/2006/main" wrap="square" lIns="0" tIns="0" rIns="0" bIns="0" anchor="t">
+            <a:noAutofit/>
           </a:bodyPr>
           <a:lstStyle xmlns:a="http://schemas.openxmlformats.org/drawingml/2006/main"/>
           <a:p xmlns:a="http://schemas.openxmlformats.org/drawingml/2006/main">
             <a:pPr algn="l">
+              <a:lnSpc>
+                <a:spcPct val="94000"/>
+              </a:lnSpc>
               <a:buNone/>
-              <a:defRPr sz="2900">
-                <a:solidFill>
-                  <a:srgbClr val="000000"/>
-                </a:solidFill>
-                <a:latin typeface="Helvetica Neue"/>
-                <a:ea typeface="Helvetica Neue"/>
-                <a:cs typeface="Helvetica Neue"/>
-              </a:defRPr>
-            </a:pPr>
-            <a:r>
-              <a:t>One request becomes a priced, explainable, auditable transaction</a:t>
+              <a:defRPr sz="3750" b="1">
+                <a:solidFill>
+                  <a:srgbClr val="F4F7F5"/>
+                </a:solidFill>
+                <a:latin typeface="Segoe UI"/>
+                <a:ea typeface="Segoe UI"/>
+                <a:cs typeface="Segoe UI"/>
+              </a:defRPr>
+            </a:pPr>
+            <a:r>
+              <a:rPr sz="3750" b="1">
+                <a:solidFill>
+                  <a:srgbClr val="F4F7F5"/>
+                </a:solidFill>
+                <a:latin typeface="Segoe UI"/>
+                <a:ea typeface="Segoe UI"/>
+                <a:cs typeface="Segoe UI"/>
+              </a:rPr>
+              <a:t>Money is part of</a:t>
+            </a:r>
+          </a:p>
+          <a:p xmlns:a="http://schemas.openxmlformats.org/drawingml/2006/main">
+            <a:pPr algn="l">
+              <a:lnSpc>
+                <a:spcPct val="94000"/>
+              </a:lnSpc>
+              <a:buNone/>
+              <a:defRPr sz="3750" b="1">
+                <a:solidFill>
+                  <a:srgbClr val="F4F7F5"/>
+                </a:solidFill>
+                <a:latin typeface="Segoe UI"/>
+                <a:ea typeface="Segoe UI"/>
+                <a:cs typeface="Segoe UI"/>
+              </a:defRPr>
+            </a:pPr>
+            <a:r>
+              <a:rPr sz="3750" b="1">
+                <a:solidFill>
+                  <a:srgbClr val="F4F7F5"/>
+                </a:solidFill>
+                <a:latin typeface="Segoe UI"/>
+                <a:ea typeface="Segoe UI"/>
+                <a:cs typeface="Segoe UI"/>
+              </a:rPr>
+              <a:t>the reasoning loop.</a:t>
             </a:r>
           </a:p>
         </p:txBody>
       </p:sp>
       <p:cxnSp>
         <p:nvCxnSpPr>
-          <p:cNvPr id="25" name="Google-Shape-2259-p159-4"/>
+          <p:cNvPr id="31" name="Google-Shape-2259-p159-4"/>
           <p:cNvCxnSpPr/>
           <p:nvPr/>
         </p:nvCxnSpPr>
         <p:spPr>
           <a:xfrm xmlns:a="http://schemas.openxmlformats.org/drawingml/2006/main">
-            <a:off x="337757" y="3373755"/>
-            <a:ext cx="11854244" cy="286"/>
+            <a:off x="1066800" y="3086100"/>
+            <a:ext cx="9639300" cy="19050"/>
           </a:xfrm>
           <a:prstGeom xmlns:a="http://schemas.openxmlformats.org/drawingml/2006/main" prst="straightConnector1">
             <a:avLst/>
           </a:prstGeom>
-          <a:ln xmlns:a="http://schemas.openxmlformats.org/drawingml/2006/main" w="9525">
+          <a:ln xmlns:a="http://schemas.openxmlformats.org/drawingml/2006/main" w="19050">
             <a:solidFill>
-              <a:srgbClr val="000000"/>
+              <a:srgbClr val="20353C"/>
             </a:solidFill>
             <a:prstDash val="solid"/>
           </a:ln>
@@ -3247,15 +3948,23 @@
         </p:nvSpPr>
         <p:spPr>
           <a:xfrm xmlns:a="http://schemas.openxmlformats.org/drawingml/2006/main">
-            <a:off x="337757" y="3320225"/>
-            <a:ext cx="107061" cy="107061"/>
+            <a:off x="971550" y="2981325"/>
+            <a:ext cx="228600" cy="228600"/>
           </a:xfrm>
           <a:prstGeom xmlns:a="http://schemas.openxmlformats.org/drawingml/2006/main" prst="ellipse">
             <a:avLst/>
           </a:prstGeom>
           <a:solidFill xmlns:a="http://schemas.openxmlformats.org/drawingml/2006/main">
-            <a:srgbClr val="000000"/>
-          </a:solidFill>
+            <a:srgbClr val="67E8D3"/>
+          </a:solidFill>
+          <a:ln xmlns:a="http://schemas.openxmlformats.org/drawingml/2006/main" w="0">
+            <a:solidFill>
+              <a:srgbClr val="000000">
+                <a:alpha val="0"/>
+              </a:srgbClr>
+            </a:solidFill>
+            <a:prstDash val="solid"/>
+          </a:ln>
         </p:spPr>
       </p:sp>
       <p:sp>
@@ -3274,15 +3983,23 @@
         </p:nvSpPr>
         <p:spPr>
           <a:xfrm xmlns:a="http://schemas.openxmlformats.org/drawingml/2006/main">
-            <a:off x="4251770" y="3320225"/>
-            <a:ext cx="107061" cy="107061"/>
+            <a:off x="4743450" y="2981325"/>
+            <a:ext cx="228600" cy="228600"/>
           </a:xfrm>
           <a:prstGeom xmlns:a="http://schemas.openxmlformats.org/drawingml/2006/main" prst="ellipse">
             <a:avLst/>
           </a:prstGeom>
           <a:solidFill xmlns:a="http://schemas.openxmlformats.org/drawingml/2006/main">
-            <a:srgbClr val="000000"/>
-          </a:solidFill>
+            <a:srgbClr val="F3C75D"/>
+          </a:solidFill>
+          <a:ln xmlns:a="http://schemas.openxmlformats.org/drawingml/2006/main" w="0">
+            <a:solidFill>
+              <a:srgbClr val="000000">
+                <a:alpha val="0"/>
+              </a:srgbClr>
+            </a:solidFill>
+            <a:prstDash val="solid"/>
+          </a:ln>
         </p:spPr>
       </p:sp>
       <p:sp>
@@ -3301,15 +4018,23 @@
         </p:nvSpPr>
         <p:spPr>
           <a:xfrm xmlns:a="http://schemas.openxmlformats.org/drawingml/2006/main">
-            <a:off x="8176070" y="3320225"/>
-            <a:ext cx="107061" cy="107061"/>
+            <a:off x="8553450" y="2981325"/>
+            <a:ext cx="228600" cy="228600"/>
           </a:xfrm>
           <a:prstGeom xmlns:a="http://schemas.openxmlformats.org/drawingml/2006/main" prst="ellipse">
             <a:avLst/>
           </a:prstGeom>
           <a:solidFill xmlns:a="http://schemas.openxmlformats.org/drawingml/2006/main">
-            <a:srgbClr val="000000"/>
-          </a:solidFill>
+            <a:srgbClr val="66B8FF"/>
+          </a:solidFill>
+          <a:ln xmlns:a="http://schemas.openxmlformats.org/drawingml/2006/main" w="0">
+            <a:solidFill>
+              <a:srgbClr val="000000">
+                <a:alpha val="0"/>
+              </a:srgbClr>
+            </a:solidFill>
+            <a:prstDash val="solid"/>
+          </a:ln>
         </p:spPr>
       </p:sp>
       <p:sp>
@@ -3328,32 +4053,56 @@
         </p:nvSpPr>
         <p:spPr>
           <a:xfrm xmlns:a="http://schemas.openxmlformats.org/drawingml/2006/main">
-            <a:off x="393668" y="2843308"/>
-            <a:ext cx="1612868" cy="262414"/>
+            <a:off x="685800" y="2381250"/>
+            <a:ext cx="2476500" cy="323850"/>
           </a:xfrm>
           <a:prstGeom xmlns:a="http://schemas.openxmlformats.org/drawingml/2006/main" prst="rect">
             <a:avLst/>
           </a:prstGeom>
+          <a:solidFill xmlns:a="http://schemas.openxmlformats.org/drawingml/2006/main">
+            <a:srgbClr val="000000">
+              <a:alpha val="0"/>
+            </a:srgbClr>
+          </a:solidFill>
+          <a:ln xmlns:a="http://schemas.openxmlformats.org/drawingml/2006/main" w="0">
+            <a:solidFill>
+              <a:srgbClr val="000000">
+                <a:alpha val="0"/>
+              </a:srgbClr>
+            </a:solidFill>
+            <a:prstDash val="solid"/>
+          </a:ln>
         </p:spPr>
         <p:txBody>
-          <a:bodyPr xmlns:a="http://schemas.openxmlformats.org/drawingml/2006/main" lIns="0" tIns="0" rIns="0" bIns="0">
+          <a:bodyPr xmlns:a="http://schemas.openxmlformats.org/drawingml/2006/main" wrap="square" lIns="0" tIns="0" rIns="0" bIns="0" anchor="t">
             <a:noAutofit/>
           </a:bodyPr>
           <a:lstStyle xmlns:a="http://schemas.openxmlformats.org/drawingml/2006/main"/>
           <a:p xmlns:a="http://schemas.openxmlformats.org/drawingml/2006/main">
             <a:pPr algn="l">
+              <a:lnSpc>
+                <a:spcPct val="100000"/>
+              </a:lnSpc>
               <a:buNone/>
-              <a:defRPr sz="1600">
-                <a:solidFill>
-                  <a:srgbClr val="000000"/>
-                </a:solidFill>
-                <a:latin typeface="Helvetica Neue"/>
-                <a:ea typeface="Helvetica Neue"/>
-                <a:cs typeface="Helvetica Neue"/>
-              </a:defRPr>
-            </a:pPr>
-            <a:r>
-              <a:t>01 · SCORE</a:t>
+              <a:defRPr sz="1650" b="1">
+                <a:solidFill>
+                  <a:srgbClr val="67E8D3"/>
+                </a:solidFill>
+                <a:latin typeface="Segoe UI"/>
+                <a:ea typeface="Segoe UI"/>
+                <a:cs typeface="Segoe UI"/>
+              </a:defRPr>
+            </a:pPr>
+            <a:r>
+              <a:rPr sz="1650" b="1">
+                <a:solidFill>
+                  <a:srgbClr val="67E8D3"/>
+                </a:solidFill>
+                <a:latin typeface="Segoe UI"/>
+                <a:ea typeface="Segoe UI"/>
+                <a:cs typeface="Segoe UI"/>
+              </a:rPr>
+              <a:t>01  ·  SCORE</a:t>
             </a:r>
           </a:p>
         </p:txBody>
@@ -3374,32 +4123,56 @@
         </p:nvSpPr>
         <p:spPr>
           <a:xfrm xmlns:a="http://schemas.openxmlformats.org/drawingml/2006/main">
-            <a:off x="4294156" y="2843308"/>
-            <a:ext cx="1612868" cy="262414"/>
+            <a:off x="4457700" y="2381250"/>
+            <a:ext cx="2476500" cy="323850"/>
           </a:xfrm>
           <a:prstGeom xmlns:a="http://schemas.openxmlformats.org/drawingml/2006/main" prst="rect">
             <a:avLst/>
           </a:prstGeom>
+          <a:solidFill xmlns:a="http://schemas.openxmlformats.org/drawingml/2006/main">
+            <a:srgbClr val="000000">
+              <a:alpha val="0"/>
+            </a:srgbClr>
+          </a:solidFill>
+          <a:ln xmlns:a="http://schemas.openxmlformats.org/drawingml/2006/main" w="0">
+            <a:solidFill>
+              <a:srgbClr val="000000">
+                <a:alpha val="0"/>
+              </a:srgbClr>
+            </a:solidFill>
+            <a:prstDash val="solid"/>
+          </a:ln>
         </p:spPr>
         <p:txBody>
-          <a:bodyPr xmlns:a="http://schemas.openxmlformats.org/drawingml/2006/main" lIns="0" tIns="0" rIns="0" bIns="0">
+          <a:bodyPr xmlns:a="http://schemas.openxmlformats.org/drawingml/2006/main" wrap="square" lIns="0" tIns="0" rIns="0" bIns="0" anchor="t">
             <a:noAutofit/>
           </a:bodyPr>
           <a:lstStyle xmlns:a="http://schemas.openxmlformats.org/drawingml/2006/main"/>
           <a:p xmlns:a="http://schemas.openxmlformats.org/drawingml/2006/main">
             <a:pPr algn="l">
+              <a:lnSpc>
+                <a:spcPct val="100000"/>
+              </a:lnSpc>
               <a:buNone/>
-              <a:defRPr sz="1600">
-                <a:solidFill>
-                  <a:srgbClr val="000000"/>
-                </a:solidFill>
-                <a:latin typeface="Helvetica Neue"/>
-                <a:ea typeface="Helvetica Neue"/>
-                <a:cs typeface="Helvetica Neue"/>
-              </a:defRPr>
-            </a:pPr>
-            <a:r>
-              <a:t>02 · SETTLE</a:t>
+              <a:defRPr sz="1650" b="1">
+                <a:solidFill>
+                  <a:srgbClr val="F3C75D"/>
+                </a:solidFill>
+                <a:latin typeface="Segoe UI"/>
+                <a:ea typeface="Segoe UI"/>
+                <a:cs typeface="Segoe UI"/>
+              </a:defRPr>
+            </a:pPr>
+            <a:r>
+              <a:rPr sz="1650" b="1">
+                <a:solidFill>
+                  <a:srgbClr val="F3C75D"/>
+                </a:solidFill>
+                <a:latin typeface="Segoe UI"/>
+                <a:ea typeface="Segoe UI"/>
+                <a:cs typeface="Segoe UI"/>
+              </a:rPr>
+              <a:t>02  ·  GUARD</a:t>
             </a:r>
           </a:p>
         </p:txBody>
@@ -3420,32 +4193,56 @@
         </p:nvSpPr>
         <p:spPr>
           <a:xfrm xmlns:a="http://schemas.openxmlformats.org/drawingml/2006/main">
-            <a:off x="8223218" y="2843308"/>
-            <a:ext cx="1612868" cy="262414"/>
+            <a:off x="8267700" y="2381250"/>
+            <a:ext cx="3143250" cy="323850"/>
           </a:xfrm>
           <a:prstGeom xmlns:a="http://schemas.openxmlformats.org/drawingml/2006/main" prst="rect">
             <a:avLst/>
           </a:prstGeom>
+          <a:solidFill xmlns:a="http://schemas.openxmlformats.org/drawingml/2006/main">
+            <a:srgbClr val="000000">
+              <a:alpha val="0"/>
+            </a:srgbClr>
+          </a:solidFill>
+          <a:ln xmlns:a="http://schemas.openxmlformats.org/drawingml/2006/main" w="0">
+            <a:solidFill>
+              <a:srgbClr val="000000">
+                <a:alpha val="0"/>
+              </a:srgbClr>
+            </a:solidFill>
+            <a:prstDash val="solid"/>
+          </a:ln>
         </p:spPr>
         <p:txBody>
-          <a:bodyPr xmlns:a="http://schemas.openxmlformats.org/drawingml/2006/main" lIns="0" tIns="0" rIns="0" bIns="0">
+          <a:bodyPr xmlns:a="http://schemas.openxmlformats.org/drawingml/2006/main" wrap="square" lIns="0" tIns="0" rIns="0" bIns="0" anchor="t">
             <a:noAutofit/>
           </a:bodyPr>
           <a:lstStyle xmlns:a="http://schemas.openxmlformats.org/drawingml/2006/main"/>
           <a:p xmlns:a="http://schemas.openxmlformats.org/drawingml/2006/main">
             <a:pPr algn="l">
+              <a:lnSpc>
+                <a:spcPct val="100000"/>
+              </a:lnSpc>
               <a:buNone/>
-              <a:defRPr sz="1600">
-                <a:solidFill>
-                  <a:srgbClr val="000000"/>
-                </a:solidFill>
-                <a:latin typeface="Helvetica Neue"/>
-                <a:ea typeface="Helvetica Neue"/>
-                <a:cs typeface="Helvetica Neue"/>
-              </a:defRPr>
-            </a:pPr>
-            <a:r>
-              <a:t>03 · RECEIPT</a:t>
+              <a:defRPr sz="1650" b="1">
+                <a:solidFill>
+                  <a:srgbClr val="66B8FF"/>
+                </a:solidFill>
+                <a:latin typeface="Segoe UI"/>
+                <a:ea typeface="Segoe UI"/>
+                <a:cs typeface="Segoe UI"/>
+              </a:defRPr>
+            </a:pPr>
+            <a:r>
+              <a:rPr sz="1650" b="1">
+                <a:solidFill>
+                  <a:srgbClr val="66B8FF"/>
+                </a:solidFill>
+                <a:latin typeface="Segoe UI"/>
+                <a:ea typeface="Segoe UI"/>
+                <a:cs typeface="Segoe UI"/>
+              </a:rPr>
+              <a:t>03  ·  SETTLE + EXPLAIN</a:t>
             </a:r>
           </a:p>
         </p:txBody>
@@ -3466,48 +4263,75 @@
         </p:nvSpPr>
         <p:spPr>
           <a:xfrm xmlns:a="http://schemas.openxmlformats.org/drawingml/2006/main">
-            <a:off x="4317111" y="3822668"/>
-            <a:ext cx="3156109" cy="1586294"/>
+            <a:off x="4457700" y="3543300"/>
+            <a:ext cx="3143250" cy="1771650"/>
           </a:xfrm>
           <a:prstGeom xmlns:a="http://schemas.openxmlformats.org/drawingml/2006/main" prst="rect">
             <a:avLst/>
           </a:prstGeom>
+          <a:solidFill xmlns:a="http://schemas.openxmlformats.org/drawingml/2006/main">
+            <a:srgbClr val="000000">
+              <a:alpha val="0"/>
+            </a:srgbClr>
+          </a:solidFill>
+          <a:ln xmlns:a="http://schemas.openxmlformats.org/drawingml/2006/main" w="0">
+            <a:solidFill>
+              <a:srgbClr val="000000">
+                <a:alpha val="0"/>
+              </a:srgbClr>
+            </a:solidFill>
+            <a:prstDash val="solid"/>
+          </a:ln>
         </p:spPr>
         <p:txBody>
-          <a:bodyPr xmlns:a="http://schemas.openxmlformats.org/drawingml/2006/main" lIns="0" tIns="0" rIns="0" bIns="0">
+          <a:bodyPr xmlns:a="http://schemas.openxmlformats.org/drawingml/2006/main" wrap="square" lIns="0" tIns="0" rIns="0" bIns="0" anchor="t">
             <a:noAutofit/>
           </a:bodyPr>
           <a:lstStyle xmlns:a="http://schemas.openxmlformats.org/drawingml/2006/main"/>
           <a:p xmlns:a="http://schemas.openxmlformats.org/drawingml/2006/main">
             <a:pPr algn="l">
-              <a:buNone/>
-              <a:defRPr sz="2400">
-                <a:solidFill>
-                  <a:srgbClr val="000000"/>
-                </a:solidFill>
-                <a:latin typeface="Helvetica Neue"/>
-                <a:ea typeface="Helvetica Neue"/>
-                <a:cs typeface="Helvetica Neue"/>
-              </a:defRPr>
-            </a:pPr>
-            <a:r>
-              <a:t>Apply policy</a:t>
+              <a:defRPr sz="1800">
+                <a:solidFill>
+                  <a:srgbClr val="F4F7F5"/>
+                </a:solidFill>
+                <a:latin typeface="Segoe UI"/>
+                <a:ea typeface="Segoe UI"/>
+                <a:cs typeface="Segoe UI"/>
+              </a:defRPr>
+            </a:pPr>
+            <a:r>
+              <a:rPr sz="1800" b="1">
+                <a:solidFill>
+                  <a:srgbClr val="F4F7F5"/>
+                </a:solidFill>
+                <a:latin typeface="Segoe UI"/>
+                <a:ea typeface="Segoe UI"/>
+                <a:cs typeface="Segoe UI"/>
+              </a:rPr>
+              <a:t>Enforce the budget policy.</a:t>
             </a:r>
           </a:p>
           <a:p xmlns:a="http://schemas.openxmlformats.org/drawingml/2006/main">
             <a:pPr algn="l">
-              <a:buNone/>
-              <a:defRPr sz="2400">
-                <a:solidFill>
-                  <a:srgbClr val="000000"/>
-                </a:solidFill>
-                <a:latin typeface="Helvetica Neue"/>
-                <a:ea typeface="Helvetica Neue"/>
-                <a:cs typeface="Helvetica Neue"/>
-              </a:defRPr>
-            </a:pPr>
-            <a:r>
-              <a:t>Enforce reserve, max price, min relevance, and purchase count.</a:t>
+              <a:defRPr sz="1800">
+                <a:solidFill>
+                  <a:srgbClr val="F4F7F5"/>
+                </a:solidFill>
+                <a:latin typeface="Segoe UI"/>
+                <a:ea typeface="Segoe UI"/>
+                <a:cs typeface="Segoe UI"/>
+              </a:defRPr>
+            </a:pPr>
+            <a:r>
+              <a:rPr sz="1600">
+                <a:solidFill>
+                  <a:srgbClr val="9FB3B7"/>
+                </a:solidFill>
+                <a:latin typeface="Segoe UI"/>
+                <a:ea typeface="Segoe UI"/>
+                <a:cs typeface="Segoe UI"/>
+              </a:rPr>
+              <a:t>Reserve · price cap · relevance floor · purchase limit · coverage target.</a:t>
             </a:r>
           </a:p>
         </p:txBody>
@@ -3528,48 +4352,75 @@
         </p:nvSpPr>
         <p:spPr>
           <a:xfrm xmlns:a="http://schemas.openxmlformats.org/drawingml/2006/main">
-            <a:off x="399859" y="3822668"/>
-            <a:ext cx="3156109" cy="1586294"/>
+            <a:off x="685800" y="3543300"/>
+            <a:ext cx="3048000" cy="1524000"/>
           </a:xfrm>
           <a:prstGeom xmlns:a="http://schemas.openxmlformats.org/drawingml/2006/main" prst="rect">
             <a:avLst/>
           </a:prstGeom>
+          <a:solidFill xmlns:a="http://schemas.openxmlformats.org/drawingml/2006/main">
+            <a:srgbClr val="000000">
+              <a:alpha val="0"/>
+            </a:srgbClr>
+          </a:solidFill>
+          <a:ln xmlns:a="http://schemas.openxmlformats.org/drawingml/2006/main" w="0">
+            <a:solidFill>
+              <a:srgbClr val="000000">
+                <a:alpha val="0"/>
+              </a:srgbClr>
+            </a:solidFill>
+            <a:prstDash val="solid"/>
+          </a:ln>
         </p:spPr>
         <p:txBody>
-          <a:bodyPr xmlns:a="http://schemas.openxmlformats.org/drawingml/2006/main" lIns="0" tIns="0" rIns="0" bIns="0">
+          <a:bodyPr xmlns:a="http://schemas.openxmlformats.org/drawingml/2006/main" wrap="square" lIns="0" tIns="0" rIns="0" bIns="0" anchor="t">
             <a:noAutofit/>
           </a:bodyPr>
           <a:lstStyle xmlns:a="http://schemas.openxmlformats.org/drawingml/2006/main"/>
           <a:p xmlns:a="http://schemas.openxmlformats.org/drawingml/2006/main">
             <a:pPr algn="l">
-              <a:buNone/>
-              <a:defRPr sz="2400">
-                <a:solidFill>
-                  <a:srgbClr val="000000"/>
-                </a:solidFill>
-                <a:latin typeface="Helvetica Neue"/>
-                <a:ea typeface="Helvetica Neue"/>
-                <a:cs typeface="Helvetica Neue"/>
-              </a:defRPr>
-            </a:pPr>
-            <a:r>
-              <a:t>Rank value</a:t>
+              <a:defRPr sz="1800">
+                <a:solidFill>
+                  <a:srgbClr val="F4F7F5"/>
+                </a:solidFill>
+                <a:latin typeface="Segoe UI"/>
+                <a:ea typeface="Segoe UI"/>
+                <a:cs typeface="Segoe UI"/>
+              </a:defRPr>
+            </a:pPr>
+            <a:r>
+              <a:rPr sz="1800" b="1">
+                <a:solidFill>
+                  <a:srgbClr val="F4F7F5"/>
+                </a:solidFill>
+                <a:latin typeface="Segoe UI"/>
+                <a:ea typeface="Segoe UI"/>
+                <a:cs typeface="Segoe UI"/>
+              </a:rPr>
+              <a:t>Rank relevance per dollar.</a:t>
             </a:r>
           </a:p>
           <a:p xmlns:a="http://schemas.openxmlformats.org/drawingml/2006/main">
             <a:pPr algn="l">
-              <a:buNone/>
-              <a:defRPr sz="2400">
-                <a:solidFill>
-                  <a:srgbClr val="000000"/>
-                </a:solidFill>
-                <a:latin typeface="Helvetica Neue"/>
-                <a:ea typeface="Helvetica Neue"/>
-                <a:cs typeface="Helvetica Neue"/>
-              </a:defRPr>
-            </a:pPr>
-            <a:r>
-              <a:t>Score relevance per dollar and detect redundant coverage.</a:t>
+              <a:defRPr sz="1800">
+                <a:solidFill>
+                  <a:srgbClr val="F4F7F5"/>
+                </a:solidFill>
+                <a:latin typeface="Segoe UI"/>
+                <a:ea typeface="Segoe UI"/>
+                <a:cs typeface="Segoe UI"/>
+              </a:defRPr>
+            </a:pPr>
+            <a:r>
+              <a:rPr sz="1600">
+                <a:solidFill>
+                  <a:srgbClr val="9FB3B7"/>
+                </a:solidFill>
+                <a:latin typeface="Segoe UI"/>
+                <a:ea typeface="Segoe UI"/>
+                <a:cs typeface="Segoe UI"/>
+              </a:rPr>
+              <a:t>Detect redundancy and prior access before buying.</a:t>
             </a:r>
           </a:p>
         </p:txBody>
@@ -3590,48 +4441,75 @@
         </p:nvSpPr>
         <p:spPr>
           <a:xfrm xmlns:a="http://schemas.openxmlformats.org/drawingml/2006/main">
-            <a:off x="8177879" y="3822668"/>
-            <a:ext cx="3156109" cy="1586294"/>
+            <a:off x="8267700" y="3543300"/>
+            <a:ext cx="3143250" cy="1771650"/>
           </a:xfrm>
           <a:prstGeom xmlns:a="http://schemas.openxmlformats.org/drawingml/2006/main" prst="rect">
             <a:avLst/>
           </a:prstGeom>
+          <a:solidFill xmlns:a="http://schemas.openxmlformats.org/drawingml/2006/main">
+            <a:srgbClr val="000000">
+              <a:alpha val="0"/>
+            </a:srgbClr>
+          </a:solidFill>
+          <a:ln xmlns:a="http://schemas.openxmlformats.org/drawingml/2006/main" w="0">
+            <a:solidFill>
+              <a:srgbClr val="000000">
+                <a:alpha val="0"/>
+              </a:srgbClr>
+            </a:solidFill>
+            <a:prstDash val="solid"/>
+          </a:ln>
         </p:spPr>
         <p:txBody>
-          <a:bodyPr xmlns:a="http://schemas.openxmlformats.org/drawingml/2006/main" lIns="0" tIns="0" rIns="0" bIns="0">
+          <a:bodyPr xmlns:a="http://schemas.openxmlformats.org/drawingml/2006/main" wrap="square" lIns="0" tIns="0" rIns="0" bIns="0" anchor="t">
             <a:noAutofit/>
           </a:bodyPr>
           <a:lstStyle xmlns:a="http://schemas.openxmlformats.org/drawingml/2006/main"/>
           <a:p xmlns:a="http://schemas.openxmlformats.org/drawingml/2006/main">
             <a:pPr algn="l">
-              <a:buNone/>
-              <a:defRPr sz="2400">
-                <a:solidFill>
-                  <a:srgbClr val="000000"/>
-                </a:solidFill>
-                <a:latin typeface="Helvetica Neue"/>
-                <a:ea typeface="Helvetica Neue"/>
-                <a:cs typeface="Helvetica Neue"/>
-              </a:defRPr>
-            </a:pPr>
-            <a:r>
-              <a:t>Explain outcome</a:t>
+              <a:defRPr sz="1800">
+                <a:solidFill>
+                  <a:srgbClr val="F4F7F5"/>
+                </a:solidFill>
+                <a:latin typeface="Segoe UI"/>
+                <a:ea typeface="Segoe UI"/>
+                <a:cs typeface="Segoe UI"/>
+              </a:defRPr>
+            </a:pPr>
+            <a:r>
+              <a:rPr sz="1800" b="1">
+                <a:solidFill>
+                  <a:srgbClr val="F4F7F5"/>
+                </a:solidFill>
+                <a:latin typeface="Segoe UI"/>
+                <a:ea typeface="Segoe UI"/>
+                <a:cs typeface="Segoe UI"/>
+              </a:rPr>
+              <a:t>Move USDC only after approval.</a:t>
             </a:r>
           </a:p>
           <a:p xmlns:a="http://schemas.openxmlformats.org/drawingml/2006/main">
             <a:pPr algn="l">
-              <a:buNone/>
-              <a:defRPr sz="2400">
-                <a:solidFill>
-                  <a:srgbClr val="000000"/>
-                </a:solidFill>
-                <a:latin typeface="Helvetica Neue"/>
-                <a:ea typeface="Helvetica Neue"/>
-                <a:cs typeface="Helvetica Neue"/>
-              </a:defRPr>
-            </a:pPr>
-            <a:r>
-              <a:t>Return answer, receipt, balances, rule ID, and stop reason.</a:t>
+              <a:defRPr sz="1800">
+                <a:solidFill>
+                  <a:srgbClr val="F4F7F5"/>
+                </a:solidFill>
+                <a:latin typeface="Segoe UI"/>
+                <a:ea typeface="Segoe UI"/>
+                <a:cs typeface="Segoe UI"/>
+              </a:defRPr>
+            </a:pPr>
+            <a:r>
+              <a:rPr sz="1600">
+                <a:solidFill>
+                  <a:srgbClr val="9FB3B7"/>
+                </a:solidFill>
+                <a:latin typeface="Segoe UI"/>
+                <a:ea typeface="Segoe UI"/>
+                <a:cs typeface="Segoe UI"/>
+              </a:rPr>
+              <a:t>Record the rule, rationale, receipt, and balances before and after.</a:t>
             </a:r>
           </a:p>
         </p:txBody>
@@ -3652,20 +4530,35 @@
         </p:nvSpPr>
         <p:spPr>
           <a:xfrm xmlns:a="http://schemas.openxmlformats.org/drawingml/2006/main">
-            <a:off x="393668" y="1428750"/>
-            <a:ext cx="914400" cy="47625"/>
+            <a:off x="685800" y="1924050"/>
+            <a:ext cx="990600" cy="38100"/>
           </a:xfrm>
           <a:prstGeom xmlns:a="http://schemas.openxmlformats.org/drawingml/2006/main" prst="rect">
             <a:avLst/>
           </a:prstGeom>
           <a:solidFill xmlns:a="http://schemas.openxmlformats.org/drawingml/2006/main">
-            <a:srgbClr val="38E8C6"/>
+            <a:srgbClr val="67E8D3"/>
           </a:solidFill>
           <a:ln xmlns:a="http://schemas.openxmlformats.org/drawingml/2006/main" w="0">
-            <a:noFill/>
+            <a:solidFill>
+              <a:srgbClr val="000000">
+                <a:alpha val="0"/>
+              </a:srgbClr>
+            </a:solidFill>
             <a:prstDash val="solid"/>
           </a:ln>
         </p:spPr>
+        <p:txBody>
+          <a:bodyPr xmlns:a="http://schemas.openxmlformats.org/drawingml/2006/main" wrap="square" lIns="0" tIns="0" rIns="0" bIns="0" anchor="t">
+            <a:noAutofit/>
+          </a:bodyPr>
+          <a:lstStyle xmlns:a="http://schemas.openxmlformats.org/drawingml/2006/main"/>
+          <a:p xmlns:a="http://schemas.openxmlformats.org/drawingml/2006/main">
+            <a:r>
+              <a:t/>
+            </a:r>
+          </a:p>
+        </p:txBody>
       </p:sp>
     </p:spTree>
     <p:extLst>
@@ -3680,6 +4573,13 @@
 <file path=ppt/slides/slide5.xml><?xml version="1.0" encoding="utf-8"?>
 <p:sld xmlns:p="http://schemas.openxmlformats.org/presentationml/2006/main">
   <p:cSld>
+    <p:bg>
+      <p:bgPr>
+        <a:solidFill xmlns:a="http://schemas.openxmlformats.org/drawingml/2006/main">
+          <a:srgbClr val="061018"/>
+        </a:solidFill>
+      </p:bgPr>
+    </p:bg>
     <p:spTree>
       <p:nvGrpSpPr>
         <p:cNvPr id="1" name=""/>
@@ -3710,12 +4610,18 @@
           </a:xfrm>
           <a:prstGeom xmlns:a="http://schemas.openxmlformats.org/drawingml/2006/main" prst="roundRect">
             <a:avLst>
-              <a:gd name="adj" fmla="val 2564"/>
+              <a:gd name="adj" fmla="val 7051"/>
             </a:avLst>
           </a:prstGeom>
           <a:solidFill xmlns:a="http://schemas.openxmlformats.org/drawingml/2006/main">
-            <a:srgbClr val="F2F2F2"/>
-          </a:solidFill>
+            <a:srgbClr val="0C1A22"/>
+          </a:solidFill>
+          <a:ln xmlns:a="http://schemas.openxmlformats.org/drawingml/2006/main" w="9525">
+            <a:solidFill>
+              <a:srgbClr val="2D4B51"/>
+            </a:solidFill>
+            <a:prstDash val="solid"/>
+          </a:ln>
         </p:spPr>
       </p:sp>
       <p:sp>
@@ -3739,12 +4645,18 @@
           </a:xfrm>
           <a:prstGeom xmlns:a="http://schemas.openxmlformats.org/drawingml/2006/main" prst="roundRect">
             <a:avLst>
-              <a:gd name="adj" fmla="val 2564"/>
+              <a:gd name="adj" fmla="val 7051"/>
             </a:avLst>
           </a:prstGeom>
           <a:solidFill xmlns:a="http://schemas.openxmlformats.org/drawingml/2006/main">
-            <a:srgbClr val="F2F2F2"/>
-          </a:solidFill>
+            <a:srgbClr val="0C1A22"/>
+          </a:solidFill>
+          <a:ln xmlns:a="http://schemas.openxmlformats.org/drawingml/2006/main" w="9525">
+            <a:solidFill>
+              <a:srgbClr val="4D472B"/>
+            </a:solidFill>
+            <a:prstDash val="solid"/>
+          </a:ln>
         </p:spPr>
       </p:sp>
       <p:sp>
@@ -3768,12 +4680,18 @@
           </a:xfrm>
           <a:prstGeom xmlns:a="http://schemas.openxmlformats.org/drawingml/2006/main" prst="roundRect">
             <a:avLst>
-              <a:gd name="adj" fmla="val 2564"/>
+              <a:gd name="adj" fmla="val 7051"/>
             </a:avLst>
           </a:prstGeom>
           <a:solidFill xmlns:a="http://schemas.openxmlformats.org/drawingml/2006/main">
-            <a:srgbClr val="F2F2F2"/>
-          </a:solidFill>
+            <a:srgbClr val="0C1A22"/>
+          </a:solidFill>
+          <a:ln xmlns:a="http://schemas.openxmlformats.org/drawingml/2006/main" w="9525">
+            <a:solidFill>
+              <a:srgbClr val="294662"/>
+            </a:solidFill>
+            <a:prstDash val="solid"/>
+          </a:ln>
         </p:spPr>
       </p:sp>
       <p:sp>
@@ -3792,30 +4710,56 @@
         </p:nvSpPr>
         <p:spPr>
           <a:xfrm xmlns:a="http://schemas.openxmlformats.org/drawingml/2006/main">
-            <a:off x="11279315" y="6279261"/>
-            <a:ext cx="518922" cy="241268"/>
+            <a:off x="11049000" y="419100"/>
+            <a:ext cx="523875" cy="304800"/>
           </a:xfrm>
           <a:prstGeom xmlns:a="http://schemas.openxmlformats.org/drawingml/2006/main" prst="rect">
             <a:avLst/>
           </a:prstGeom>
+          <a:solidFill xmlns:a="http://schemas.openxmlformats.org/drawingml/2006/main">
+            <a:srgbClr val="000000">
+              <a:alpha val="0"/>
+            </a:srgbClr>
+          </a:solidFill>
+          <a:ln xmlns:a="http://schemas.openxmlformats.org/drawingml/2006/main" w="0">
+            <a:solidFill>
+              <a:srgbClr val="000000">
+                <a:alpha val="0"/>
+              </a:srgbClr>
+            </a:solidFill>
+            <a:prstDash val="solid"/>
+          </a:ln>
         </p:spPr>
         <p:txBody>
-          <a:bodyPr xmlns:a="http://schemas.openxmlformats.org/drawingml/2006/main" lIns="0" tIns="0" rIns="0" bIns="0" anchor="b"/>
+          <a:bodyPr xmlns:a="http://schemas.openxmlformats.org/drawingml/2006/main" wrap="square" lIns="0" tIns="0" rIns="0" bIns="0" anchor="ctr">
+            <a:noAutofit/>
+          </a:bodyPr>
           <a:lstStyle xmlns:a="http://schemas.openxmlformats.org/drawingml/2006/main"/>
           <a:p xmlns:a="http://schemas.openxmlformats.org/drawingml/2006/main">
             <a:pPr algn="r">
+              <a:lnSpc>
+                <a:spcPct val="100000"/>
+              </a:lnSpc>
               <a:buNone/>
-              <a:defRPr sz="1000">
-                <a:solidFill>
-                  <a:srgbClr val="000000"/>
-                </a:solidFill>
-                <a:latin typeface="Helvetica Neue"/>
-                <a:ea typeface="Helvetica Neue"/>
-                <a:cs typeface="Helvetica Neue"/>
-              </a:defRPr>
-            </a:pPr>
-            <a:r>
-              <a:t>5</a:t>
+              <a:defRPr sz="1350" b="1">
+                <a:solidFill>
+                  <a:srgbClr val="60777D"/>
+                </a:solidFill>
+                <a:latin typeface="Segoe UI"/>
+                <a:ea typeface="Segoe UI"/>
+                <a:cs typeface="Segoe UI"/>
+              </a:defRPr>
+            </a:pPr>
+            <a:r>
+              <a:rPr sz="1350" b="1">
+                <a:solidFill>
+                  <a:srgbClr val="60777D"/>
+                </a:solidFill>
+                <a:latin typeface="Segoe UI"/>
+                <a:ea typeface="Segoe UI"/>
+                <a:cs typeface="Segoe UI"/>
+              </a:rPr>
+              <a:t>05</a:t>
             </a:r>
           </a:p>
         </p:txBody>
@@ -3836,32 +4780,83 @@
         </p:nvSpPr>
         <p:spPr>
           <a:xfrm xmlns:a="http://schemas.openxmlformats.org/drawingml/2006/main">
-            <a:off x="393668" y="344043"/>
-            <a:ext cx="11404568" cy="1047464"/>
+            <a:off x="685800" y="552450"/>
+            <a:ext cx="10287000" cy="1181100"/>
           </a:xfrm>
           <a:prstGeom xmlns:a="http://schemas.openxmlformats.org/drawingml/2006/main" prst="rect">
             <a:avLst/>
           </a:prstGeom>
+          <a:solidFill xmlns:a="http://schemas.openxmlformats.org/drawingml/2006/main">
+            <a:srgbClr val="000000">
+              <a:alpha val="0"/>
+            </a:srgbClr>
+          </a:solidFill>
+          <a:ln xmlns:a="http://schemas.openxmlformats.org/drawingml/2006/main" w="0">
+            <a:solidFill>
+              <a:srgbClr val="000000">
+                <a:alpha val="0"/>
+              </a:srgbClr>
+            </a:solidFill>
+            <a:prstDash val="solid"/>
+          </a:ln>
         </p:spPr>
         <p:txBody>
-          <a:bodyPr xmlns:a="http://schemas.openxmlformats.org/drawingml/2006/main" lIns="0" tIns="0" rIns="0" bIns="0" anchor="t">
-            <a:normAutofit fontScale="100000"/>
+          <a:bodyPr xmlns:a="http://schemas.openxmlformats.org/drawingml/2006/main" wrap="square" lIns="0" tIns="0" rIns="0" bIns="0" anchor="t">
+            <a:noAutofit/>
           </a:bodyPr>
           <a:lstStyle xmlns:a="http://schemas.openxmlformats.org/drawingml/2006/main"/>
           <a:p xmlns:a="http://schemas.openxmlformats.org/drawingml/2006/main">
             <a:pPr algn="l">
+              <a:lnSpc>
+                <a:spcPct val="94000"/>
+              </a:lnSpc>
               <a:buNone/>
-              <a:defRPr sz="2900">
-                <a:solidFill>
-                  <a:srgbClr val="000000"/>
-                </a:solidFill>
-                <a:latin typeface="Helvetica Neue"/>
-                <a:ea typeface="Helvetica Neue"/>
-                <a:cs typeface="Helvetica Neue"/>
-              </a:defRPr>
-            </a:pPr>
-            <a:r>
-              <a:t>One cent bought the evidence; four cents stayed under policy</a:t>
+              <a:defRPr sz="3600" b="1">
+                <a:solidFill>
+                  <a:srgbClr val="F4F7F5"/>
+                </a:solidFill>
+                <a:latin typeface="Segoe UI"/>
+                <a:ea typeface="Segoe UI"/>
+                <a:cs typeface="Segoe UI"/>
+              </a:defRPr>
+            </a:pPr>
+            <a:r>
+              <a:rPr sz="3600" b="1">
+                <a:solidFill>
+                  <a:srgbClr val="F4F7F5"/>
+                </a:solidFill>
+                <a:latin typeface="Segoe UI"/>
+                <a:ea typeface="Segoe UI"/>
+                <a:cs typeface="Segoe UI"/>
+              </a:rPr>
+              <a:t>One cent moved.</a:t>
+            </a:r>
+          </a:p>
+          <a:p xmlns:a="http://schemas.openxmlformats.org/drawingml/2006/main">
+            <a:pPr algn="l">
+              <a:lnSpc>
+                <a:spcPct val="94000"/>
+              </a:lnSpc>
+              <a:buNone/>
+              <a:defRPr sz="3600" b="1">
+                <a:solidFill>
+                  <a:srgbClr val="F4F7F5"/>
+                </a:solidFill>
+                <a:latin typeface="Segoe UI"/>
+                <a:ea typeface="Segoe UI"/>
+                <a:cs typeface="Segoe UI"/>
+              </a:defRPr>
+            </a:pPr>
+            <a:r>
+              <a:rPr sz="3600" b="1">
+                <a:solidFill>
+                  <a:srgbClr val="F4F7F5"/>
+                </a:solidFill>
+                <a:latin typeface="Segoe UI"/>
+                <a:ea typeface="Segoe UI"/>
+                <a:cs typeface="Segoe UI"/>
+              </a:rPr>
+              <a:t>Four cents stayed under policy.</a:t>
             </a:r>
           </a:p>
         </p:txBody>
@@ -3882,32 +4877,56 @@
         </p:nvSpPr>
         <p:spPr>
           <a:xfrm xmlns:a="http://schemas.openxmlformats.org/drawingml/2006/main">
-            <a:off x="702374" y="4900613"/>
-            <a:ext cx="2949607" cy="819150"/>
+            <a:off x="990600" y="4762500"/>
+            <a:ext cx="2724150" cy="514350"/>
           </a:xfrm>
           <a:prstGeom xmlns:a="http://schemas.openxmlformats.org/drawingml/2006/main" prst="rect">
             <a:avLst/>
           </a:prstGeom>
+          <a:solidFill xmlns:a="http://schemas.openxmlformats.org/drawingml/2006/main">
+            <a:srgbClr val="000000">
+              <a:alpha val="0"/>
+            </a:srgbClr>
+          </a:solidFill>
+          <a:ln xmlns:a="http://schemas.openxmlformats.org/drawingml/2006/main" w="0">
+            <a:solidFill>
+              <a:srgbClr val="000000">
+                <a:alpha val="0"/>
+              </a:srgbClr>
+            </a:solidFill>
+            <a:prstDash val="solid"/>
+          </a:ln>
         </p:spPr>
         <p:txBody>
-          <a:bodyPr xmlns:a="http://schemas.openxmlformats.org/drawingml/2006/main" lIns="91440" tIns="45720" rIns="91440" bIns="45720">
-            <a:normAutofit fontScale="100000"/>
+          <a:bodyPr xmlns:a="http://schemas.openxmlformats.org/drawingml/2006/main" wrap="square" lIns="0" tIns="0" rIns="0" bIns="0" anchor="t">
+            <a:noAutofit/>
           </a:bodyPr>
           <a:lstStyle xmlns:a="http://schemas.openxmlformats.org/drawingml/2006/main"/>
           <a:p xmlns:a="http://schemas.openxmlformats.org/drawingml/2006/main">
             <a:pPr algn="l">
+              <a:lnSpc>
+                <a:spcPct val="100000"/>
+              </a:lnSpc>
               <a:buNone/>
-              <a:defRPr sz="2400">
-                <a:solidFill>
-                  <a:srgbClr val="000000"/>
-                </a:solidFill>
-                <a:latin typeface="Helvetica Neue"/>
-                <a:ea typeface="Helvetica Neue"/>
-                <a:cs typeface="Helvetica Neue"/>
-              </a:defRPr>
-            </a:pPr>
-            <a:r>
-              <a:t>Budget</a:t>
+              <a:defRPr sz="1650" b="1">
+                <a:solidFill>
+                  <a:srgbClr val="9FB3B7"/>
+                </a:solidFill>
+                <a:latin typeface="Segoe UI"/>
+                <a:ea typeface="Segoe UI"/>
+                <a:cs typeface="Segoe UI"/>
+              </a:defRPr>
+            </a:pPr>
+            <a:r>
+              <a:rPr sz="1650" b="1">
+                <a:solidFill>
+                  <a:srgbClr val="9FB3B7"/>
+                </a:solidFill>
+                <a:latin typeface="Segoe UI"/>
+                <a:ea typeface="Segoe UI"/>
+                <a:cs typeface="Segoe UI"/>
+              </a:rPr>
+              <a:t>AGENT BUDGET</a:t>
             </a:r>
           </a:p>
         </p:txBody>
@@ -3928,32 +4947,83 @@
         </p:nvSpPr>
         <p:spPr>
           <a:xfrm xmlns:a="http://schemas.openxmlformats.org/drawingml/2006/main">
-            <a:off x="8541830" y="4900613"/>
-            <a:ext cx="2949607" cy="819150"/>
+            <a:off x="8458200" y="4762500"/>
+            <a:ext cx="2724150" cy="647700"/>
           </a:xfrm>
           <a:prstGeom xmlns:a="http://schemas.openxmlformats.org/drawingml/2006/main" prst="rect">
             <a:avLst/>
           </a:prstGeom>
+          <a:solidFill xmlns:a="http://schemas.openxmlformats.org/drawingml/2006/main">
+            <a:srgbClr val="000000">
+              <a:alpha val="0"/>
+            </a:srgbClr>
+          </a:solidFill>
+          <a:ln xmlns:a="http://schemas.openxmlformats.org/drawingml/2006/main" w="0">
+            <a:solidFill>
+              <a:srgbClr val="000000">
+                <a:alpha val="0"/>
+              </a:srgbClr>
+            </a:solidFill>
+            <a:prstDash val="solid"/>
+          </a:ln>
         </p:spPr>
         <p:txBody>
-          <a:bodyPr xmlns:a="http://schemas.openxmlformats.org/drawingml/2006/main" lIns="91440" tIns="45720" rIns="91440" bIns="45720">
-            <a:normAutofit fontScale="100000"/>
+          <a:bodyPr xmlns:a="http://schemas.openxmlformats.org/drawingml/2006/main" wrap="square" lIns="0" tIns="0" rIns="0" bIns="0" anchor="t">
+            <a:noAutofit/>
           </a:bodyPr>
           <a:lstStyle xmlns:a="http://schemas.openxmlformats.org/drawingml/2006/main"/>
           <a:p xmlns:a="http://schemas.openxmlformats.org/drawingml/2006/main">
             <a:pPr algn="l">
+              <a:lnSpc>
+                <a:spcPct val="100000"/>
+              </a:lnSpc>
               <a:buNone/>
-              <a:defRPr sz="2400">
-                <a:solidFill>
-                  <a:srgbClr val="000000"/>
-                </a:solidFill>
-                <a:latin typeface="Helvetica Neue"/>
-                <a:ea typeface="Helvetica Neue"/>
-                <a:cs typeface="Helvetica Neue"/>
-              </a:defRPr>
-            </a:pPr>
-            <a:r>
-              <a:t>Preserved</a:t>
+              <a:defRPr sz="1650" b="1">
+                <a:solidFill>
+                  <a:srgbClr val="9FB3B7"/>
+                </a:solidFill>
+                <a:latin typeface="Segoe UI"/>
+                <a:ea typeface="Segoe UI"/>
+                <a:cs typeface="Segoe UI"/>
+              </a:defRPr>
+            </a:pPr>
+            <a:r>
+              <a:rPr sz="1650" b="1">
+                <a:solidFill>
+                  <a:srgbClr val="9FB3B7"/>
+                </a:solidFill>
+                <a:latin typeface="Segoe UI"/>
+                <a:ea typeface="Segoe UI"/>
+                <a:cs typeface="Segoe UI"/>
+              </a:rPr>
+              <a:t>PRESERVED</a:t>
+            </a:r>
+          </a:p>
+          <a:p xmlns:a="http://schemas.openxmlformats.org/drawingml/2006/main">
+            <a:pPr algn="l">
+              <a:lnSpc>
+                <a:spcPct val="100000"/>
+              </a:lnSpc>
+              <a:buNone/>
+              <a:defRPr sz="1650" b="1">
+                <a:solidFill>
+                  <a:srgbClr val="9FB3B7"/>
+                </a:solidFill>
+                <a:latin typeface="Segoe UI"/>
+                <a:ea typeface="Segoe UI"/>
+                <a:cs typeface="Segoe UI"/>
+              </a:defRPr>
+            </a:pPr>
+            <a:r>
+              <a:rPr sz="1650" b="1">
+                <a:solidFill>
+                  <a:srgbClr val="9FB3B7"/>
+                </a:solidFill>
+                <a:latin typeface="Segoe UI"/>
+                <a:ea typeface="Segoe UI"/>
+                <a:cs typeface="Segoe UI"/>
+              </a:rPr>
+              <a:t>STOPPED AT 67% COVERAGE</a:t>
             </a:r>
           </a:p>
         </p:txBody>
@@ -3974,32 +5044,83 @@
         </p:nvSpPr>
         <p:spPr>
           <a:xfrm xmlns:a="http://schemas.openxmlformats.org/drawingml/2006/main">
-            <a:off x="4621244" y="4900613"/>
-            <a:ext cx="2949607" cy="819150"/>
+            <a:off x="4724400" y="4762500"/>
+            <a:ext cx="2724150" cy="647700"/>
           </a:xfrm>
           <a:prstGeom xmlns:a="http://schemas.openxmlformats.org/drawingml/2006/main" prst="rect">
             <a:avLst/>
           </a:prstGeom>
+          <a:solidFill xmlns:a="http://schemas.openxmlformats.org/drawingml/2006/main">
+            <a:srgbClr val="000000">
+              <a:alpha val="0"/>
+            </a:srgbClr>
+          </a:solidFill>
+          <a:ln xmlns:a="http://schemas.openxmlformats.org/drawingml/2006/main" w="0">
+            <a:solidFill>
+              <a:srgbClr val="000000">
+                <a:alpha val="0"/>
+              </a:srgbClr>
+            </a:solidFill>
+            <a:prstDash val="solid"/>
+          </a:ln>
         </p:spPr>
         <p:txBody>
-          <a:bodyPr xmlns:a="http://schemas.openxmlformats.org/drawingml/2006/main" lIns="91440" tIns="45720" rIns="91440" bIns="45720">
-            <a:normAutofit fontScale="100000"/>
+          <a:bodyPr xmlns:a="http://schemas.openxmlformats.org/drawingml/2006/main" wrap="square" lIns="0" tIns="0" rIns="0" bIns="0" anchor="t">
+            <a:noAutofit/>
           </a:bodyPr>
           <a:lstStyle xmlns:a="http://schemas.openxmlformats.org/drawingml/2006/main"/>
           <a:p xmlns:a="http://schemas.openxmlformats.org/drawingml/2006/main">
             <a:pPr algn="l">
+              <a:lnSpc>
+                <a:spcPct val="100000"/>
+              </a:lnSpc>
               <a:buNone/>
-              <a:defRPr sz="2400">
-                <a:solidFill>
-                  <a:srgbClr val="000000"/>
-                </a:solidFill>
-                <a:latin typeface="Helvetica Neue"/>
-                <a:ea typeface="Helvetica Neue"/>
-                <a:cs typeface="Helvetica Neue"/>
-              </a:defRPr>
-            </a:pPr>
-            <a:r>
-              <a:t>Arc-settled</a:t>
+              <a:defRPr sz="1650" b="1">
+                <a:solidFill>
+                  <a:srgbClr val="9FB3B7"/>
+                </a:solidFill>
+                <a:latin typeface="Segoe UI"/>
+                <a:ea typeface="Segoe UI"/>
+                <a:cs typeface="Segoe UI"/>
+              </a:defRPr>
+            </a:pPr>
+            <a:r>
+              <a:rPr sz="1650" b="1">
+                <a:solidFill>
+                  <a:srgbClr val="9FB3B7"/>
+                </a:solidFill>
+                <a:latin typeface="Segoe UI"/>
+                <a:ea typeface="Segoe UI"/>
+                <a:cs typeface="Segoe UI"/>
+              </a:rPr>
+              <a:t>USDC SETTLED</a:t>
+            </a:r>
+          </a:p>
+          <a:p xmlns:a="http://schemas.openxmlformats.org/drawingml/2006/main">
+            <a:pPr algn="l">
+              <a:lnSpc>
+                <a:spcPct val="100000"/>
+              </a:lnSpc>
+              <a:buNone/>
+              <a:defRPr sz="1650" b="1">
+                <a:solidFill>
+                  <a:srgbClr val="9FB3B7"/>
+                </a:solidFill>
+                <a:latin typeface="Segoe UI"/>
+                <a:ea typeface="Segoe UI"/>
+                <a:cs typeface="Segoe UI"/>
+              </a:defRPr>
+            </a:pPr>
+            <a:r>
+              <a:rPr sz="1650" b="1">
+                <a:solidFill>
+                  <a:srgbClr val="9FB3B7"/>
+                </a:solidFill>
+                <a:latin typeface="Segoe UI"/>
+                <a:ea typeface="Segoe UI"/>
+                <a:cs typeface="Segoe UI"/>
+              </a:rPr>
+              <a:t>CIRCLE COMPLETE</a:t>
             </a:r>
           </a:p>
         </p:txBody>
@@ -4020,31 +5141,55 @@
         </p:nvSpPr>
         <p:spPr>
           <a:xfrm xmlns:a="http://schemas.openxmlformats.org/drawingml/2006/main">
-            <a:off x="702374" y="3429000"/>
-            <a:ext cx="2940082" cy="1359313"/>
+            <a:off x="990600" y="3657600"/>
+            <a:ext cx="2724150" cy="857250"/>
           </a:xfrm>
           <a:prstGeom xmlns:a="http://schemas.openxmlformats.org/drawingml/2006/main" prst="rect">
             <a:avLst/>
           </a:prstGeom>
+          <a:solidFill xmlns:a="http://schemas.openxmlformats.org/drawingml/2006/main">
+            <a:srgbClr val="000000">
+              <a:alpha val="0"/>
+            </a:srgbClr>
+          </a:solidFill>
+          <a:ln xmlns:a="http://schemas.openxmlformats.org/drawingml/2006/main" w="0">
+            <a:solidFill>
+              <a:srgbClr val="000000">
+                <a:alpha val="0"/>
+              </a:srgbClr>
+            </a:solidFill>
+            <a:prstDash val="solid"/>
+          </a:ln>
         </p:spPr>
         <p:txBody>
-          <a:bodyPr xmlns:a="http://schemas.openxmlformats.org/drawingml/2006/main" lIns="0" tIns="0" rIns="0" bIns="0" anchor="b">
-            <a:normAutofit fontScale="100000"/>
+          <a:bodyPr xmlns:a="http://schemas.openxmlformats.org/drawingml/2006/main" wrap="square" lIns="0" tIns="0" rIns="0" bIns="0" anchor="ctr">
+            <a:noAutofit/>
           </a:bodyPr>
           <a:lstStyle xmlns:a="http://schemas.openxmlformats.org/drawingml/2006/main"/>
           <a:p xmlns:a="http://schemas.openxmlformats.org/drawingml/2006/main">
             <a:pPr algn="l">
+              <a:lnSpc>
+                <a:spcPct val="100000"/>
+              </a:lnSpc>
               <a:buNone/>
-              <a:defRPr sz="2400">
-                <a:solidFill>
-                  <a:srgbClr val="000000"/>
-                </a:solidFill>
-                <a:latin typeface="Helvetica Neue"/>
-                <a:ea typeface="Helvetica Neue"/>
-                <a:cs typeface="Helvetica Neue"/>
-              </a:defRPr>
-            </a:pPr>
-            <a:r>
+              <a:defRPr sz="4350" b="1">
+                <a:solidFill>
+                  <a:srgbClr val="67E8D3"/>
+                </a:solidFill>
+                <a:latin typeface="Segoe UI"/>
+                <a:ea typeface="Segoe UI"/>
+                <a:cs typeface="Segoe UI"/>
+              </a:defRPr>
+            </a:pPr>
+            <a:r>
+              <a:rPr sz="4350" b="1">
+                <a:solidFill>
+                  <a:srgbClr val="67E8D3"/>
+                </a:solidFill>
+                <a:latin typeface="Segoe UI"/>
+                <a:ea typeface="Segoe UI"/>
+                <a:cs typeface="Segoe UI"/>
+              </a:rPr>
               <a:t>$0.050</a:t>
             </a:r>
           </a:p>
@@ -4066,31 +5211,55 @@
         </p:nvSpPr>
         <p:spPr>
           <a:xfrm xmlns:a="http://schemas.openxmlformats.org/drawingml/2006/main">
-            <a:off x="4612958" y="3429000"/>
-            <a:ext cx="2940082" cy="1359313"/>
+            <a:off x="4724400" y="3657600"/>
+            <a:ext cx="2724150" cy="857250"/>
           </a:xfrm>
           <a:prstGeom xmlns:a="http://schemas.openxmlformats.org/drawingml/2006/main" prst="rect">
             <a:avLst/>
           </a:prstGeom>
+          <a:solidFill xmlns:a="http://schemas.openxmlformats.org/drawingml/2006/main">
+            <a:srgbClr val="000000">
+              <a:alpha val="0"/>
+            </a:srgbClr>
+          </a:solidFill>
+          <a:ln xmlns:a="http://schemas.openxmlformats.org/drawingml/2006/main" w="0">
+            <a:solidFill>
+              <a:srgbClr val="000000">
+                <a:alpha val="0"/>
+              </a:srgbClr>
+            </a:solidFill>
+            <a:prstDash val="solid"/>
+          </a:ln>
         </p:spPr>
         <p:txBody>
-          <a:bodyPr xmlns:a="http://schemas.openxmlformats.org/drawingml/2006/main" lIns="0" tIns="0" rIns="0" bIns="0" anchor="b">
-            <a:normAutofit fontScale="100000"/>
+          <a:bodyPr xmlns:a="http://schemas.openxmlformats.org/drawingml/2006/main" wrap="square" lIns="0" tIns="0" rIns="0" bIns="0" anchor="ctr">
+            <a:noAutofit/>
           </a:bodyPr>
           <a:lstStyle xmlns:a="http://schemas.openxmlformats.org/drawingml/2006/main"/>
           <a:p xmlns:a="http://schemas.openxmlformats.org/drawingml/2006/main">
             <a:pPr algn="l">
+              <a:lnSpc>
+                <a:spcPct val="100000"/>
+              </a:lnSpc>
               <a:buNone/>
-              <a:defRPr sz="2400">
-                <a:solidFill>
-                  <a:srgbClr val="000000"/>
-                </a:solidFill>
-                <a:latin typeface="Helvetica Neue"/>
-                <a:ea typeface="Helvetica Neue"/>
-                <a:cs typeface="Helvetica Neue"/>
-              </a:defRPr>
-            </a:pPr>
-            <a:r>
+              <a:defRPr sz="4350" b="1">
+                <a:solidFill>
+                  <a:srgbClr val="F3C75D"/>
+                </a:solidFill>
+                <a:latin typeface="Segoe UI"/>
+                <a:ea typeface="Segoe UI"/>
+                <a:cs typeface="Segoe UI"/>
+              </a:defRPr>
+            </a:pPr>
+            <a:r>
+              <a:rPr sz="4350" b="1">
+                <a:solidFill>
+                  <a:srgbClr val="F3C75D"/>
+                </a:solidFill>
+                <a:latin typeface="Segoe UI"/>
+                <a:ea typeface="Segoe UI"/>
+                <a:cs typeface="Segoe UI"/>
+              </a:rPr>
               <a:t>$0.010</a:t>
             </a:r>
           </a:p>
@@ -4112,31 +5281,55 @@
         </p:nvSpPr>
         <p:spPr>
           <a:xfrm xmlns:a="http://schemas.openxmlformats.org/drawingml/2006/main">
-            <a:off x="8562404" y="3429000"/>
-            <a:ext cx="2940082" cy="1359313"/>
+            <a:off x="8458200" y="3657600"/>
+            <a:ext cx="2724150" cy="857250"/>
           </a:xfrm>
           <a:prstGeom xmlns:a="http://schemas.openxmlformats.org/drawingml/2006/main" prst="rect">
             <a:avLst/>
           </a:prstGeom>
+          <a:solidFill xmlns:a="http://schemas.openxmlformats.org/drawingml/2006/main">
+            <a:srgbClr val="000000">
+              <a:alpha val="0"/>
+            </a:srgbClr>
+          </a:solidFill>
+          <a:ln xmlns:a="http://schemas.openxmlformats.org/drawingml/2006/main" w="0">
+            <a:solidFill>
+              <a:srgbClr val="000000">
+                <a:alpha val="0"/>
+              </a:srgbClr>
+            </a:solidFill>
+            <a:prstDash val="solid"/>
+          </a:ln>
         </p:spPr>
         <p:txBody>
-          <a:bodyPr xmlns:a="http://schemas.openxmlformats.org/drawingml/2006/main" lIns="0" tIns="0" rIns="0" bIns="0" anchor="b">
-            <a:normAutofit fontScale="100000"/>
+          <a:bodyPr xmlns:a="http://schemas.openxmlformats.org/drawingml/2006/main" wrap="square" lIns="0" tIns="0" rIns="0" bIns="0" anchor="ctr">
+            <a:noAutofit/>
           </a:bodyPr>
           <a:lstStyle xmlns:a="http://schemas.openxmlformats.org/drawingml/2006/main"/>
           <a:p xmlns:a="http://schemas.openxmlformats.org/drawingml/2006/main">
             <a:pPr algn="l">
+              <a:lnSpc>
+                <a:spcPct val="100000"/>
+              </a:lnSpc>
               <a:buNone/>
-              <a:defRPr sz="2400">
-                <a:solidFill>
-                  <a:srgbClr val="000000"/>
-                </a:solidFill>
-                <a:latin typeface="Helvetica Neue"/>
-                <a:ea typeface="Helvetica Neue"/>
-                <a:cs typeface="Helvetica Neue"/>
-              </a:defRPr>
-            </a:pPr>
-            <a:r>
+              <a:defRPr sz="4350" b="1">
+                <a:solidFill>
+                  <a:srgbClr val="66B8FF"/>
+                </a:solidFill>
+                <a:latin typeface="Segoe UI"/>
+                <a:ea typeface="Segoe UI"/>
+                <a:cs typeface="Segoe UI"/>
+              </a:defRPr>
+            </a:pPr>
+            <a:r>
+              <a:rPr sz="4350" b="1">
+                <a:solidFill>
+                  <a:srgbClr val="66B8FF"/>
+                </a:solidFill>
+                <a:latin typeface="Segoe UI"/>
+                <a:ea typeface="Segoe UI"/>
+                <a:cs typeface="Segoe UI"/>
+              </a:rPr>
               <a:t>$0.040</a:t>
             </a:r>
           </a:p>
@@ -4158,48 +5351,133 @@
         </p:nvSpPr>
         <p:spPr>
           <a:xfrm xmlns:a="http://schemas.openxmlformats.org/drawingml/2006/main">
-            <a:off x="393668" y="1138333"/>
-            <a:ext cx="11404568" cy="1599438"/>
+            <a:off x="685800" y="1885950"/>
+            <a:ext cx="6858000" cy="1028700"/>
           </a:xfrm>
           <a:prstGeom xmlns:a="http://schemas.openxmlformats.org/drawingml/2006/main" prst="rect">
             <a:avLst/>
           </a:prstGeom>
+          <a:solidFill xmlns:a="http://schemas.openxmlformats.org/drawingml/2006/main">
+            <a:srgbClr val="000000">
+              <a:alpha val="0"/>
+            </a:srgbClr>
+          </a:solidFill>
+          <a:ln xmlns:a="http://schemas.openxmlformats.org/drawingml/2006/main" w="0">
+            <a:solidFill>
+              <a:srgbClr val="000000">
+                <a:alpha val="0"/>
+              </a:srgbClr>
+            </a:solidFill>
+            <a:prstDash val="solid"/>
+          </a:ln>
         </p:spPr>
         <p:txBody>
-          <a:bodyPr xmlns:a="http://schemas.openxmlformats.org/drawingml/2006/main" lIns="0" tIns="0" rIns="0" bIns="0">
+          <a:bodyPr xmlns:a="http://schemas.openxmlformats.org/drawingml/2006/main" wrap="square" lIns="0" tIns="0" rIns="0" bIns="0" anchor="t">
             <a:noAutofit/>
           </a:bodyPr>
           <a:lstStyle xmlns:a="http://schemas.openxmlformats.org/drawingml/2006/main"/>
           <a:p xmlns:a="http://schemas.openxmlformats.org/drawingml/2006/main">
             <a:pPr algn="l">
-              <a:buNone/>
-              <a:defRPr sz="1600">
-                <a:solidFill>
-                  <a:srgbClr val="000000"/>
-                </a:solidFill>
-                <a:latin typeface="Helvetica Neue"/>
-                <a:ea typeface="Helvetica Neue"/>
-                <a:cs typeface="Helvetica Neue"/>
-              </a:defRPr>
-            </a:pPr>
-            <a:r>
-              <a:t>Verified Arc Testnet run · 2026-08-06</a:t>
+              <a:defRPr sz="1800">
+                <a:solidFill>
+                  <a:srgbClr val="F4F7F5"/>
+                </a:solidFill>
+                <a:latin typeface="Segoe UI"/>
+                <a:ea typeface="Segoe UI"/>
+                <a:cs typeface="Segoe UI"/>
+              </a:defRPr>
+            </a:pPr>
+            <a:r>
+              <a:rPr sz="1600" b="1">
+                <a:solidFill>
+                  <a:srgbClr val="67E8D3"/>
+                </a:solidFill>
+                <a:latin typeface="Segoe UI"/>
+                <a:ea typeface="Segoe UI"/>
+                <a:cs typeface="Segoe UI"/>
+              </a:rPr>
+              <a:t>06 AUG 2026  ·  SEPARATE ARC TESTNET EVALUATION</a:t>
             </a:r>
           </a:p>
           <a:p xmlns:a="http://schemas.openxmlformats.org/drawingml/2006/main">
             <a:pPr algn="l">
-              <a:buNone/>
-              <a:defRPr sz="1600">
-                <a:solidFill>
-                  <a:srgbClr val="000000"/>
-                </a:solidFill>
-                <a:latin typeface="Helvetica Neue"/>
-                <a:ea typeface="Helvetica Neue"/>
-                <a:cs typeface="Helvetica Neue"/>
-              </a:defRPr>
-            </a:pPr>
-            <a:r>
-              <a:t>0x03a7e7c9…2809 settled 0.010000 USDC in block 55,584,226. The agent bought one high-relevance source, skipped 20 weak or redundant candidates, and stopped at 67% coverage.</a:t>
+              <a:defRPr sz="1800">
+                <a:solidFill>
+                  <a:srgbClr val="F4F7F5"/>
+                </a:solidFill>
+                <a:latin typeface="Segoe UI"/>
+                <a:ea typeface="Segoe UI"/>
+                <a:cs typeface="Segoe UI"/>
+              </a:defRPr>
+            </a:pPr>
+            <a:r>
+              <a:rPr sz="1600">
+                <a:solidFill>
+                  <a:srgbClr val="F4F7F5"/>
+                </a:solidFill>
+                <a:latin typeface="Segoe UI"/>
+                <a:ea typeface="Segoe UI"/>
+                <a:cs typeface="Segoe UI"/>
+              </a:rPr>
+              <a:t>Circle COMPLETE  ·  Arc receipt successful  ·  block 55,584,226</a:t>
+            </a:r>
+          </a:p>
+          <a:p xmlns:a="http://schemas.openxmlformats.org/drawingml/2006/main">
+            <a:pPr algn="l">
+              <a:defRPr sz="1800">
+                <a:solidFill>
+                  <a:srgbClr val="F4F7F5"/>
+                </a:solidFill>
+                <a:latin typeface="Segoe UI"/>
+                <a:ea typeface="Segoe UI"/>
+                <a:cs typeface="Segoe UI"/>
+              </a:defRPr>
+            </a:pPr>
+            <a:r>
+              <a:rPr sz="1600">
+                <a:solidFill>
+                  <a:srgbClr val="9FB3B7"/>
+                </a:solidFill>
+                <a:latin typeface="Segoe UI"/>
+                <a:ea typeface="Segoe UI"/>
+                <a:cs typeface="Segoe UI"/>
+              </a:rPr>
+              <a:t>Two RPC receipts matched  ·  </a:t>
+            </a:r>
+            <a:r>
+              <a:rPr sz="1600">
+                <a:solidFill>
+                  <a:srgbClr val="9FB3B7"/>
+                </a:solidFill>
+                <a:latin typeface="Segoe UI"/>
+                <a:ea typeface="Segoe UI"/>
+                <a:cs typeface="Segoe UI"/>
+                <a:hlinkClick xmlns:r="http://schemas.openxmlformats.org/officeDocument/2006/relationships" r:id="R16bb8f17e92144b9"/>
+              </a:rPr>
+              <a:t>0x03a7…b92809</a:t>
+            </a:r>
+          </a:p>
+          <a:p xmlns:a="http://schemas.openxmlformats.org/drawingml/2006/main">
+            <a:pPr algn="l">
+              <a:defRPr sz="1800">
+                <a:solidFill>
+                  <a:srgbClr val="F4F7F5"/>
+                </a:solidFill>
+                <a:latin typeface="Segoe UI"/>
+                <a:ea typeface="Segoe UI"/>
+                <a:cs typeface="Segoe UI"/>
+              </a:defRPr>
+            </a:pPr>
+            <a:r>
+              <a:rPr sz="1600">
+                <a:solidFill>
+                  <a:srgbClr val="9FB3B7"/>
+                </a:solidFill>
+                <a:latin typeface="Segoe UI"/>
+                <a:ea typeface="Segoe UI"/>
+                <a:cs typeface="Segoe UI"/>
+              </a:rPr>
+              <a:t>No public-demo activity, production revenue, or organic usage.</a:t>
             </a:r>
           </a:p>
         </p:txBody>
@@ -4220,43 +5498,54 @@
         </p:nvSpPr>
         <p:spPr>
           <a:xfrm xmlns:a="http://schemas.openxmlformats.org/drawingml/2006/main">
-            <a:off x="390525" y="2457450"/>
-            <a:ext cx="3000375" cy="381000"/>
+            <a:off x="7905750" y="2076450"/>
+            <a:ext cx="3600450" cy="381000"/>
           </a:xfrm>
           <a:prstGeom xmlns:a="http://schemas.openxmlformats.org/drawingml/2006/main" prst="roundRect">
             <a:avLst>
-              <a:gd name="adj" fmla="val 30000"/>
+              <a:gd name="adj" fmla="val 45000"/>
             </a:avLst>
           </a:prstGeom>
           <a:solidFill xmlns:a="http://schemas.openxmlformats.org/drawingml/2006/main">
-            <a:srgbClr val="091418"/>
+            <a:srgbClr val="0C1A22"/>
           </a:solidFill>
           <a:ln xmlns:a="http://schemas.openxmlformats.org/drawingml/2006/main" w="9525">
             <a:solidFill>
-              <a:srgbClr val="38E8C6"/>
+              <a:srgbClr val="67E8D3"/>
             </a:solidFill>
             <a:prstDash val="solid"/>
           </a:ln>
         </p:spPr>
         <p:txBody>
-          <a:bodyPr xmlns:a="http://schemas.openxmlformats.org/drawingml/2006/main" anchor="ctr"/>
+          <a:bodyPr xmlns:a="http://schemas.openxmlformats.org/drawingml/2006/main" wrap="square" lIns="114300" tIns="38100" rIns="114300" bIns="38100" anchor="ctr">
+            <a:noAutofit/>
+          </a:bodyPr>
           <a:lstStyle xmlns:a="http://schemas.openxmlformats.org/drawingml/2006/main"/>
           <a:p xmlns:a="http://schemas.openxmlformats.org/drawingml/2006/main">
             <a:pPr algn="ctr">
+              <a:lnSpc>
+                <a:spcPct val="100000"/>
+              </a:lnSpc>
               <a:buNone/>
               <a:defRPr sz="1200" b="1">
                 <a:solidFill>
-                  <a:srgbClr val="38E8C6"/>
-                </a:solidFill>
+                  <a:srgbClr val="67E8D3"/>
+                </a:solidFill>
+                <a:latin typeface="Segoe UI"/>
+                <a:ea typeface="Segoe UI"/>
+                <a:cs typeface="Segoe UI"/>
               </a:defRPr>
             </a:pPr>
             <a:r>
               <a:rPr sz="1200" b="1">
                 <a:solidFill>
-                  <a:srgbClr val="38E8C6"/>
-                </a:solidFill>
-              </a:rPr>
-              <a:t>ARC CONFIRMED · BLOCK 55,584,226</a:t>
+                  <a:srgbClr val="67E8D3"/>
+                </a:solidFill>
+                <a:latin typeface="Segoe UI"/>
+                <a:ea typeface="Segoe UI"/>
+                <a:cs typeface="Segoe UI"/>
+              </a:rPr>
+              <a:t>ARC TESTNET  ·  RECEIPT VERIFIED</a:t>
             </a:r>
           </a:p>
         </p:txBody>
@@ -4274,6 +5563,13 @@
 <file path=ppt/slides/slide6.xml><?xml version="1.0" encoding="utf-8"?>
 <p:sld xmlns:p="http://schemas.openxmlformats.org/presentationml/2006/main">
   <p:cSld>
+    <p:bg>
+      <p:bgPr>
+        <a:solidFill xmlns:a="http://schemas.openxmlformats.org/drawingml/2006/main">
+          <a:srgbClr val="061018"/>
+        </a:solidFill>
+      </p:bgPr>
+    </p:bg>
     <p:spTree>
       <p:nvGrpSpPr>
         <p:cNvPr id="1" name=""/>
@@ -4299,32 +5595,56 @@
         </p:nvSpPr>
         <p:spPr>
           <a:xfrm xmlns:a="http://schemas.openxmlformats.org/drawingml/2006/main">
-            <a:off x="11279315" y="6279261"/>
-            <a:ext cx="518922" cy="241268"/>
+            <a:off x="11049000" y="419100"/>
+            <a:ext cx="523875" cy="304800"/>
           </a:xfrm>
           <a:prstGeom xmlns:a="http://schemas.openxmlformats.org/drawingml/2006/main" prst="rect">
             <a:avLst/>
           </a:prstGeom>
+          <a:solidFill xmlns:a="http://schemas.openxmlformats.org/drawingml/2006/main">
+            <a:srgbClr val="000000">
+              <a:alpha val="0"/>
+            </a:srgbClr>
+          </a:solidFill>
+          <a:ln xmlns:a="http://schemas.openxmlformats.org/drawingml/2006/main" w="0">
+            <a:solidFill>
+              <a:srgbClr val="000000">
+                <a:alpha val="0"/>
+              </a:srgbClr>
+            </a:solidFill>
+            <a:prstDash val="solid"/>
+          </a:ln>
         </p:spPr>
         <p:txBody>
-          <a:bodyPr xmlns:a="http://schemas.openxmlformats.org/drawingml/2006/main" wrap="square" lIns="0" tIns="0" rIns="0" bIns="0" anchor="b">
+          <a:bodyPr xmlns:a="http://schemas.openxmlformats.org/drawingml/2006/main" wrap="square" lIns="0" tIns="0" rIns="0" bIns="0" anchor="ctr">
             <a:noAutofit/>
           </a:bodyPr>
           <a:lstStyle xmlns:a="http://schemas.openxmlformats.org/drawingml/2006/main"/>
           <a:p xmlns:a="http://schemas.openxmlformats.org/drawingml/2006/main">
             <a:pPr algn="r">
+              <a:lnSpc>
+                <a:spcPct val="100000"/>
+              </a:lnSpc>
               <a:buNone/>
-              <a:defRPr sz="1000">
-                <a:solidFill>
-                  <a:srgbClr val="000000"/>
-                </a:solidFill>
-                <a:latin typeface="Helvetica Neue"/>
-                <a:ea typeface="Helvetica Neue"/>
-                <a:cs typeface="Helvetica Neue"/>
-              </a:defRPr>
-            </a:pPr>
-            <a:r>
-              <a:t>6</a:t>
+              <a:defRPr sz="1350" b="1">
+                <a:solidFill>
+                  <a:srgbClr val="60777D"/>
+                </a:solidFill>
+                <a:latin typeface="Segoe UI"/>
+                <a:ea typeface="Segoe UI"/>
+                <a:cs typeface="Segoe UI"/>
+              </a:defRPr>
+            </a:pPr>
+            <a:r>
+              <a:rPr sz="1350" b="1">
+                <a:solidFill>
+                  <a:srgbClr val="60777D"/>
+                </a:solidFill>
+                <a:latin typeface="Segoe UI"/>
+                <a:ea typeface="Segoe UI"/>
+                <a:cs typeface="Segoe UI"/>
+              </a:rPr>
+              <a:t>06</a:t>
             </a:r>
           </a:p>
         </p:txBody>
@@ -4345,12 +5665,25 @@
         </p:nvSpPr>
         <p:spPr>
           <a:xfrm xmlns:a="http://schemas.openxmlformats.org/drawingml/2006/main">
-            <a:off x="393668" y="344043"/>
-            <a:ext cx="11404568" cy="1047464"/>
+            <a:off x="685800" y="552450"/>
+            <a:ext cx="6667500" cy="1181100"/>
           </a:xfrm>
           <a:prstGeom xmlns:a="http://schemas.openxmlformats.org/drawingml/2006/main" prst="rect">
             <a:avLst/>
           </a:prstGeom>
+          <a:solidFill xmlns:a="http://schemas.openxmlformats.org/drawingml/2006/main">
+            <a:srgbClr val="000000">
+              <a:alpha val="0"/>
+            </a:srgbClr>
+          </a:solidFill>
+          <a:ln xmlns:a="http://schemas.openxmlformats.org/drawingml/2006/main" w="0">
+            <a:solidFill>
+              <a:srgbClr val="000000">
+                <a:alpha val="0"/>
+              </a:srgbClr>
+            </a:solidFill>
+            <a:prstDash val="solid"/>
+          </a:ln>
         </p:spPr>
         <p:txBody>
           <a:bodyPr xmlns:a="http://schemas.openxmlformats.org/drawingml/2006/main" wrap="square" lIns="0" tIns="0" rIns="0" bIns="0" anchor="t">
@@ -4359,18 +5692,56 @@
           <a:lstStyle xmlns:a="http://schemas.openxmlformats.org/drawingml/2006/main"/>
           <a:p xmlns:a="http://schemas.openxmlformats.org/drawingml/2006/main">
             <a:pPr algn="l">
+              <a:lnSpc>
+                <a:spcPct val="94000"/>
+              </a:lnSpc>
               <a:buNone/>
-              <a:defRPr sz="2900">
-                <a:solidFill>
-                  <a:srgbClr val="000000"/>
-                </a:solidFill>
-                <a:latin typeface="Helvetica Neue"/>
-                <a:ea typeface="Helvetica Neue"/>
-                <a:cs typeface="Helvetica Neue"/>
-              </a:defRPr>
-            </a:pPr>
-            <a:r>
-              <a:t>Arc proof binds the receipt to one exact USDC transfer</a:t>
+              <a:defRPr sz="3600" b="1">
+                <a:solidFill>
+                  <a:srgbClr val="F4F7F5"/>
+                </a:solidFill>
+                <a:latin typeface="Segoe UI"/>
+                <a:ea typeface="Segoe UI"/>
+                <a:cs typeface="Segoe UI"/>
+              </a:defRPr>
+            </a:pPr>
+            <a:r>
+              <a:rPr sz="3600" b="1">
+                <a:solidFill>
+                  <a:srgbClr val="F4F7F5"/>
+                </a:solidFill>
+                <a:latin typeface="Segoe UI"/>
+                <a:ea typeface="Segoe UI"/>
+                <a:cs typeface="Segoe UI"/>
+              </a:rPr>
+              <a:t>An existing MVP,</a:t>
+            </a:r>
+          </a:p>
+          <a:p xmlns:a="http://schemas.openxmlformats.org/drawingml/2006/main">
+            <a:pPr algn="l">
+              <a:lnSpc>
+                <a:spcPct val="94000"/>
+              </a:lnSpc>
+              <a:buNone/>
+              <a:defRPr sz="3600" b="1">
+                <a:solidFill>
+                  <a:srgbClr val="F4F7F5"/>
+                </a:solidFill>
+                <a:latin typeface="Segoe UI"/>
+                <a:ea typeface="Segoe UI"/>
+                <a:cs typeface="Segoe UI"/>
+              </a:defRPr>
+            </a:pPr>
+            <a:r>
+              <a:rPr sz="3600" b="1">
+                <a:solidFill>
+                  <a:srgbClr val="F4F7F5"/>
+                </a:solidFill>
+                <a:latin typeface="Segoe UI"/>
+                <a:ea typeface="Segoe UI"/>
+                <a:cs typeface="Segoe UI"/>
+              </a:rPr>
+              <a:t>substantially extended for Arc.</a:t>
             </a:r>
           </a:p>
         </p:txBody>
@@ -4391,48 +5762,77 @@
         </p:nvSpPr>
         <p:spPr>
           <a:xfrm xmlns:a="http://schemas.openxmlformats.org/drawingml/2006/main">
-            <a:off x="393668" y="3365468"/>
-            <a:ext cx="3568732" cy="2628900"/>
+            <a:off x="685800" y="3371850"/>
+            <a:ext cx="3276600" cy="2476500"/>
           </a:xfrm>
-          <a:prstGeom xmlns:a="http://schemas.openxmlformats.org/drawingml/2006/main" prst="rect">
-            <a:avLst/>
+          <a:prstGeom xmlns:a="http://schemas.openxmlformats.org/drawingml/2006/main" prst="roundRect">
+            <a:avLst>
+              <a:gd name="adj" fmla="val 8462"/>
+            </a:avLst>
           </a:prstGeom>
+          <a:solidFill xmlns:a="http://schemas.openxmlformats.org/drawingml/2006/main">
+            <a:srgbClr val="0C1A22"/>
+          </a:solidFill>
+          <a:ln xmlns:a="http://schemas.openxmlformats.org/drawingml/2006/main" w="9525">
+            <a:solidFill>
+              <a:srgbClr val="2D4B51"/>
+            </a:solidFill>
+            <a:prstDash val="solid"/>
+          </a:ln>
         </p:spPr>
         <p:txBody>
-          <a:bodyPr xmlns:a="http://schemas.openxmlformats.org/drawingml/2006/main" wrap="square" lIns="0" tIns="0" rIns="0" bIns="0" anchor="t">
+          <a:bodyPr xmlns:a="http://schemas.openxmlformats.org/drawingml/2006/main" wrap="square" lIns="266700" tIns="247650" rIns="266700" bIns="190500" anchor="t">
             <a:noAutofit/>
           </a:bodyPr>
           <a:lstStyle xmlns:a="http://schemas.openxmlformats.org/drawingml/2006/main"/>
           <a:p xmlns:a="http://schemas.openxmlformats.org/drawingml/2006/main">
             <a:pPr algn="l">
-              <a:buNone/>
-              <a:defRPr sz="2400">
-                <a:solidFill>
-                  <a:srgbClr val="000000"/>
-                </a:solidFill>
-                <a:latin typeface="Helvetica Neue"/>
-                <a:ea typeface="Helvetica Neue"/>
-                <a:cs typeface="Helvetica Neue"/>
-              </a:defRPr>
-            </a:pPr>
-            <a:r>
-              <a:t>Agent policy</a:t>
+              <a:defRPr sz="1800">
+                <a:solidFill>
+                  <a:srgbClr val="F4F7F5"/>
+                </a:solidFill>
+                <a:latin typeface="Segoe UI"/>
+                <a:ea typeface="Segoe UI"/>
+                <a:cs typeface="Segoe UI"/>
+              </a:defRPr>
+            </a:pPr>
+            <a:r>
+              <a:rPr sz="1800" b="1">
+                <a:solidFill>
+                  <a:srgbClr val="67E8D3"/>
+                </a:solidFill>
+                <a:latin typeface="Segoe UI"/>
+                <a:ea typeface="Segoe UI"/>
+                <a:cs typeface="Segoe UI"/>
+              </a:rPr>
+              <a:t>INHERITED</a:t>
             </a:r>
           </a:p>
           <a:p xmlns:a="http://schemas.openxmlformats.org/drawingml/2006/main">
             <a:pPr algn="l">
-              <a:buNone/>
-              <a:defRPr sz="2400">
-                <a:solidFill>
-                  <a:srgbClr val="000000"/>
-                </a:solidFill>
-                <a:latin typeface="Helvetica Neue"/>
-                <a:ea typeface="Helvetica Neue"/>
-                <a:cs typeface="Helvetica Neue"/>
-              </a:defRPr>
-            </a:pPr>
-            <a:r>
-              <a:t>A deterministic policy authorizes spend and preserves a $0.005 reserve.</a:t>
+              <a:defRPr sz="1800">
+                <a:solidFill>
+                  <a:srgbClr val="F4F7F5"/>
+                </a:solidFill>
+                <a:latin typeface="Segoe UI"/>
+                <a:ea typeface="Segoe UI"/>
+                <a:cs typeface="Segoe UI"/>
+              </a:defRPr>
+            </a:pPr>
+            <a:r>
+              <a:rPr sz="1600">
+                <a:solidFill>
+                  <a:srgbClr val="F4F7F5"/>
+                </a:solidFill>
+                <a:latin typeface="Segoe UI"/>
+                <a:ea typeface="Segoe UI"/>
+                <a:cs typeface="Segoe UI"/>
+              </a:rPr>
+              <a:t>Web MVP
+Buy / reuse / skip loop
+Circle + Arc settlement path
+Agent API
+x402-style endpoint</a:t>
             </a:r>
           </a:p>
         </p:txBody>
@@ -4453,48 +5853,77 @@
         </p:nvSpPr>
         <p:spPr>
           <a:xfrm xmlns:a="http://schemas.openxmlformats.org/drawingml/2006/main">
-            <a:off x="8229600" y="3365468"/>
-            <a:ext cx="3568732" cy="2628900"/>
+            <a:off x="8229600" y="3371850"/>
+            <a:ext cx="3276600" cy="2476500"/>
           </a:xfrm>
-          <a:prstGeom xmlns:a="http://schemas.openxmlformats.org/drawingml/2006/main" prst="rect">
-            <a:avLst/>
+          <a:prstGeom xmlns:a="http://schemas.openxmlformats.org/drawingml/2006/main" prst="roundRect">
+            <a:avLst>
+              <a:gd name="adj" fmla="val 8462"/>
+            </a:avLst>
           </a:prstGeom>
+          <a:solidFill xmlns:a="http://schemas.openxmlformats.org/drawingml/2006/main">
+            <a:srgbClr val="0C1A22"/>
+          </a:solidFill>
+          <a:ln xmlns:a="http://schemas.openxmlformats.org/drawingml/2006/main" w="9525">
+            <a:solidFill>
+              <a:srgbClr val="294662"/>
+            </a:solidFill>
+            <a:prstDash val="solid"/>
+          </a:ln>
         </p:spPr>
         <p:txBody>
-          <a:bodyPr xmlns:a="http://schemas.openxmlformats.org/drawingml/2006/main" lIns="91440" tIns="45720" rIns="91440" bIns="45720">
-            <a:normAutofit fontScale="100000"/>
+          <a:bodyPr xmlns:a="http://schemas.openxmlformats.org/drawingml/2006/main" wrap="square" lIns="266700" tIns="247650" rIns="266700" bIns="190500" anchor="t">
+            <a:noAutofit/>
           </a:bodyPr>
           <a:lstStyle xmlns:a="http://schemas.openxmlformats.org/drawingml/2006/main"/>
           <a:p xmlns:a="http://schemas.openxmlformats.org/drawingml/2006/main">
             <a:pPr algn="l">
-              <a:buNone/>
-              <a:defRPr sz="2400">
-                <a:solidFill>
-                  <a:srgbClr val="000000"/>
-                </a:solidFill>
-                <a:latin typeface="Helvetica Neue"/>
-                <a:ea typeface="Helvetica Neue"/>
-                <a:cs typeface="Helvetica Neue"/>
-              </a:defRPr>
-            </a:pPr>
-            <a:r>
-              <a:t>Arc verifier</a:t>
+              <a:defRPr sz="1800">
+                <a:solidFill>
+                  <a:srgbClr val="F4F7F5"/>
+                </a:solidFill>
+                <a:latin typeface="Segoe UI"/>
+                <a:ea typeface="Segoe UI"/>
+                <a:cs typeface="Segoe UI"/>
+              </a:defRPr>
+            </a:pPr>
+            <a:r>
+              <a:rPr sz="1800" b="1">
+                <a:solidFill>
+                  <a:srgbClr val="66B8FF"/>
+                </a:solidFill>
+                <a:latin typeface="Segoe UI"/>
+                <a:ea typeface="Segoe UI"/>
+                <a:cs typeface="Segoe UI"/>
+              </a:rPr>
+              <a:t>VERIFIED</a:t>
             </a:r>
           </a:p>
           <a:p xmlns:a="http://schemas.openxmlformats.org/drawingml/2006/main">
             <a:pPr algn="l">
-              <a:buNone/>
-              <a:defRPr sz="2400">
-                <a:solidFill>
-                  <a:srgbClr val="000000"/>
-                </a:solidFill>
-                <a:latin typeface="Helvetica Neue"/>
-                <a:ea typeface="Helvetica Neue"/>
-                <a:cs typeface="Helvetica Neue"/>
-              </a:defRPr>
-            </a:pPr>
-            <a:r>
-              <a:t>Server-side RPC binds payer, USDC contract, recipient, amount, block, block hash, and transaction hash.</a:t>
+              <a:defRPr sz="1800">
+                <a:solidFill>
+                  <a:srgbClr val="F4F7F5"/>
+                </a:solidFill>
+                <a:latin typeface="Segoe UI"/>
+                <a:ea typeface="Segoe UI"/>
+                <a:cs typeface="Segoe UI"/>
+              </a:defRPr>
+            </a:pPr>
+            <a:r>
+              <a:rPr sz="1600">
+                <a:solidFill>
+                  <a:srgbClr val="F4F7F5"/>
+                </a:solidFill>
+                <a:latin typeface="Segoe UI"/>
+                <a:ea typeface="Segoe UI"/>
+                <a:cs typeface="Segoe UI"/>
+              </a:rPr>
+              <a:t>Circle Wallets → Arc verifier
+Native API 201
+x402 402 → 200
+Strict receipt match
+46 backend tests passing</a:t>
             </a:r>
           </a:p>
         </p:txBody>
@@ -4515,48 +5944,77 @@
         </p:nvSpPr>
         <p:spPr>
           <a:xfrm xmlns:a="http://schemas.openxmlformats.org/drawingml/2006/main">
-            <a:off x="4311682" y="3365468"/>
-            <a:ext cx="3568732" cy="2628900"/>
+            <a:off x="4457700" y="3371850"/>
+            <a:ext cx="3276600" cy="2476500"/>
           </a:xfrm>
-          <a:prstGeom xmlns:a="http://schemas.openxmlformats.org/drawingml/2006/main" prst="rect">
-            <a:avLst/>
+          <a:prstGeom xmlns:a="http://schemas.openxmlformats.org/drawingml/2006/main" prst="roundRect">
+            <a:avLst>
+              <a:gd name="adj" fmla="val 8462"/>
+            </a:avLst>
           </a:prstGeom>
+          <a:solidFill xmlns:a="http://schemas.openxmlformats.org/drawingml/2006/main">
+            <a:srgbClr val="0C1A22"/>
+          </a:solidFill>
+          <a:ln xmlns:a="http://schemas.openxmlformats.org/drawingml/2006/main" w="9525">
+            <a:solidFill>
+              <a:srgbClr val="4D472B"/>
+            </a:solidFill>
+            <a:prstDash val="solid"/>
+          </a:ln>
         </p:spPr>
         <p:txBody>
-          <a:bodyPr xmlns:a="http://schemas.openxmlformats.org/drawingml/2006/main" lIns="91440" tIns="45720" rIns="91440" bIns="45720">
-            <a:normAutofit fontScale="100000"/>
+          <a:bodyPr xmlns:a="http://schemas.openxmlformats.org/drawingml/2006/main" wrap="square" lIns="266700" tIns="247650" rIns="266700" bIns="190500" anchor="t">
+            <a:noAutofit/>
           </a:bodyPr>
           <a:lstStyle xmlns:a="http://schemas.openxmlformats.org/drawingml/2006/main"/>
           <a:p xmlns:a="http://schemas.openxmlformats.org/drawingml/2006/main">
             <a:pPr algn="l">
-              <a:buNone/>
-              <a:defRPr sz="2400">
-                <a:solidFill>
-                  <a:srgbClr val="000000"/>
-                </a:solidFill>
-                <a:latin typeface="Helvetica Neue"/>
-                <a:ea typeface="Helvetica Neue"/>
-                <a:cs typeface="Helvetica Neue"/>
-              </a:defRPr>
-            </a:pPr>
-            <a:r>
-              <a:t>Circle Wallets</a:t>
+              <a:defRPr sz="1800">
+                <a:solidFill>
+                  <a:srgbClr val="F4F7F5"/>
+                </a:solidFill>
+                <a:latin typeface="Segoe UI"/>
+                <a:ea typeface="Segoe UI"/>
+                <a:cs typeface="Segoe UI"/>
+              </a:defRPr>
+            </a:pPr>
+            <a:r>
+              <a:rPr sz="1800" b="1">
+                <a:solidFill>
+                  <a:srgbClr val="F3C75D"/>
+                </a:solidFill>
+                <a:latin typeface="Segoe UI"/>
+                <a:ea typeface="Segoe UI"/>
+                <a:cs typeface="Segoe UI"/>
+              </a:rPr>
+              <a:t>NEW FOR ARC</a:t>
             </a:r>
           </a:p>
           <a:p xmlns:a="http://schemas.openxmlformats.org/drawingml/2006/main">
             <a:pPr algn="l">
-              <a:buNone/>
-              <a:defRPr sz="2400">
-                <a:solidFill>
-                  <a:srgbClr val="000000"/>
-                </a:solidFill>
-                <a:latin typeface="Helvetica Neue"/>
-                <a:ea typeface="Helvetica Neue"/>
-                <a:cs typeface="Helvetica Neue"/>
-              </a:defRPr>
-            </a:pPr>
-            <a:r>
-              <a:t>A COMPLETE transaction settled 0.010000 USDC from the agent payer to the creator.</a:t>
+              <a:defRPr sz="1800">
+                <a:solidFill>
+                  <a:srgbClr val="F4F7F5"/>
+                </a:solidFill>
+                <a:latin typeface="Segoe UI"/>
+                <a:ea typeface="Segoe UI"/>
+                <a:cs typeface="Segoe UI"/>
+              </a:defRPr>
+            </a:pPr>
+            <a:r>
+              <a:rPr sz="1600">
+                <a:solidFill>
+                  <a:srgbClr val="F4F7F5"/>
+                </a:solidFill>
+                <a:latin typeface="Segoe UI"/>
+                <a:ea typeface="Segoe UI"/>
+                <a:cs typeface="Segoe UI"/>
+              </a:rPr>
+              <a:t>Request-scoped spending guards
+Policy snapshots + stop audits
+Fail-closed deployment
+Fresh Arc Testnet evidence
+Server-side Arc verifier</a:t>
             </a:r>
           </a:p>
         </p:txBody>
@@ -4570,16 +6028,18 @@
           <p:nvPr/>
         </p:nvPicPr>
         <p:blipFill>
-          <a:blip xmlns:r="http://schemas.openxmlformats.org/officeDocument/2006/relationships" xmlns:a="http://schemas.openxmlformats.org/drawingml/2006/main" r:embed="Rec323733efb1476a"/>
+          <a:blip xmlns:r="http://schemas.openxmlformats.org/officeDocument/2006/relationships" xmlns:a="http://schemas.openxmlformats.org/drawingml/2006/main" r:embed="R9ce71b000fa14054"/>
           <a:stretch xmlns:a="http://schemas.openxmlformats.org/drawingml/2006/main"/>
         </p:blipFill>
         <p:spPr>
           <a:xfrm xmlns:a="http://schemas.openxmlformats.org/drawingml/2006/main">
-            <a:off x="7503205" y="1333500"/>
-            <a:ext cx="2757714" cy="1809750"/>
+            <a:off x="7429500" y="1028700"/>
+            <a:ext cx="4000500" cy="2038350"/>
           </a:xfrm>
           <a:prstGeom xmlns:a="http://schemas.openxmlformats.org/drawingml/2006/main" prst="roundRect">
-            <a:avLst/>
+            <a:avLst>
+              <a:gd name="adj" fmla="val 9346"/>
+            </a:avLst>
           </a:prstGeom>
         </p:spPr>
       </p:pic>
@@ -4599,55 +6059,75 @@
         </p:nvSpPr>
         <p:spPr>
           <a:xfrm xmlns:a="http://schemas.openxmlformats.org/drawingml/2006/main">
-            <a:off x="393668" y="1743075"/>
-            <a:ext cx="5191125" cy="1047750"/>
+            <a:off x="685800" y="1962150"/>
+            <a:ext cx="6096000" cy="819150"/>
           </a:xfrm>
           <a:prstGeom xmlns:a="http://schemas.openxmlformats.org/drawingml/2006/main" prst="rect">
             <a:avLst/>
           </a:prstGeom>
-          <a:noFill xmlns:a="http://schemas.openxmlformats.org/drawingml/2006/main"/>
+          <a:solidFill xmlns:a="http://schemas.openxmlformats.org/drawingml/2006/main">
+            <a:srgbClr val="000000">
+              <a:alpha val="0"/>
+            </a:srgbClr>
+          </a:solidFill>
           <a:ln xmlns:a="http://schemas.openxmlformats.org/drawingml/2006/main" w="0">
-            <a:noFill/>
+            <a:solidFill>
+              <a:srgbClr val="000000">
+                <a:alpha val="0"/>
+              </a:srgbClr>
+            </a:solidFill>
             <a:prstDash val="solid"/>
           </a:ln>
         </p:spPr>
         <p:txBody>
-          <a:bodyPr xmlns:a="http://schemas.openxmlformats.org/drawingml/2006/main"/>
+          <a:bodyPr xmlns:a="http://schemas.openxmlformats.org/drawingml/2006/main" wrap="square" lIns="0" tIns="0" rIns="0" bIns="0" anchor="t">
+            <a:noAutofit/>
+          </a:bodyPr>
           <a:lstStyle xmlns:a="http://schemas.openxmlformats.org/drawingml/2006/main"/>
           <a:p xmlns:a="http://schemas.openxmlformats.org/drawingml/2006/main">
-            <a:pPr>
-              <a:buNone/>
-              <a:defRPr sz="1875" b="1">
-                <a:solidFill>
-                  <a:srgbClr val="000000"/>
-                </a:solidFill>
-              </a:defRPr>
-            </a:pPr>
-            <a:r>
-              <a:rPr sz="1875" b="1">
-                <a:solidFill>
-                  <a:srgbClr val="000000"/>
-                </a:solidFill>
-              </a:rPr>
-              <a:t>46 backend tests passed</a:t>
-            </a:r>
-          </a:p>
-          <a:p xmlns:a="http://schemas.openxmlformats.org/drawingml/2006/main">
-            <a:pPr>
-              <a:buNone/>
-              <a:defRPr sz="1875" b="1">
-                <a:solidFill>
-                  <a:srgbClr val="000000"/>
-                </a:solidFill>
-              </a:defRPr>
-            </a:pPr>
-            <a:r>
-              <a:rPr sz="1875" b="1">
-                <a:solidFill>
-                  <a:srgbClr val="000000"/>
-                </a:solidFill>
-              </a:rPr>
-              <a:t>Strict evidence match · health 200 · x402 402→200</a:t>
+            <a:pPr algn="l">
+              <a:defRPr sz="1800">
+                <a:solidFill>
+                  <a:srgbClr val="F4F7F5"/>
+                </a:solidFill>
+                <a:latin typeface="Segoe UI"/>
+                <a:ea typeface="Segoe UI"/>
+                <a:cs typeface="Segoe UI"/>
+              </a:defRPr>
+            </a:pPr>
+            <a:r>
+              <a:rPr sz="1600" b="1">
+                <a:solidFill>
+                  <a:srgbClr val="F3C75D"/>
+                </a:solidFill>
+                <a:latin typeface="Segoe UI"/>
+                <a:ea typeface="Segoe UI"/>
+                <a:cs typeface="Segoe UI"/>
+              </a:rPr>
+              <a:t>EXISTING PROJECT  ·  SUBSTANTIAL NEW ARC ITERATION</a:t>
+            </a:r>
+          </a:p>
+          <a:p xmlns:a="http://schemas.openxmlformats.org/drawingml/2006/main">
+            <a:pPr algn="l">
+              <a:defRPr sz="1800">
+                <a:solidFill>
+                  <a:srgbClr val="F4F7F5"/>
+                </a:solidFill>
+                <a:latin typeface="Segoe UI"/>
+                <a:ea typeface="Segoe UI"/>
+                <a:cs typeface="Segoe UI"/>
+              </a:defRPr>
+            </a:pPr>
+            <a:r>
+              <a:rPr sz="1800" b="1">
+                <a:solidFill>
+                  <a:srgbClr val="F4F7F5"/>
+                </a:solidFill>
+                <a:latin typeface="Segoe UI"/>
+                <a:ea typeface="Segoe UI"/>
+                <a:cs typeface="Segoe UI"/>
+              </a:rPr>
+              <a:t>46 / 46 backend tests passing  ·  frontend JavaScript syntax validated</a:t>
             </a:r>
           </a:p>
         </p:txBody>
@@ -4665,6 +6145,13 @@
 <file path=ppt/slides/slide7.xml><?xml version="1.0" encoding="utf-8"?>
 <p:sld xmlns:p="http://schemas.openxmlformats.org/presentationml/2006/main">
   <p:cSld>
+    <p:bg>
+      <p:bgPr>
+        <a:solidFill xmlns:a="http://schemas.openxmlformats.org/drawingml/2006/main">
+          <a:srgbClr val="061018"/>
+        </a:solidFill>
+      </p:bgPr>
+    </p:bg>
     <p:spTree>
       <p:nvGrpSpPr>
         <p:cNvPr id="1" name=""/>
@@ -4690,33 +6177,83 @@
         </p:nvSpPr>
         <p:spPr>
           <a:xfrm xmlns:a="http://schemas.openxmlformats.org/drawingml/2006/main">
-            <a:off x="393668" y="1738789"/>
-            <a:ext cx="9448800" cy="2491454"/>
+            <a:off x="685800" y="1409700"/>
+            <a:ext cx="7143750" cy="2000250"/>
           </a:xfrm>
           <a:prstGeom xmlns:a="http://schemas.openxmlformats.org/drawingml/2006/main" prst="rect">
             <a:avLst/>
           </a:prstGeom>
+          <a:solidFill xmlns:a="http://schemas.openxmlformats.org/drawingml/2006/main">
+            <a:srgbClr val="000000">
+              <a:alpha val="0"/>
+            </a:srgbClr>
+          </a:solidFill>
+          <a:ln xmlns:a="http://schemas.openxmlformats.org/drawingml/2006/main" w="0">
+            <a:solidFill>
+              <a:srgbClr val="000000">
+                <a:alpha val="0"/>
+              </a:srgbClr>
+            </a:solidFill>
+            <a:prstDash val="solid"/>
+          </a:ln>
         </p:spPr>
         <p:txBody>
-          <a:bodyPr xmlns:a="http://schemas.openxmlformats.org/drawingml/2006/main" lIns="0" tIns="0" rIns="0" bIns="0" anchor="b">
+          <a:bodyPr xmlns:a="http://schemas.openxmlformats.org/drawingml/2006/main" wrap="square" lIns="0" tIns="0" rIns="0" bIns="0" anchor="t">
             <a:noAutofit/>
           </a:bodyPr>
           <a:lstStyle xmlns:a="http://schemas.openxmlformats.org/drawingml/2006/main"/>
           <a:p xmlns:a="http://schemas.openxmlformats.org/drawingml/2006/main">
             <a:pPr algn="l">
+              <a:lnSpc>
+                <a:spcPct val="92000"/>
+              </a:lnSpc>
               <a:buNone/>
-              <a:defRPr sz="6000">
-                <a:solidFill>
-                  <a:srgbClr val="000000"/>
-                </a:solidFill>
-                <a:latin typeface="Helvetica Neue"/>
-                <a:ea typeface="Helvetica Neue"/>
-                <a:cs typeface="Helvetica Neue"/>
-              </a:defRPr>
-            </a:pPr>
-            <a:r>
-              <a:t>Agents read.
-Creators get paid.</a:t>
+              <a:defRPr sz="5250" b="1">
+                <a:solidFill>
+                  <a:srgbClr val="F4F7F5"/>
+                </a:solidFill>
+                <a:latin typeface="Segoe UI"/>
+                <a:ea typeface="Segoe UI"/>
+                <a:cs typeface="Segoe UI"/>
+              </a:defRPr>
+            </a:pPr>
+            <a:r>
+              <a:rPr sz="5250" b="1">
+                <a:solidFill>
+                  <a:srgbClr val="F4F7F5"/>
+                </a:solidFill>
+                <a:latin typeface="Segoe UI"/>
+                <a:ea typeface="Segoe UI"/>
+                <a:cs typeface="Segoe UI"/>
+              </a:rPr>
+              <a:t>Machine reading</a:t>
+            </a:r>
+          </a:p>
+          <a:p xmlns:a="http://schemas.openxmlformats.org/drawingml/2006/main">
+            <a:pPr algn="l">
+              <a:lnSpc>
+                <a:spcPct val="92000"/>
+              </a:lnSpc>
+              <a:buNone/>
+              <a:defRPr sz="5250" b="1">
+                <a:solidFill>
+                  <a:srgbClr val="F4F7F5"/>
+                </a:solidFill>
+                <a:latin typeface="Segoe UI"/>
+                <a:ea typeface="Segoe UI"/>
+                <a:cs typeface="Segoe UI"/>
+              </a:defRPr>
+            </a:pPr>
+            <a:r>
+              <a:rPr sz="5250" b="1">
+                <a:solidFill>
+                  <a:srgbClr val="F4F7F5"/>
+                </a:solidFill>
+                <a:latin typeface="Segoe UI"/>
+                <a:ea typeface="Segoe UI"/>
+                <a:cs typeface="Segoe UI"/>
+              </a:rPr>
+              <a:t>becomes accountable.</a:t>
             </a:r>
           </a:p>
         </p:txBody>
@@ -4737,20 +6274,114 @@
         </p:nvSpPr>
         <p:spPr>
           <a:xfrm xmlns:a="http://schemas.openxmlformats.org/drawingml/2006/main">
-            <a:off x="393668" y="4973288"/>
-            <a:ext cx="3568732" cy="1080230"/>
+            <a:off x="723900" y="4114800"/>
+            <a:ext cx="3429000" cy="1885950"/>
           </a:xfrm>
           <a:prstGeom xmlns:a="http://schemas.openxmlformats.org/drawingml/2006/main" prst="rect">
             <a:avLst/>
           </a:prstGeom>
+          <a:solidFill xmlns:a="http://schemas.openxmlformats.org/drawingml/2006/main">
+            <a:srgbClr val="000000">
+              <a:alpha val="0"/>
+            </a:srgbClr>
+          </a:solidFill>
+          <a:ln xmlns:a="http://schemas.openxmlformats.org/drawingml/2006/main" w="0">
+            <a:solidFill>
+              <a:srgbClr val="000000">
+                <a:alpha val="0"/>
+              </a:srgbClr>
+            </a:solidFill>
+            <a:prstDash val="solid"/>
+          </a:ln>
         </p:spPr>
         <p:txBody>
-          <a:bodyPr xmlns:a="http://schemas.openxmlformats.org/drawingml/2006/main" lIns="0" tIns="0" rIns="0" bIns="0">
+          <a:bodyPr xmlns:a="http://schemas.openxmlformats.org/drawingml/2006/main" wrap="square" lIns="0" tIns="0" rIns="0" bIns="0" anchor="t">
             <a:noAutofit/>
           </a:bodyPr>
           <a:lstStyle xmlns:a="http://schemas.openxmlformats.org/drawingml/2006/main"/>
           <a:p xmlns:a="http://schemas.openxmlformats.org/drawingml/2006/main">
             <a:pPr algn="l">
+              <a:lnSpc>
+                <a:spcPct val="100000"/>
+              </a:lnSpc>
+              <a:buNone/>
+              <a:defRPr sz="2100" b="1">
+                <a:solidFill>
+                  <a:srgbClr val="F3C75D"/>
+                </a:solidFill>
+                <a:latin typeface="Segoe UI"/>
+                <a:ea typeface="Segoe UI"/>
+                <a:cs typeface="Segoe UI"/>
+              </a:defRPr>
+            </a:pPr>
+            <a:r>
+              <a:rPr sz="2100" b="1">
+                <a:solidFill>
+                  <a:srgbClr val="F3C75D"/>
+                </a:solidFill>
+                <a:latin typeface="Segoe UI"/>
+                <a:ea typeface="Segoe UI"/>
+                <a:cs typeface="Segoe UI"/>
+              </a:rPr>
+              <a:t>A PRICE.</a:t>
+            </a:r>
+          </a:p>
+          <a:p xmlns:a="http://schemas.openxmlformats.org/drawingml/2006/main">
+            <a:pPr algn="l">
+              <a:lnSpc>
+                <a:spcPct val="100000"/>
+              </a:lnSpc>
+              <a:buNone/>
+              <a:defRPr sz="2100" b="1">
+                <a:solidFill>
+                  <a:srgbClr val="F3C75D"/>
+                </a:solidFill>
+                <a:latin typeface="Segoe UI"/>
+                <a:ea typeface="Segoe UI"/>
+                <a:cs typeface="Segoe UI"/>
+              </a:defRPr>
+            </a:pPr>
+            <a:r>
+              <a:rPr sz="2100" b="1">
+                <a:solidFill>
+                  <a:srgbClr val="F3C75D"/>
+                </a:solidFill>
+                <a:latin typeface="Segoe UI"/>
+                <a:ea typeface="Segoe UI"/>
+                <a:cs typeface="Segoe UI"/>
+              </a:rPr>
+              <a:t>A POLICY.</a:t>
+            </a:r>
+          </a:p>
+          <a:p xmlns:a="http://schemas.openxmlformats.org/drawingml/2006/main">
+            <a:pPr algn="l">
+              <a:lnSpc>
+                <a:spcPct val="100000"/>
+              </a:lnSpc>
+              <a:buNone/>
+              <a:defRPr sz="2100" b="1">
+                <a:solidFill>
+                  <a:srgbClr val="F3C75D"/>
+                </a:solidFill>
+                <a:latin typeface="Segoe UI"/>
+                <a:ea typeface="Segoe UI"/>
+                <a:cs typeface="Segoe UI"/>
+              </a:defRPr>
+            </a:pPr>
+            <a:r>
+              <a:rPr sz="2100" b="1">
+                <a:solidFill>
+                  <a:srgbClr val="F3C75D"/>
+                </a:solidFill>
+                <a:latin typeface="Segoe UI"/>
+                <a:ea typeface="Segoe UI"/>
+                <a:cs typeface="Segoe UI"/>
+              </a:rPr>
+              <a:t>A RECEIPT.</a:t>
+            </a:r>
+          </a:p>
+          <a:p xmlns:a="http://schemas.openxmlformats.org/drawingml/2006/main">
+            <a:pPr algn="l">
               <a:buNone/>
               <a:defRPr sz="2400">
                 <a:solidFill>
@@ -4762,39 +6393,34 @@
               </a:defRPr>
             </a:pPr>
             <a:r>
-              <a:t>LIVE DEMO</a:t>
+              <a:t/>
             </a:r>
           </a:p>
           <a:p xmlns:a="http://schemas.openxmlformats.org/drawingml/2006/main">
             <a:pPr algn="l">
+              <a:lnSpc>
+                <a:spcPct val="100000"/>
+              </a:lnSpc>
               <a:buNone/>
-              <a:defRPr sz="2400">
-                <a:solidFill>
-                  <a:srgbClr val="000000"/>
-                </a:solidFill>
-                <a:latin typeface="Helvetica Neue"/>
-                <a:ea typeface="Helvetica Neue"/>
-                <a:cs typeface="Helvetica Neue"/>
-              </a:defRPr>
-            </a:pPr>
-            <a:r>
-              <a:t>PUBLIC CODE</a:t>
-            </a:r>
-          </a:p>
-          <a:p xmlns:a="http://schemas.openxmlformats.org/drawingml/2006/main">
-            <a:pPr algn="l">
-              <a:buNone/>
-              <a:defRPr sz="2400">
-                <a:solidFill>
-                  <a:srgbClr val="000000"/>
-                </a:solidFill>
-                <a:latin typeface="Helvetica Neue"/>
-                <a:ea typeface="Helvetica Neue"/>
-                <a:cs typeface="Helvetica Neue"/>
-              </a:defRPr>
-            </a:pPr>
-            <a:r>
-              <a:t>AGENTIC ECONOMY</a:t>
+              <a:defRPr sz="2100" b="1">
+                <a:solidFill>
+                  <a:srgbClr val="F3C75D"/>
+                </a:solidFill>
+                <a:latin typeface="Segoe UI"/>
+                <a:ea typeface="Segoe UI"/>
+                <a:cs typeface="Segoe UI"/>
+              </a:defRPr>
+            </a:pPr>
+            <a:r>
+              <a:rPr sz="2100" b="1">
+                <a:solidFill>
+                  <a:srgbClr val="F3C75D"/>
+                </a:solidFill>
+                <a:latin typeface="Segoe UI"/>
+                <a:ea typeface="Segoe UI"/>
+                <a:cs typeface="Segoe UI"/>
+              </a:rPr>
+              <a:t>Chengzi  ·  Solo builder</a:t>
             </a:r>
           </a:p>
         </p:txBody>
@@ -4815,32 +6441,56 @@
         </p:nvSpPr>
         <p:spPr>
           <a:xfrm xmlns:a="http://schemas.openxmlformats.org/drawingml/2006/main">
-            <a:off x="393668" y="392240"/>
-            <a:ext cx="1612868" cy="649129"/>
+            <a:off x="685800" y="514350"/>
+            <a:ext cx="4095750" cy="342900"/>
           </a:xfrm>
           <a:prstGeom xmlns:a="http://schemas.openxmlformats.org/drawingml/2006/main" prst="rect">
             <a:avLst/>
           </a:prstGeom>
+          <a:solidFill xmlns:a="http://schemas.openxmlformats.org/drawingml/2006/main">
+            <a:srgbClr val="000000">
+              <a:alpha val="0"/>
+            </a:srgbClr>
+          </a:solidFill>
+          <a:ln xmlns:a="http://schemas.openxmlformats.org/drawingml/2006/main" w="0">
+            <a:solidFill>
+              <a:srgbClr val="000000">
+                <a:alpha val="0"/>
+              </a:srgbClr>
+            </a:solidFill>
+            <a:prstDash val="solid"/>
+          </a:ln>
         </p:spPr>
         <p:txBody>
-          <a:bodyPr xmlns:a="http://schemas.openxmlformats.org/drawingml/2006/main" lIns="0" tIns="0" rIns="0" bIns="0">
+          <a:bodyPr xmlns:a="http://schemas.openxmlformats.org/drawingml/2006/main" wrap="square" lIns="0" tIns="0" rIns="0" bIns="0" anchor="ctr">
             <a:noAutofit/>
           </a:bodyPr>
           <a:lstStyle xmlns:a="http://schemas.openxmlformats.org/drawingml/2006/main"/>
           <a:p xmlns:a="http://schemas.openxmlformats.org/drawingml/2006/main">
             <a:pPr algn="l">
+              <a:lnSpc>
+                <a:spcPct val="100000"/>
+              </a:lnSpc>
               <a:buNone/>
-              <a:defRPr sz="2400">
-                <a:solidFill>
-                  <a:srgbClr val="000000"/>
-                </a:solidFill>
-                <a:latin typeface="Helvetica Neue"/>
-                <a:ea typeface="Helvetica Neue"/>
-                <a:cs typeface="Helvetica Neue"/>
-              </a:defRPr>
-            </a:pPr>
-            <a:r>
-              <a:t>SHIP STATUS</a:t>
+              <a:defRPr sz="1350" b="1">
+                <a:solidFill>
+                  <a:srgbClr val="67E8D3"/>
+                </a:solidFill>
+                <a:latin typeface="Segoe UI"/>
+                <a:ea typeface="Segoe UI"/>
+                <a:cs typeface="Segoe UI"/>
+              </a:defRPr>
+            </a:pPr>
+            <a:r>
+              <a:rPr sz="1350" b="1">
+                <a:solidFill>
+                  <a:srgbClr val="67E8D3"/>
+                </a:solidFill>
+                <a:latin typeface="Segoe UI"/>
+                <a:ea typeface="Segoe UI"/>
+                <a:cs typeface="Segoe UI"/>
+              </a:rPr>
+              <a:t>PUBLIC BUILD  ·  VERIFIED EVIDENCE</a:t>
             </a:r>
           </a:p>
         </p:txBody>
@@ -4861,73 +6511,191 @@
         </p:nvSpPr>
         <p:spPr>
           <a:xfrm xmlns:a="http://schemas.openxmlformats.org/drawingml/2006/main">
-            <a:off x="4095750" y="4953000"/>
-            <a:ext cx="7381875" cy="1123950"/>
+            <a:off x="5238750" y="2857500"/>
+            <a:ext cx="6096000" cy="3009900"/>
           </a:xfrm>
-          <a:prstGeom xmlns:a="http://schemas.openxmlformats.org/drawingml/2006/main" prst="rect">
-            <a:avLst/>
+          <a:prstGeom xmlns:a="http://schemas.openxmlformats.org/drawingml/2006/main" prst="roundRect">
+            <a:avLst>
+              <a:gd name="adj" fmla="val 7595"/>
+            </a:avLst>
           </a:prstGeom>
-          <a:noFill xmlns:a="http://schemas.openxmlformats.org/drawingml/2006/main"/>
-          <a:ln xmlns:a="http://schemas.openxmlformats.org/drawingml/2006/main" w="0">
-            <a:noFill/>
+          <a:solidFill xmlns:a="http://schemas.openxmlformats.org/drawingml/2006/main">
+            <a:srgbClr val="0C1A22"/>
+          </a:solidFill>
+          <a:ln xmlns:a="http://schemas.openxmlformats.org/drawingml/2006/main" w="9525">
+            <a:solidFill>
+              <a:srgbClr val="20353C"/>
+            </a:solidFill>
             <a:prstDash val="solid"/>
           </a:ln>
         </p:spPr>
         <p:txBody>
-          <a:bodyPr xmlns:a="http://schemas.openxmlformats.org/drawingml/2006/main"/>
+          <a:bodyPr xmlns:a="http://schemas.openxmlformats.org/drawingml/2006/main" wrap="square" lIns="285750" tIns="247650" rIns="285750" bIns="209550" anchor="t">
+            <a:noAutofit/>
+          </a:bodyPr>
           <a:lstStyle xmlns:a="http://schemas.openxmlformats.org/drawingml/2006/main"/>
           <a:p xmlns:a="http://schemas.openxmlformats.org/drawingml/2006/main">
-            <a:pPr>
-              <a:buNone/>
-              <a:defRPr sz="1650">
-                <a:solidFill>
-                  <a:srgbClr val="000000"/>
-                </a:solidFill>
-              </a:defRPr>
-            </a:pPr>
-            <a:r>
-              <a:rPr sz="1650">
-                <a:solidFill>
-                  <a:srgbClr val="000000"/>
-                </a:solidFill>
+            <a:pPr algn="l">
+              <a:defRPr sz="1800">
+                <a:solidFill>
+                  <a:srgbClr val="F4F7F5"/>
+                </a:solidFill>
+                <a:latin typeface="Segoe UI"/>
+                <a:ea typeface="Segoe UI"/>
+                <a:cs typeface="Segoe UI"/>
+              </a:defRPr>
+            </a:pPr>
+            <a:r>
+              <a:rPr sz="1600" b="1">
+                <a:solidFill>
+                  <a:srgbClr val="67E8D3"/>
+                </a:solidFill>
+                <a:latin typeface="Segoe UI"/>
+                <a:ea typeface="Segoe UI"/>
+                <a:cs typeface="Segoe UI"/>
+              </a:rPr>
+              <a:t>PUBLIC DEMO</a:t>
+            </a:r>
+          </a:p>
+          <a:p xmlns:a="http://schemas.openxmlformats.org/drawingml/2006/main">
+            <a:pPr algn="l">
+              <a:defRPr sz="1800">
+                <a:solidFill>
+                  <a:srgbClr val="F4F7F5"/>
+                </a:solidFill>
+                <a:latin typeface="Segoe UI"/>
+                <a:ea typeface="Segoe UI"/>
+                <a:cs typeface="Segoe UI"/>
+              </a:defRPr>
+            </a:pPr>
+            <a:r>
+              <a:rPr sz="1600">
+                <a:solidFill>
+                  <a:srgbClr val="F4F7F5"/>
+                </a:solidFill>
+                <a:latin typeface="Segoe UI"/>
+                <a:ea typeface="Segoe UI"/>
+                <a:cs typeface="Segoe UI"/>
+                <a:hlinkClick xmlns:r="http://schemas.openxmlformats.org/officeDocument/2006/relationships" r:id="R0a896506f6904b81"/>
               </a:rPr>
               <a:t>obol-programmable-money.onrender.com</a:t>
             </a:r>
           </a:p>
           <a:p xmlns:a="http://schemas.openxmlformats.org/drawingml/2006/main">
-            <a:pPr>
-              <a:buNone/>
-              <a:defRPr sz="1650">
-                <a:solidFill>
-                  <a:srgbClr val="000000"/>
-                </a:solidFill>
-              </a:defRPr>
-            </a:pPr>
-            <a:r>
-              <a:rPr sz="1650">
-                <a:solidFill>
-                  <a:srgbClr val="000000"/>
-                </a:solidFill>
+            <a:pPr algn="l">
+              <a:defRPr sz="1800">
+                <a:solidFill>
+                  <a:srgbClr val="F4F7F5"/>
+                </a:solidFill>
+                <a:latin typeface="Segoe UI"/>
+                <a:ea typeface="Segoe UI"/>
+                <a:cs typeface="Segoe UI"/>
+              </a:defRPr>
+            </a:pPr>
+            <a:r>
+              <a:rPr sz="1600" b="1">
+                <a:solidFill>
+                  <a:srgbClr val="67E8D3"/>
+                </a:solidFill>
+                <a:latin typeface="Segoe UI"/>
+                <a:ea typeface="Segoe UI"/>
+                <a:cs typeface="Segoe UI"/>
+              </a:rPr>
+              <a:t>PUBLIC CODE</a:t>
+            </a:r>
+          </a:p>
+          <a:p xmlns:a="http://schemas.openxmlformats.org/drawingml/2006/main">
+            <a:pPr algn="l">
+              <a:defRPr sz="1800">
+                <a:solidFill>
+                  <a:srgbClr val="F4F7F5"/>
+                </a:solidFill>
+                <a:latin typeface="Segoe UI"/>
+                <a:ea typeface="Segoe UI"/>
+                <a:cs typeface="Segoe UI"/>
+              </a:defRPr>
+            </a:pPr>
+            <a:r>
+              <a:rPr sz="1600">
+                <a:solidFill>
+                  <a:srgbClr val="F4F7F5"/>
+                </a:solidFill>
+                <a:latin typeface="Segoe UI"/>
+                <a:ea typeface="Segoe UI"/>
+                <a:cs typeface="Segoe UI"/>
+                <a:hlinkClick xmlns:r="http://schemas.openxmlformats.org/officeDocument/2006/relationships" r:id="R7860cecda0834568"/>
               </a:rPr>
               <a:t>github.com/xiangchengzilema/obol-programmable-money</a:t>
             </a:r>
           </a:p>
           <a:p xmlns:a="http://schemas.openxmlformats.org/drawingml/2006/main">
-            <a:pPr>
-              <a:buNone/>
-              <a:defRPr sz="1650">
-                <a:solidFill>
-                  <a:srgbClr val="000000"/>
-                </a:solidFill>
-              </a:defRPr>
-            </a:pPr>
-            <a:r>
-              <a:rPr sz="1650">
-                <a:solidFill>
-                  <a:srgbClr val="000000"/>
-                </a:solidFill>
-              </a:rPr>
-              <a:t>Pitch video: final upload pending</a:t>
+            <a:pPr algn="l">
+              <a:defRPr sz="1800">
+                <a:solidFill>
+                  <a:srgbClr val="F4F7F5"/>
+                </a:solidFill>
+                <a:latin typeface="Segoe UI"/>
+                <a:ea typeface="Segoe UI"/>
+                <a:cs typeface="Segoe UI"/>
+              </a:defRPr>
+            </a:pPr>
+            <a:r>
+              <a:rPr sz="1600" b="1">
+                <a:solidFill>
+                  <a:srgbClr val="67E8D3"/>
+                </a:solidFill>
+                <a:latin typeface="Segoe UI"/>
+                <a:ea typeface="Segoe UI"/>
+                <a:cs typeface="Segoe UI"/>
+              </a:rPr>
+              <a:t>99-SECOND DEMO</a:t>
+            </a:r>
+          </a:p>
+          <a:p xmlns:a="http://schemas.openxmlformats.org/drawingml/2006/main">
+            <a:pPr algn="l">
+              <a:defRPr sz="1800">
+                <a:solidFill>
+                  <a:srgbClr val="F4F7F5"/>
+                </a:solidFill>
+                <a:latin typeface="Segoe UI"/>
+                <a:ea typeface="Segoe UI"/>
+                <a:cs typeface="Segoe UI"/>
+              </a:defRPr>
+            </a:pPr>
+            <a:r>
+              <a:rPr sz="1600">
+                <a:solidFill>
+                  <a:srgbClr val="F4F7F5"/>
+                </a:solidFill>
+                <a:latin typeface="Segoe UI"/>
+                <a:ea typeface="Segoe UI"/>
+                <a:cs typeface="Segoe UI"/>
+                <a:hlinkClick xmlns:r="http://schemas.openxmlformats.org/officeDocument/2006/relationships" r:id="Rd03a15e7139b456d"/>
+              </a:rPr>
+              <a:t>Final MP4 in the public repository</a:t>
+            </a:r>
+          </a:p>
+          <a:p xmlns:a="http://schemas.openxmlformats.org/drawingml/2006/main">
+            <a:pPr algn="l">
+              <a:defRPr sz="1800">
+                <a:solidFill>
+                  <a:srgbClr val="F4F7F5"/>
+                </a:solidFill>
+                <a:latin typeface="Segoe UI"/>
+                <a:ea typeface="Segoe UI"/>
+                <a:cs typeface="Segoe UI"/>
+              </a:defRPr>
+            </a:pPr>
+            <a:r>
+              <a:rPr sz="1600">
+                <a:solidFill>
+                  <a:srgbClr val="9FB3B7"/>
+                </a:solidFill>
+                <a:latin typeface="Segoe UI"/>
+                <a:ea typeface="Segoe UI"/>
+                <a:cs typeface="Segoe UI"/>
+              </a:rPr>
+              <a:t>Public playground: forced mock · Live evidence: separate Arc Testnet evaluation.</a:t>
             </a:r>
           </a:p>
         </p:txBody>
@@ -4948,43 +6716,54 @@
         </p:nvSpPr>
         <p:spPr>
           <a:xfrm xmlns:a="http://schemas.openxmlformats.org/drawingml/2006/main">
-            <a:off x="8858250" y="495300"/>
-            <a:ext cx="2647950" cy="381000"/>
+            <a:off x="8020050" y="495300"/>
+            <a:ext cx="3562350" cy="381000"/>
           </a:xfrm>
           <a:prstGeom xmlns:a="http://schemas.openxmlformats.org/drawingml/2006/main" prst="roundRect">
             <a:avLst>
-              <a:gd name="adj" fmla="val 30000"/>
+              <a:gd name="adj" fmla="val 45000"/>
             </a:avLst>
           </a:prstGeom>
           <a:solidFill xmlns:a="http://schemas.openxmlformats.org/drawingml/2006/main">
-            <a:srgbClr val="091418"/>
+            <a:srgbClr val="0C1A22"/>
           </a:solidFill>
           <a:ln xmlns:a="http://schemas.openxmlformats.org/drawingml/2006/main" w="9525">
             <a:solidFill>
-              <a:srgbClr val="38E8C6"/>
+              <a:srgbClr val="67E8D3"/>
             </a:solidFill>
             <a:prstDash val="solid"/>
           </a:ln>
         </p:spPr>
         <p:txBody>
-          <a:bodyPr xmlns:a="http://schemas.openxmlformats.org/drawingml/2006/main" anchor="ctr"/>
+          <a:bodyPr xmlns:a="http://schemas.openxmlformats.org/drawingml/2006/main" wrap="square" lIns="114300" tIns="38100" rIns="114300" bIns="38100" anchor="ctr">
+            <a:noAutofit/>
+          </a:bodyPr>
           <a:lstStyle xmlns:a="http://schemas.openxmlformats.org/drawingml/2006/main"/>
           <a:p xmlns:a="http://schemas.openxmlformats.org/drawingml/2006/main">
             <a:pPr algn="ctr">
+              <a:lnSpc>
+                <a:spcPct val="100000"/>
+              </a:lnSpc>
               <a:buNone/>
               <a:defRPr sz="1200" b="1">
                 <a:solidFill>
-                  <a:srgbClr val="38E8C6"/>
-                </a:solidFill>
+                  <a:srgbClr val="67E8D3"/>
+                </a:solidFill>
+                <a:latin typeface="Segoe UI"/>
+                <a:ea typeface="Segoe UI"/>
+                <a:cs typeface="Segoe UI"/>
               </a:defRPr>
             </a:pPr>
             <a:r>
               <a:rPr sz="1200" b="1">
                 <a:solidFill>
-                  <a:srgbClr val="38E8C6"/>
-                </a:solidFill>
-              </a:rPr>
-              <a:t>PUBLIC · ARC PROOF VERIFIED</a:t>
+                  <a:srgbClr val="67E8D3"/>
+                </a:solidFill>
+                <a:latin typeface="Segoe UI"/>
+                <a:ea typeface="Segoe UI"/>
+                <a:cs typeface="Segoe UI"/>
+              </a:rPr>
+              <a:t>AGENTIC ECONOMY  ·  SOLO BUILDER</a:t>
             </a:r>
           </a:p>
         </p:txBody>
@@ -5200,6 +6979,24 @@
             </a:outerShdw>
           </a:effectLst>
         </a:effectStyle>
+        <a:effectStyle>
+          <a:effectLst>
+            <a:outerShdw blurRad="342900" dist="138686" dir="4443276">
+              <a:srgbClr val="000000">
+                <a:alpha val="36000"/>
+              </a:srgbClr>
+            </a:outerShdw>
+          </a:effectLst>
+        </a:effectStyle>
+        <a:effectStyle>
+          <a:effectLst>
+            <a:outerShdw blurRad="342900" dist="138686" dir="4443276">
+              <a:srgbClr val="000000">
+                <a:alpha val="34000"/>
+              </a:srgbClr>
+            </a:outerShdw>
+          </a:effectLst>
+        </a:effectStyle>
       </a:effectStyleLst>
       <a:bgFillStyleLst>
         <a:solidFill>
